--- a/slides/agent-challenge-hr.pptx
+++ b/slides/agent-challenge-hr.pptx
@@ -26,6 +26,13 @@
     <p:sldId id="271" r:id="rId22"/>
     <p:sldId id="272" r:id="rId23"/>
     <p:sldId id="273" r:id="rId24"/>
+    <p:sldId id="274" r:id="rId25"/>
+    <p:sldId id="275" r:id="rId26"/>
+    <p:sldId id="276" r:id="rId27"/>
+    <p:sldId id="277" r:id="rId28"/>
+    <p:sldId id="278" r:id="rId29"/>
+    <p:sldId id="279" r:id="rId30"/>
+    <p:sldId id="280" r:id="rId31"/>
   </p:sldIdLst>
   <p:sldSz cx="12192000" cy="6858000"/>
   <p:notesSz cx="6858000" cy="9144000"/>
@@ -1584,6 +1591,76 @@
 </p:notes>
 </file>
 
+<file path=ppt/notesSlides/notesSlide19.xml><?xml version="1.0" encoding="utf-8"?>
+<p:notes xmlns:a="http://schemas.openxmlformats.org/drawingml/2006/main" xmlns:p="http://schemas.openxmlformats.org/presentationml/2006/main" xmlns:r="http://schemas.openxmlformats.org/officeDocument/2006/relationships">
+  <p:cSld>
+    <p:spTree>
+      <p:nvGrpSpPr>
+        <p:cNvPr id="1" name=""/>
+        <p:cNvGrpSpPr/>
+        <p:nvPr/>
+      </p:nvGrpSpPr>
+      <p:grpSpPr>
+        <a:xfrm>
+          <a:off x="0" y="0"/>
+          <a:ext cx="0" cy="0"/>
+          <a:chOff x="0" y="0"/>
+          <a:chExt cx="0" cy="0"/>
+        </a:xfrm>
+      </p:grpSpPr>
+      <p:sp>
+        <p:nvSpPr>
+          <p:cNvPr id="2" name="Slide Image Placeholder 1"/>
+          <p:cNvSpPr>
+            <a:spLocks noGrp="1"/>
+          </p:cNvSpPr>
+          <p:nvPr>
+            <p:ph type="sldImg" idx="2"/>
+          </p:nvPr>
+        </p:nvSpPr>
+        <p:spPr/>
+      </p:sp>
+      <p:sp>
+        <p:nvSpPr>
+          <p:cNvPr id="3" name="Notes Placeholder 2"/>
+          <p:cNvSpPr>
+            <a:spLocks noGrp="1"/>
+          </p:cNvSpPr>
+          <p:nvPr>
+            <p:ph type="body" idx="3" sz="quarter"/>
+          </p:nvPr>
+        </p:nvSpPr>
+        <p:spPr/>
+        <p:txBody>
+          <a:bodyPr/>
+          <a:lstStyle/>
+          <a:p>
+            <a:r>
+              <a:t>Same groups, same reporter rotation if you like. The deliverable is spoken, one minute, three points. Tell them the canvas on the later slide is a guide to structure the conversation, not a form to fill in.</a:t>
+            </a:r>
+          </a:p>
+        </p:txBody>
+      </p:sp>
+      <p:sp>
+        <p:nvSpPr>
+          <p:cNvPr id="4" name="Slide Number Placeholder 3"/>
+          <p:cNvSpPr>
+            <a:spLocks noGrp="1"/>
+          </p:cNvSpPr>
+          <p:nvPr>
+            <p:ph type="sldNum" idx="5" sz="quarter"/>
+          </p:nvPr>
+        </p:nvSpPr>
+        <p:spPr/>
+      </p:sp>
+    </p:spTree>
+  </p:cSld>
+  <p:clrMapOvr>
+    <a:masterClrMapping/>
+  </p:clrMapOvr>
+</p:notes>
+</file>
+
 <file path=ppt/notesSlides/notesSlide2.xml><?xml version="1.0" encoding="utf-8"?>
 <p:notes xmlns:a="http://schemas.openxmlformats.org/drawingml/2006/main" xmlns:p="http://schemas.openxmlformats.org/presentationml/2006/main" xmlns:r="http://schemas.openxmlformats.org/officeDocument/2006/relationships">
   <p:cSld>
@@ -1630,6 +1707,426 @@
           <a:p>
             <a:r>
               <a:t>Timings are for a 30-minute breakout plus a 6-minute report-back. Post the two prompts for Part 1 in the chat when breakouts open, and the session code by voice only.</a:t>
+            </a:r>
+          </a:p>
+        </p:txBody>
+      </p:sp>
+      <p:sp>
+        <p:nvSpPr>
+          <p:cNvPr id="4" name="Slide Number Placeholder 3"/>
+          <p:cNvSpPr>
+            <a:spLocks noGrp="1"/>
+          </p:cNvSpPr>
+          <p:nvPr>
+            <p:ph type="sldNum" idx="5" sz="quarter"/>
+          </p:nvPr>
+        </p:nvSpPr>
+        <p:spPr/>
+      </p:sp>
+    </p:spTree>
+  </p:cSld>
+  <p:clrMapOvr>
+    <a:masterClrMapping/>
+  </p:clrMapOvr>
+</p:notes>
+</file>
+
+<file path=ppt/notesSlides/notesSlide20.xml><?xml version="1.0" encoding="utf-8"?>
+<p:notes xmlns:a="http://schemas.openxmlformats.org/drawingml/2006/main" xmlns:p="http://schemas.openxmlformats.org/presentationml/2006/main" xmlns:r="http://schemas.openxmlformats.org/officeDocument/2006/relationships">
+  <p:cSld>
+    <p:spTree>
+      <p:nvGrpSpPr>
+        <p:cNvPr id="1" name=""/>
+        <p:cNvGrpSpPr/>
+        <p:nvPr/>
+      </p:nvGrpSpPr>
+      <p:grpSpPr>
+        <a:xfrm>
+          <a:off x="0" y="0"/>
+          <a:ext cx="0" cy="0"/>
+          <a:chOff x="0" y="0"/>
+          <a:chExt cx="0" cy="0"/>
+        </a:xfrm>
+      </p:grpSpPr>
+      <p:sp>
+        <p:nvSpPr>
+          <p:cNvPr id="2" name="Slide Image Placeholder 1"/>
+          <p:cNvSpPr>
+            <a:spLocks noGrp="1"/>
+          </p:cNvSpPr>
+          <p:nvPr>
+            <p:ph type="sldImg" idx="2"/>
+          </p:nvPr>
+        </p:nvSpPr>
+        <p:spPr/>
+      </p:sp>
+      <p:sp>
+        <p:nvSpPr>
+          <p:cNvPr id="3" name="Notes Placeholder 2"/>
+          <p:cNvSpPr>
+            <a:spLocks noGrp="1"/>
+          </p:cNvSpPr>
+          <p:nvPr>
+            <p:ph type="body" idx="3" sz="quarter"/>
+          </p:nvPr>
+        </p:nvSpPr>
+        <p:spPr/>
+        <p:txBody>
+          <a:bodyPr/>
+          <a:lstStyle/>
+          <a:p>
+            <a:r>
+              <a:t>Post the timings in the breakout chat. Visit rooms during step 3 and push on one question: where exactly does a person still need to look, and why there?</a:t>
+            </a:r>
+          </a:p>
+        </p:txBody>
+      </p:sp>
+      <p:sp>
+        <p:nvSpPr>
+          <p:cNvPr id="4" name="Slide Number Placeholder 3"/>
+          <p:cNvSpPr>
+            <a:spLocks noGrp="1"/>
+          </p:cNvSpPr>
+          <p:nvPr>
+            <p:ph type="sldNum" idx="5" sz="quarter"/>
+          </p:nvPr>
+        </p:nvSpPr>
+        <p:spPr/>
+      </p:sp>
+    </p:spTree>
+  </p:cSld>
+  <p:clrMapOvr>
+    <a:masterClrMapping/>
+  </p:clrMapOvr>
+</p:notes>
+</file>
+
+<file path=ppt/notesSlides/notesSlide21.xml><?xml version="1.0" encoding="utf-8"?>
+<p:notes xmlns:a="http://schemas.openxmlformats.org/drawingml/2006/main" xmlns:p="http://schemas.openxmlformats.org/presentationml/2006/main" xmlns:r="http://schemas.openxmlformats.org/officeDocument/2006/relationships">
+  <p:cSld>
+    <p:spTree>
+      <p:nvGrpSpPr>
+        <p:cNvPr id="1" name=""/>
+        <p:cNvGrpSpPr/>
+        <p:nvPr/>
+      </p:nvGrpSpPr>
+      <p:grpSpPr>
+        <a:xfrm>
+          <a:off x="0" y="0"/>
+          <a:ext cx="0" cy="0"/>
+          <a:chOff x="0" y="0"/>
+          <a:chExt cx="0" cy="0"/>
+        </a:xfrm>
+      </p:grpSpPr>
+      <p:sp>
+        <p:nvSpPr>
+          <p:cNvPr id="2" name="Slide Image Placeholder 1"/>
+          <p:cNvSpPr>
+            <a:spLocks noGrp="1"/>
+          </p:cNvSpPr>
+          <p:nvPr>
+            <p:ph type="sldImg" idx="2"/>
+          </p:nvPr>
+        </p:nvSpPr>
+        <p:spPr/>
+      </p:sp>
+      <p:sp>
+        <p:nvSpPr>
+          <p:cNvPr id="3" name="Notes Placeholder 2"/>
+          <p:cNvSpPr>
+            <a:spLocks noGrp="1"/>
+          </p:cNvSpPr>
+          <p:nvPr>
+            <p:ph type="body" idx="3" sz="quarter"/>
+          </p:nvPr>
+        </p:nvSpPr>
+        <p:spPr/>
+        <p:txBody>
+          <a:bodyPr/>
+          <a:lstStyle/>
+          <a:p>
+            <a:r>
+              <a:t>The pitch is a description, not a proposal. Stop anyone who starts designing in step 1; that is step 3. The examples show that every function has a request-driven process; the shape is always the same.</a:t>
+            </a:r>
+          </a:p>
+        </p:txBody>
+      </p:sp>
+      <p:sp>
+        <p:nvSpPr>
+          <p:cNvPr id="4" name="Slide Number Placeholder 3"/>
+          <p:cNvSpPr>
+            <a:spLocks noGrp="1"/>
+          </p:cNvSpPr>
+          <p:nvPr>
+            <p:ph type="sldNum" idx="5" sz="quarter"/>
+          </p:nvPr>
+        </p:nvSpPr>
+        <p:spPr/>
+      </p:sp>
+    </p:spTree>
+  </p:cSld>
+  <p:clrMapOvr>
+    <a:masterClrMapping/>
+  </p:clrMapOvr>
+</p:notes>
+</file>
+
+<file path=ppt/notesSlides/notesSlide22.xml><?xml version="1.0" encoding="utf-8"?>
+<p:notes xmlns:a="http://schemas.openxmlformats.org/drawingml/2006/main" xmlns:p="http://schemas.openxmlformats.org/presentationml/2006/main" xmlns:r="http://schemas.openxmlformats.org/officeDocument/2006/relationships">
+  <p:cSld>
+    <p:spTree>
+      <p:nvGrpSpPr>
+        <p:cNvPr id="1" name=""/>
+        <p:cNvGrpSpPr/>
+        <p:nvPr/>
+      </p:nvGrpSpPr>
+      <p:grpSpPr>
+        <a:xfrm>
+          <a:off x="0" y="0"/>
+          <a:ext cx="0" cy="0"/>
+          <a:chOff x="0" y="0"/>
+          <a:chExt cx="0" cy="0"/>
+        </a:xfrm>
+      </p:grpSpPr>
+      <p:sp>
+        <p:nvSpPr>
+          <p:cNvPr id="2" name="Slide Image Placeholder 1"/>
+          <p:cNvSpPr>
+            <a:spLocks noGrp="1"/>
+          </p:cNvSpPr>
+          <p:nvPr>
+            <p:ph type="sldImg" idx="2"/>
+          </p:nvPr>
+        </p:nvSpPr>
+        <p:spPr/>
+      </p:sp>
+      <p:sp>
+        <p:nvSpPr>
+          <p:cNvPr id="3" name="Notes Placeholder 2"/>
+          <p:cNvSpPr>
+            <a:spLocks noGrp="1"/>
+          </p:cNvSpPr>
+          <p:nvPr>
+            <p:ph type="body" idx="3" sz="quarter"/>
+          </p:nvPr>
+        </p:nvSpPr>
+        <p:spPr/>
+        <p:txBody>
+          <a:bodyPr/>
+          <a:lstStyle/>
+          <a:p>
+            <a:r>
+              <a:t>Three minutes. The left column describes the late-delivery case; that is the pattern. The right column is not 'never', it is 'not for a twenty-five-minute exercise'.</a:t>
+            </a:r>
+          </a:p>
+        </p:txBody>
+      </p:sp>
+      <p:sp>
+        <p:nvSpPr>
+          <p:cNvPr id="4" name="Slide Number Placeholder 3"/>
+          <p:cNvSpPr>
+            <a:spLocks noGrp="1"/>
+          </p:cNvSpPr>
+          <p:nvPr>
+            <p:ph type="sldNum" idx="5" sz="quarter"/>
+          </p:nvPr>
+        </p:nvSpPr>
+        <p:spPr/>
+      </p:sp>
+    </p:spTree>
+  </p:cSld>
+  <p:clrMapOvr>
+    <a:masterClrMapping/>
+  </p:clrMapOvr>
+</p:notes>
+</file>
+
+<file path=ppt/notesSlides/notesSlide23.xml><?xml version="1.0" encoding="utf-8"?>
+<p:notes xmlns:a="http://schemas.openxmlformats.org/drawingml/2006/main" xmlns:p="http://schemas.openxmlformats.org/presentationml/2006/main" xmlns:r="http://schemas.openxmlformats.org/officeDocument/2006/relationships">
+  <p:cSld>
+    <p:spTree>
+      <p:nvGrpSpPr>
+        <p:cNvPr id="1" name=""/>
+        <p:cNvGrpSpPr/>
+        <p:nvPr/>
+      </p:nvGrpSpPr>
+      <p:grpSpPr>
+        <a:xfrm>
+          <a:off x="0" y="0"/>
+          <a:ext cx="0" cy="0"/>
+          <a:chOff x="0" y="0"/>
+          <a:chExt cx="0" cy="0"/>
+        </a:xfrm>
+      </p:grpSpPr>
+      <p:sp>
+        <p:nvSpPr>
+          <p:cNvPr id="2" name="Slide Image Placeholder 1"/>
+          <p:cNvSpPr>
+            <a:spLocks noGrp="1"/>
+          </p:cNvSpPr>
+          <p:nvPr>
+            <p:ph type="sldImg" idx="2"/>
+          </p:nvPr>
+        </p:nvSpPr>
+        <p:spPr/>
+      </p:sp>
+      <p:sp>
+        <p:nvSpPr>
+          <p:cNvPr id="3" name="Notes Placeholder 2"/>
+          <p:cNvSpPr>
+            <a:spLocks noGrp="1"/>
+          </p:cNvSpPr>
+          <p:nvPr>
+            <p:ph type="body" idx="3" sz="quarter"/>
+          </p:nvPr>
+        </p:nvSpPr>
+        <p:spPr/>
+        <p:txBody>
+          <a:bodyPr/>
+          <a:lstStyle/>
+          <a:p>
+            <a:r>
+              <a:t>Ten minutes. Top row first, quickly: five boxes, who, how long. Bottom row is the design, in the same five shapes as the late delivery. The three questions at the bottom are the substance of the plenary minute.</a:t>
+            </a:r>
+          </a:p>
+        </p:txBody>
+      </p:sp>
+      <p:sp>
+        <p:nvSpPr>
+          <p:cNvPr id="4" name="Slide Number Placeholder 3"/>
+          <p:cNvSpPr>
+            <a:spLocks noGrp="1"/>
+          </p:cNvSpPr>
+          <p:nvPr>
+            <p:ph type="sldNum" idx="5" sz="quarter"/>
+          </p:nvPr>
+        </p:nvSpPr>
+        <p:spPr/>
+      </p:sp>
+    </p:spTree>
+  </p:cSld>
+  <p:clrMapOvr>
+    <a:masterClrMapping/>
+  </p:clrMapOvr>
+</p:notes>
+</file>
+
+<file path=ppt/notesSlides/notesSlide24.xml><?xml version="1.0" encoding="utf-8"?>
+<p:notes xmlns:a="http://schemas.openxmlformats.org/drawingml/2006/main" xmlns:p="http://schemas.openxmlformats.org/presentationml/2006/main" xmlns:r="http://schemas.openxmlformats.org/officeDocument/2006/relationships">
+  <p:cSld>
+    <p:spTree>
+      <p:nvGrpSpPr>
+        <p:cNvPr id="1" name=""/>
+        <p:cNvGrpSpPr/>
+        <p:nvPr/>
+      </p:nvGrpSpPr>
+      <p:grpSpPr>
+        <a:xfrm>
+          <a:off x="0" y="0"/>
+          <a:ext cx="0" cy="0"/>
+          <a:chOff x="0" y="0"/>
+          <a:chExt cx="0" cy="0"/>
+        </a:xfrm>
+      </p:grpSpPr>
+      <p:sp>
+        <p:nvSpPr>
+          <p:cNvPr id="2" name="Slide Image Placeholder 1"/>
+          <p:cNvSpPr>
+            <a:spLocks noGrp="1"/>
+          </p:cNvSpPr>
+          <p:nvPr>
+            <p:ph type="sldImg" idx="2"/>
+          </p:nvPr>
+        </p:nvSpPr>
+        <p:spPr/>
+      </p:sp>
+      <p:sp>
+        <p:nvSpPr>
+          <p:cNvPr id="3" name="Notes Placeholder 2"/>
+          <p:cNvSpPr>
+            <a:spLocks noGrp="1"/>
+          </p:cNvSpPr>
+          <p:nvPr>
+            <p:ph type="body" idx="3" sz="quarter"/>
+          </p:nvPr>
+        </p:nvSpPr>
+        <p:spPr/>
+        <p:txBody>
+          <a:bodyPr/>
+          <a:lstStyle/>
+          <a:p>
+            <a:r>
+              <a:t>Six groups, six minutes. Note each group's process on a shared board as they speak; the list becomes the portfolio for the next discussion.</a:t>
+            </a:r>
+          </a:p>
+        </p:txBody>
+      </p:sp>
+      <p:sp>
+        <p:nvSpPr>
+          <p:cNvPr id="4" name="Slide Number Placeholder 3"/>
+          <p:cNvSpPr>
+            <a:spLocks noGrp="1"/>
+          </p:cNvSpPr>
+          <p:nvPr>
+            <p:ph type="sldNum" idx="5" sz="quarter"/>
+          </p:nvPr>
+        </p:nvSpPr>
+        <p:spPr/>
+      </p:sp>
+    </p:spTree>
+  </p:cSld>
+  <p:clrMapOvr>
+    <a:masterClrMapping/>
+  </p:clrMapOvr>
+</p:notes>
+</file>
+
+<file path=ppt/notesSlides/notesSlide25.xml><?xml version="1.0" encoding="utf-8"?>
+<p:notes xmlns:a="http://schemas.openxmlformats.org/drawingml/2006/main" xmlns:p="http://schemas.openxmlformats.org/presentationml/2006/main" xmlns:r="http://schemas.openxmlformats.org/officeDocument/2006/relationships">
+  <p:cSld>
+    <p:spTree>
+      <p:nvGrpSpPr>
+        <p:cNvPr id="1" name=""/>
+        <p:cNvGrpSpPr/>
+        <p:nvPr/>
+      </p:nvGrpSpPr>
+      <p:grpSpPr>
+        <a:xfrm>
+          <a:off x="0" y="0"/>
+          <a:ext cx="0" cy="0"/>
+          <a:chOff x="0" y="0"/>
+          <a:chExt cx="0" cy="0"/>
+        </a:xfrm>
+      </p:grpSpPr>
+      <p:sp>
+        <p:nvSpPr>
+          <p:cNvPr id="2" name="Slide Image Placeholder 1"/>
+          <p:cNvSpPr>
+            <a:spLocks noGrp="1"/>
+          </p:cNvSpPr>
+          <p:nvPr>
+            <p:ph type="sldImg" idx="2"/>
+          </p:nvPr>
+        </p:nvSpPr>
+        <p:spPr/>
+      </p:sp>
+      <p:sp>
+        <p:nvSpPr>
+          <p:cNvPr id="3" name="Notes Placeholder 2"/>
+          <p:cNvSpPr>
+            <a:spLocks noGrp="1"/>
+          </p:cNvSpPr>
+          <p:nvPr>
+            <p:ph type="body" idx="3" sz="quarter"/>
+          </p:nvPr>
+        </p:nvSpPr>
+        <p:spPr/>
+        <p:txBody>
+          <a:bodyPr/>
+          <a:lstStyle/>
+          <a:p>
+            <a:r>
+              <a:t>Use after the six minutes. Point to the groups whose answers illustrate each pattern. The closing question turns the exercise into a list of asks: data access, an owner, a limit, a policy.</a:t>
             </a:r>
           </a:p>
         </p:txBody>
@@ -19526,6 +20023,755 @@
 </p:sld>
 </file>
 
+<file path=ppt/slides/slide19.xml><?xml version="1.0" encoding="utf-8"?>
+<p:sld xmlns:a="http://schemas.openxmlformats.org/drawingml/2006/main" xmlns:p="http://schemas.openxmlformats.org/presentationml/2006/main" xmlns:r="http://schemas.openxmlformats.org/officeDocument/2006/relationships">
+  <p:cSld>
+    <p:spTree>
+      <p:nvGrpSpPr>
+        <p:cNvPr id="1" name=""/>
+        <p:cNvGrpSpPr/>
+        <p:nvPr/>
+      </p:nvGrpSpPr>
+      <p:grpSpPr/>
+      <p:sp>
+        <p:nvSpPr>
+          <p:cNvPr id="2" name="TextBox 1"/>
+          <p:cNvSpPr txBox="1"/>
+          <p:nvPr/>
+        </p:nvSpPr>
+        <p:spPr>
+          <a:xfrm>
+            <a:off x="9893808" y="6492240"/>
+            <a:ext cx="2084831" cy="274320"/>
+          </a:xfrm>
+          <a:prstGeom prst="rect">
+            <a:avLst/>
+          </a:prstGeom>
+          <a:noFill/>
+        </p:spPr>
+        <p:txBody>
+          <a:bodyPr wrap="square" anchor="t">
+            <a:spAutoFit/>
+          </a:bodyPr>
+          <a:lstStyle/>
+          <a:p>
+            <a:pPr algn="r">
+              <a:spcAft>
+                <a:spcPts val="400"/>
+              </a:spcAft>
+            </a:pPr>
+            <a:r>
+              <a:rPr sz="1000" b="0" i="0">
+                <a:solidFill>
+                  <a:srgbClr val="6B7280"/>
+                </a:solidFill>
+                <a:latin typeface="Arial"/>
+              </a:rPr>
+              <a:t>19</a:t>
+            </a:r>
+          </a:p>
+        </p:txBody>
+      </p:sp>
+      <p:sp>
+        <p:nvSpPr>
+          <p:cNvPr id="3" name="TextBox 2"/>
+          <p:cNvSpPr txBox="1"/>
+          <p:nvPr/>
+        </p:nvSpPr>
+        <p:spPr>
+          <a:xfrm>
+            <a:off x="838047" y="192024"/>
+            <a:ext cx="10515600" cy="813816"/>
+          </a:xfrm>
+          <a:prstGeom prst="rect">
+            <a:avLst/>
+          </a:prstGeom>
+          <a:noFill/>
+        </p:spPr>
+        <p:txBody>
+          <a:bodyPr wrap="square" anchor="ctr">
+            <a:spAutoFit/>
+          </a:bodyPr>
+          <a:lstStyle/>
+          <a:p>
+            <a:pPr algn="ctr">
+              <a:spcAft>
+                <a:spcPts val="400"/>
+              </a:spcAft>
+            </a:pPr>
+            <a:r>
+              <a:rPr sz="2800" b="1" i="0">
+                <a:solidFill>
+                  <a:srgbClr val="002060"/>
+                </a:solidFill>
+                <a:latin typeface="Arial"/>
+              </a:rPr>
+              <a:t>IN-COURSE EXERCISE 2: REDESIGN ONE PROCESS</a:t>
+            </a:r>
+          </a:p>
+        </p:txBody>
+      </p:sp>
+      <p:cxnSp>
+        <p:nvCxnSpPr>
+          <p:cNvPr id="4" name="Connector 3"/>
+          <p:cNvCxnSpPr/>
+          <p:nvPr/>
+        </p:nvCxnSpPr>
+        <p:spPr>
+          <a:xfrm>
+            <a:off x="0" y="1097280"/>
+            <a:ext cx="12191695" cy="0"/>
+          </a:xfrm>
+          <a:prstGeom prst="line">
+            <a:avLst/>
+          </a:prstGeom>
+          <a:ln w="9525">
+            <a:solidFill>
+              <a:srgbClr val="D5DBE2"/>
+            </a:solidFill>
+          </a:ln>
+        </p:spPr>
+        <p:style>
+          <a:lnRef idx="2">
+            <a:schemeClr val="accent1"/>
+          </a:lnRef>
+          <a:fillRef idx="0">
+            <a:schemeClr val="accent1"/>
+          </a:fillRef>
+          <a:effectRef idx="1">
+            <a:schemeClr val="accent1"/>
+          </a:effectRef>
+          <a:fontRef idx="minor">
+            <a:schemeClr val="tx1"/>
+          </a:fontRef>
+        </p:style>
+      </p:cxnSp>
+      <p:cxnSp>
+        <p:nvCxnSpPr>
+          <p:cNvPr id="5" name="Connector 4"/>
+          <p:cNvCxnSpPr/>
+          <p:nvPr/>
+        </p:nvCxnSpPr>
+        <p:spPr>
+          <a:xfrm>
+            <a:off x="5952744" y="1133856"/>
+            <a:ext cx="292608" cy="0"/>
+          </a:xfrm>
+          <a:prstGeom prst="line">
+            <a:avLst/>
+          </a:prstGeom>
+          <a:ln w="76200">
+            <a:solidFill>
+              <a:srgbClr val="00305C"/>
+            </a:solidFill>
+          </a:ln>
+        </p:spPr>
+        <p:style>
+          <a:lnRef idx="2">
+            <a:schemeClr val="accent1"/>
+          </a:lnRef>
+          <a:fillRef idx="0">
+            <a:schemeClr val="accent1"/>
+          </a:fillRef>
+          <a:effectRef idx="1">
+            <a:schemeClr val="accent1"/>
+          </a:effectRef>
+          <a:fontRef idx="minor">
+            <a:schemeClr val="tx1"/>
+          </a:fontRef>
+        </p:style>
+      </p:cxnSp>
+      <p:sp>
+        <p:nvSpPr>
+          <p:cNvPr id="6" name="TextBox 5"/>
+          <p:cNvSpPr txBox="1"/>
+          <p:nvPr/>
+        </p:nvSpPr>
+        <p:spPr>
+          <a:xfrm>
+            <a:off x="822960" y="1417320"/>
+            <a:ext cx="10515600" cy="640080"/>
+          </a:xfrm>
+          <a:prstGeom prst="rect">
+            <a:avLst/>
+          </a:prstGeom>
+          <a:noFill/>
+        </p:spPr>
+        <p:txBody>
+          <a:bodyPr wrap="square" anchor="t">
+            <a:spAutoFit/>
+          </a:bodyPr>
+          <a:lstStyle/>
+          <a:p>
+            <a:pPr algn="l">
+              <a:spcAft>
+                <a:spcPts val="400"/>
+              </a:spcAft>
+            </a:pPr>
+            <a:r>
+              <a:rPr sz="1700" b="1" i="0">
+                <a:solidFill>
+                  <a:srgbClr val="002060"/>
+                </a:solidFill>
+                <a:latin typeface="Arial"/>
+              </a:rPr>
+              <a:t>Twenty-five minutes in the same groups of six, then one minute per group in plenary.</a:t>
+            </a:r>
+          </a:p>
+        </p:txBody>
+      </p:sp>
+      <p:sp>
+        <p:nvSpPr>
+          <p:cNvPr id="7" name="Rectangle 6"/>
+          <p:cNvSpPr/>
+          <p:nvPr/>
+        </p:nvSpPr>
+        <p:spPr>
+          <a:xfrm>
+            <a:off x="822960" y="2194560"/>
+            <a:ext cx="3383280" cy="3566160"/>
+          </a:xfrm>
+          <a:prstGeom prst="rect">
+            <a:avLst/>
+          </a:prstGeom>
+          <a:solidFill>
+            <a:srgbClr val="EEF1F5"/>
+          </a:solidFill>
+          <a:ln>
+            <a:noFill/>
+          </a:ln>
+          <a:effectLst/>
+        </p:spPr>
+        <p:style>
+          <a:lnRef idx="1">
+            <a:schemeClr val="accent1"/>
+          </a:lnRef>
+          <a:fillRef idx="3">
+            <a:schemeClr val="accent1"/>
+          </a:fillRef>
+          <a:effectRef idx="2">
+            <a:schemeClr val="accent1"/>
+          </a:effectRef>
+          <a:fontRef idx="minor">
+            <a:schemeClr val="lt1"/>
+          </a:fontRef>
+        </p:style>
+        <p:txBody>
+          <a:bodyPr rtlCol="0" anchor="ctr"/>
+          <a:lstStyle/>
+          <a:p>
+            <a:pPr algn="ctr"/>
+          </a:p>
+        </p:txBody>
+      </p:sp>
+      <p:sp>
+        <p:nvSpPr>
+          <p:cNvPr id="8" name="TextBox 7"/>
+          <p:cNvSpPr txBox="1"/>
+          <p:nvPr/>
+        </p:nvSpPr>
+        <p:spPr>
+          <a:xfrm>
+            <a:off x="1005840" y="2331720"/>
+            <a:ext cx="3017520" cy="365760"/>
+          </a:xfrm>
+          <a:prstGeom prst="rect">
+            <a:avLst/>
+          </a:prstGeom>
+          <a:noFill/>
+        </p:spPr>
+        <p:txBody>
+          <a:bodyPr wrap="square" anchor="t">
+            <a:spAutoFit/>
+          </a:bodyPr>
+          <a:lstStyle/>
+          <a:p>
+            <a:pPr algn="l">
+              <a:spcAft>
+                <a:spcPts val="400"/>
+              </a:spcAft>
+            </a:pPr>
+            <a:r>
+              <a:rPr sz="1500" b="1" i="0">
+                <a:solidFill>
+                  <a:srgbClr val="002060"/>
+                </a:solidFill>
+                <a:latin typeface="Arial"/>
+              </a:rPr>
+              <a:t>What you do</a:t>
+            </a:r>
+          </a:p>
+        </p:txBody>
+      </p:sp>
+      <p:sp>
+        <p:nvSpPr>
+          <p:cNvPr id="9" name="TextBox 8"/>
+          <p:cNvSpPr txBox="1"/>
+          <p:nvPr/>
+        </p:nvSpPr>
+        <p:spPr>
+          <a:xfrm>
+            <a:off x="1005840" y="2743200"/>
+            <a:ext cx="3017520" cy="2880360"/>
+          </a:xfrm>
+          <a:prstGeom prst="rect">
+            <a:avLst/>
+          </a:prstGeom>
+          <a:noFill/>
+        </p:spPr>
+        <p:txBody>
+          <a:bodyPr wrap="square" anchor="t">
+            <a:spAutoFit/>
+          </a:bodyPr>
+          <a:lstStyle/>
+          <a:p>
+            <a:pPr algn="l" marL="201168" indent="-182880">
+              <a:spcAft>
+                <a:spcPts val="500"/>
+              </a:spcAft>
+              <a:buChar char="•"/>
+            </a:pPr>
+            <a:r>
+              <a:rPr sz="1300" b="0" i="0">
+                <a:solidFill>
+                  <a:srgbClr val="000000"/>
+                </a:solidFill>
+                <a:latin typeface="Arial"/>
+              </a:rPr>
+              <a:t>Each person pitches one process from their own job that starts with a request and today runs on hand-offs</a:t>
+            </a:r>
+          </a:p>
+          <a:p>
+            <a:pPr algn="l" marL="201168" indent="-182880">
+              <a:spcAft>
+                <a:spcPts val="500"/>
+              </a:spcAft>
+              <a:buChar char="•"/>
+            </a:pPr>
+            <a:r>
+              <a:rPr sz="1300" b="0" i="0">
+                <a:solidFill>
+                  <a:srgbClr val="000000"/>
+                </a:solidFill>
+                <a:latin typeface="Arial"/>
+              </a:rPr>
+              <a:t>The group picks one</a:t>
+            </a:r>
+          </a:p>
+          <a:p>
+            <a:pPr algn="l" marL="201168" indent="-182880">
+              <a:spcAft>
+                <a:spcPts val="500"/>
+              </a:spcAft>
+              <a:buChar char="•"/>
+            </a:pPr>
+            <a:r>
+              <a:rPr sz="1300" b="0" i="0">
+                <a:solidFill>
+                  <a:srgbClr val="000000"/>
+                </a:solidFill>
+                <a:latin typeface="Arial"/>
+              </a:rPr>
+              <a:t>The group maps it: as it is today, and with agents</a:t>
+            </a:r>
+          </a:p>
+          <a:p>
+            <a:pPr algn="l" marL="201168" indent="-182880">
+              <a:spcAft>
+                <a:spcPts val="500"/>
+              </a:spcAft>
+              <a:buChar char="•"/>
+            </a:pPr>
+            <a:r>
+              <a:rPr sz="1300" b="0" i="0">
+                <a:solidFill>
+                  <a:srgbClr val="000000"/>
+                </a:solidFill>
+                <a:latin typeface="Arial"/>
+              </a:rPr>
+              <a:t>Agree the one-minute answer</a:t>
+            </a:r>
+          </a:p>
+        </p:txBody>
+      </p:sp>
+      <p:sp>
+        <p:nvSpPr>
+          <p:cNvPr id="10" name="Rectangle 9"/>
+          <p:cNvSpPr/>
+          <p:nvPr/>
+        </p:nvSpPr>
+        <p:spPr>
+          <a:xfrm>
+            <a:off x="4407408" y="2194560"/>
+            <a:ext cx="3383280" cy="3566160"/>
+          </a:xfrm>
+          <a:prstGeom prst="rect">
+            <a:avLst/>
+          </a:prstGeom>
+          <a:solidFill>
+            <a:srgbClr val="EEF1F5"/>
+          </a:solidFill>
+          <a:ln>
+            <a:noFill/>
+          </a:ln>
+          <a:effectLst/>
+        </p:spPr>
+        <p:style>
+          <a:lnRef idx="1">
+            <a:schemeClr val="accent1"/>
+          </a:lnRef>
+          <a:fillRef idx="3">
+            <a:schemeClr val="accent1"/>
+          </a:fillRef>
+          <a:effectRef idx="2">
+            <a:schemeClr val="accent1"/>
+          </a:effectRef>
+          <a:fontRef idx="minor">
+            <a:schemeClr val="lt1"/>
+          </a:fontRef>
+        </p:style>
+        <p:txBody>
+          <a:bodyPr rtlCol="0" anchor="ctr"/>
+          <a:lstStyle/>
+          <a:p>
+            <a:pPr algn="ctr"/>
+          </a:p>
+        </p:txBody>
+      </p:sp>
+      <p:sp>
+        <p:nvSpPr>
+          <p:cNvPr id="11" name="TextBox 10"/>
+          <p:cNvSpPr txBox="1"/>
+          <p:nvPr/>
+        </p:nvSpPr>
+        <p:spPr>
+          <a:xfrm>
+            <a:off x="4590288" y="2331720"/>
+            <a:ext cx="3017520" cy="365760"/>
+          </a:xfrm>
+          <a:prstGeom prst="rect">
+            <a:avLst/>
+          </a:prstGeom>
+          <a:noFill/>
+        </p:spPr>
+        <p:txBody>
+          <a:bodyPr wrap="square" anchor="t">
+            <a:spAutoFit/>
+          </a:bodyPr>
+          <a:lstStyle/>
+          <a:p>
+            <a:pPr algn="l">
+              <a:spcAft>
+                <a:spcPts val="400"/>
+              </a:spcAft>
+            </a:pPr>
+            <a:r>
+              <a:rPr sz="1500" b="1" i="0">
+                <a:solidFill>
+                  <a:srgbClr val="002060"/>
+                </a:solidFill>
+                <a:latin typeface="Arial"/>
+              </a:rPr>
+              <a:t>What you bring back</a:t>
+            </a:r>
+          </a:p>
+        </p:txBody>
+      </p:sp>
+      <p:sp>
+        <p:nvSpPr>
+          <p:cNvPr id="12" name="TextBox 11"/>
+          <p:cNvSpPr txBox="1"/>
+          <p:nvPr/>
+        </p:nvSpPr>
+        <p:spPr>
+          <a:xfrm>
+            <a:off x="4590288" y="2743200"/>
+            <a:ext cx="3017520" cy="2880360"/>
+          </a:xfrm>
+          <a:prstGeom prst="rect">
+            <a:avLst/>
+          </a:prstGeom>
+          <a:noFill/>
+        </p:spPr>
+        <p:txBody>
+          <a:bodyPr wrap="square" anchor="t">
+            <a:spAutoFit/>
+          </a:bodyPr>
+          <a:lstStyle/>
+          <a:p>
+            <a:pPr algn="l" marL="201168" indent="-182880">
+              <a:spcAft>
+                <a:spcPts val="500"/>
+              </a:spcAft>
+              <a:buChar char="•"/>
+            </a:pPr>
+            <a:r>
+              <a:rPr sz="1300" b="0" i="0">
+                <a:solidFill>
+                  <a:srgbClr val="000000"/>
+                </a:solidFill>
+                <a:latin typeface="Arial"/>
+              </a:rPr>
+              <a:t>Which process you picked, in one sentence</a:t>
+            </a:r>
+          </a:p>
+          <a:p>
+            <a:pPr algn="l" marL="201168" indent="-182880">
+              <a:spcAft>
+                <a:spcPts val="500"/>
+              </a:spcAft>
+              <a:buChar char="•"/>
+            </a:pPr>
+            <a:r>
+              <a:rPr sz="1300" b="0" i="0">
+                <a:solidFill>
+                  <a:srgbClr val="000000"/>
+                </a:solidFill>
+                <a:latin typeface="Arial"/>
+              </a:rPr>
+              <a:t>Why and how agents help: where the waiting is, what is rule, what is judgement</a:t>
+            </a:r>
+          </a:p>
+          <a:p>
+            <a:pPr algn="l" marL="201168" indent="-182880">
+              <a:spcAft>
+                <a:spcPts val="500"/>
+              </a:spcAft>
+              <a:buChar char="•"/>
+            </a:pPr>
+            <a:r>
+              <a:rPr sz="1300" b="0" i="0">
+                <a:solidFill>
+                  <a:srgbClr val="000000"/>
+                </a:solidFill>
+                <a:latin typeface="Arial"/>
+              </a:rPr>
+              <a:t>The high-level design: intake, checks, decision, human line, response</a:t>
+            </a:r>
+          </a:p>
+        </p:txBody>
+      </p:sp>
+      <p:sp>
+        <p:nvSpPr>
+          <p:cNvPr id="13" name="Rectangle 12"/>
+          <p:cNvSpPr/>
+          <p:nvPr/>
+        </p:nvSpPr>
+        <p:spPr>
+          <a:xfrm>
+            <a:off x="7991856" y="2194560"/>
+            <a:ext cx="3383280" cy="3566160"/>
+          </a:xfrm>
+          <a:prstGeom prst="rect">
+            <a:avLst/>
+          </a:prstGeom>
+          <a:solidFill>
+            <a:srgbClr val="EEF1F5"/>
+          </a:solidFill>
+          <a:ln>
+            <a:noFill/>
+          </a:ln>
+          <a:effectLst/>
+        </p:spPr>
+        <p:style>
+          <a:lnRef idx="1">
+            <a:schemeClr val="accent1"/>
+          </a:lnRef>
+          <a:fillRef idx="3">
+            <a:schemeClr val="accent1"/>
+          </a:fillRef>
+          <a:effectRef idx="2">
+            <a:schemeClr val="accent1"/>
+          </a:effectRef>
+          <a:fontRef idx="minor">
+            <a:schemeClr val="lt1"/>
+          </a:fontRef>
+        </p:style>
+        <p:txBody>
+          <a:bodyPr rtlCol="0" anchor="ctr"/>
+          <a:lstStyle/>
+          <a:p>
+            <a:pPr algn="ctr"/>
+          </a:p>
+        </p:txBody>
+      </p:sp>
+      <p:sp>
+        <p:nvSpPr>
+          <p:cNvPr id="14" name="TextBox 13"/>
+          <p:cNvSpPr txBox="1"/>
+          <p:nvPr/>
+        </p:nvSpPr>
+        <p:spPr>
+          <a:xfrm>
+            <a:off x="8174736" y="2331720"/>
+            <a:ext cx="3017520" cy="365760"/>
+          </a:xfrm>
+          <a:prstGeom prst="rect">
+            <a:avLst/>
+          </a:prstGeom>
+          <a:noFill/>
+        </p:spPr>
+        <p:txBody>
+          <a:bodyPr wrap="square" anchor="t">
+            <a:spAutoFit/>
+          </a:bodyPr>
+          <a:lstStyle/>
+          <a:p>
+            <a:pPr algn="l">
+              <a:spcAft>
+                <a:spcPts val="400"/>
+              </a:spcAft>
+            </a:pPr>
+            <a:r>
+              <a:rPr sz="1500" b="1" i="0">
+                <a:solidFill>
+                  <a:srgbClr val="002060"/>
+                </a:solidFill>
+                <a:latin typeface="Arial"/>
+              </a:rPr>
+              <a:t>Rules of the room</a:t>
+            </a:r>
+          </a:p>
+        </p:txBody>
+      </p:sp>
+      <p:sp>
+        <p:nvSpPr>
+          <p:cNvPr id="15" name="TextBox 14"/>
+          <p:cNvSpPr txBox="1"/>
+          <p:nvPr/>
+        </p:nvSpPr>
+        <p:spPr>
+          <a:xfrm>
+            <a:off x="8174736" y="2743200"/>
+            <a:ext cx="3017520" cy="2880360"/>
+          </a:xfrm>
+          <a:prstGeom prst="rect">
+            <a:avLst/>
+          </a:prstGeom>
+          <a:noFill/>
+        </p:spPr>
+        <p:txBody>
+          <a:bodyPr wrap="square" anchor="t">
+            <a:spAutoFit/>
+          </a:bodyPr>
+          <a:lstStyle/>
+          <a:p>
+            <a:pPr algn="l" marL="201168" indent="-182880">
+              <a:spcAft>
+                <a:spcPts val="500"/>
+              </a:spcAft>
+              <a:buChar char="•"/>
+            </a:pPr>
+            <a:r>
+              <a:rPr sz="1300" b="0" i="0">
+                <a:solidFill>
+                  <a:srgbClr val="000000"/>
+                </a:solidFill>
+                <a:latin typeface="Arial"/>
+              </a:rPr>
+              <a:t>Real processes only, from someone in the group</a:t>
+            </a:r>
+          </a:p>
+          <a:p>
+            <a:pPr algn="l" marL="201168" indent="-182880">
+              <a:spcAft>
+                <a:spcPts val="500"/>
+              </a:spcAft>
+              <a:buChar char="•"/>
+            </a:pPr>
+            <a:r>
+              <a:rPr sz="1300" b="0" i="0">
+                <a:solidFill>
+                  <a:srgbClr val="000000"/>
+                </a:solidFill>
+                <a:latin typeface="Arial"/>
+              </a:rPr>
+              <a:t>No technology names; describe what the agent reads, checks, decides and does</a:t>
+            </a:r>
+          </a:p>
+          <a:p>
+            <a:pPr algn="l" marL="201168" indent="-182880">
+              <a:spcAft>
+                <a:spcPts val="500"/>
+              </a:spcAft>
+              <a:buChar char="•"/>
+            </a:pPr>
+            <a:r>
+              <a:rPr sz="1300" b="0" i="0">
+                <a:solidFill>
+                  <a:srgbClr val="000000"/>
+                </a:solidFill>
+                <a:latin typeface="Arial"/>
+              </a:rPr>
+              <a:t>The person does not disappear: say where they sit and why</a:t>
+            </a:r>
+          </a:p>
+          <a:p>
+            <a:pPr algn="l" marL="201168" indent="-182880">
+              <a:spcAft>
+                <a:spcPts val="500"/>
+              </a:spcAft>
+              <a:buChar char="•"/>
+            </a:pPr>
+            <a:r>
+              <a:rPr sz="1300" b="0" i="0">
+                <a:solidFill>
+                  <a:srgbClr val="000000"/>
+                </a:solidFill>
+                <a:latin typeface="Arial"/>
+              </a:rPr>
+              <a:t>One reporter, sixty seconds, no slides needed</a:t>
+            </a:r>
+          </a:p>
+        </p:txBody>
+      </p:sp>
+      <p:sp>
+        <p:nvSpPr>
+          <p:cNvPr id="16" name="TextBox 15"/>
+          <p:cNvSpPr txBox="1"/>
+          <p:nvPr/>
+        </p:nvSpPr>
+        <p:spPr>
+          <a:xfrm>
+            <a:off x="822960" y="5943600"/>
+            <a:ext cx="10515600" cy="365760"/>
+          </a:xfrm>
+          <a:prstGeom prst="rect">
+            <a:avLst/>
+          </a:prstGeom>
+          <a:noFill/>
+        </p:spPr>
+        <p:txBody>
+          <a:bodyPr wrap="square" anchor="t">
+            <a:spAutoFit/>
+          </a:bodyPr>
+          <a:lstStyle/>
+          <a:p>
+            <a:pPr algn="l">
+              <a:spcAft>
+                <a:spcPts val="400"/>
+              </a:spcAft>
+            </a:pPr>
+            <a:r>
+              <a:rPr sz="1200" b="0" i="1">
+                <a:solidFill>
+                  <a:srgbClr val="6B7280"/>
+                </a:solidFill>
+                <a:latin typeface="Arial"/>
+              </a:rPr>
+              <a:t>Use the late-delivery example as the pattern, not as the answer.</a:t>
+            </a:r>
+          </a:p>
+        </p:txBody>
+      </p:sp>
+    </p:spTree>
+  </p:cSld>
+  <p:clrMapOvr>
+    <a:masterClrMapping/>
+  </p:clrMapOvr>
+</p:sld>
+</file>
+
 <file path=ppt/slides/slide2.xml><?xml version="1.0" encoding="utf-8"?>
 <p:sld xmlns:a="http://schemas.openxmlformats.org/drawingml/2006/main" xmlns:p="http://schemas.openxmlformats.org/presentationml/2006/main" xmlns:r="http://schemas.openxmlformats.org/officeDocument/2006/relationships">
   <p:cSld>
@@ -20759,6 +22005,6629 @@
                 <a:latin typeface="Arial"/>
               </a:rPr>
               <a:t>Keep to the clock. Part 2 is where the learning is; if Part 1 runs long, cut it to two questions.</a:t>
+            </a:r>
+          </a:p>
+        </p:txBody>
+      </p:sp>
+    </p:spTree>
+  </p:cSld>
+  <p:clrMapOvr>
+    <a:masterClrMapping/>
+  </p:clrMapOvr>
+</p:sld>
+</file>
+
+<file path=ppt/slides/slide20.xml><?xml version="1.0" encoding="utf-8"?>
+<p:sld xmlns:a="http://schemas.openxmlformats.org/drawingml/2006/main" xmlns:p="http://schemas.openxmlformats.org/presentationml/2006/main" xmlns:r="http://schemas.openxmlformats.org/officeDocument/2006/relationships">
+  <p:cSld>
+    <p:spTree>
+      <p:nvGrpSpPr>
+        <p:cNvPr id="1" name=""/>
+        <p:cNvGrpSpPr/>
+        <p:nvPr/>
+      </p:nvGrpSpPr>
+      <p:grpSpPr/>
+      <p:sp>
+        <p:nvSpPr>
+          <p:cNvPr id="2" name="TextBox 1"/>
+          <p:cNvSpPr txBox="1"/>
+          <p:nvPr/>
+        </p:nvSpPr>
+        <p:spPr>
+          <a:xfrm>
+            <a:off x="9893808" y="6492240"/>
+            <a:ext cx="2084831" cy="274320"/>
+          </a:xfrm>
+          <a:prstGeom prst="rect">
+            <a:avLst/>
+          </a:prstGeom>
+          <a:noFill/>
+        </p:spPr>
+        <p:txBody>
+          <a:bodyPr wrap="square" anchor="t">
+            <a:spAutoFit/>
+          </a:bodyPr>
+          <a:lstStyle/>
+          <a:p>
+            <a:pPr algn="r">
+              <a:spcAft>
+                <a:spcPts val="400"/>
+              </a:spcAft>
+            </a:pPr>
+            <a:r>
+              <a:rPr sz="1000" b="0" i="0">
+                <a:solidFill>
+                  <a:srgbClr val="6B7280"/>
+                </a:solidFill>
+                <a:latin typeface="Arial"/>
+              </a:rPr>
+              <a:t>20</a:t>
+            </a:r>
+          </a:p>
+        </p:txBody>
+      </p:sp>
+      <p:sp>
+        <p:nvSpPr>
+          <p:cNvPr id="3" name="TextBox 2"/>
+          <p:cNvSpPr txBox="1"/>
+          <p:nvPr/>
+        </p:nvSpPr>
+        <p:spPr>
+          <a:xfrm>
+            <a:off x="838047" y="192024"/>
+            <a:ext cx="10515600" cy="813816"/>
+          </a:xfrm>
+          <a:prstGeom prst="rect">
+            <a:avLst/>
+          </a:prstGeom>
+          <a:noFill/>
+        </p:spPr>
+        <p:txBody>
+          <a:bodyPr wrap="square" anchor="ctr">
+            <a:spAutoFit/>
+          </a:bodyPr>
+          <a:lstStyle/>
+          <a:p>
+            <a:pPr algn="ctr">
+              <a:spcAft>
+                <a:spcPts val="400"/>
+              </a:spcAft>
+            </a:pPr>
+            <a:r>
+              <a:rPr sz="2800" b="1" i="0">
+                <a:solidFill>
+                  <a:srgbClr val="002060"/>
+                </a:solidFill>
+                <a:latin typeface="Arial"/>
+              </a:rPr>
+              <a:t>TWENTY-FIVE MINUTES, FOUR STEPS</a:t>
+            </a:r>
+          </a:p>
+        </p:txBody>
+      </p:sp>
+      <p:cxnSp>
+        <p:nvCxnSpPr>
+          <p:cNvPr id="4" name="Connector 3"/>
+          <p:cNvCxnSpPr/>
+          <p:nvPr/>
+        </p:nvCxnSpPr>
+        <p:spPr>
+          <a:xfrm>
+            <a:off x="0" y="1097280"/>
+            <a:ext cx="12191695" cy="0"/>
+          </a:xfrm>
+          <a:prstGeom prst="line">
+            <a:avLst/>
+          </a:prstGeom>
+          <a:ln w="9525">
+            <a:solidFill>
+              <a:srgbClr val="D5DBE2"/>
+            </a:solidFill>
+          </a:ln>
+        </p:spPr>
+        <p:style>
+          <a:lnRef idx="2">
+            <a:schemeClr val="accent1"/>
+          </a:lnRef>
+          <a:fillRef idx="0">
+            <a:schemeClr val="accent1"/>
+          </a:fillRef>
+          <a:effectRef idx="1">
+            <a:schemeClr val="accent1"/>
+          </a:effectRef>
+          <a:fontRef idx="minor">
+            <a:schemeClr val="tx1"/>
+          </a:fontRef>
+        </p:style>
+      </p:cxnSp>
+      <p:cxnSp>
+        <p:nvCxnSpPr>
+          <p:cNvPr id="5" name="Connector 4"/>
+          <p:cNvCxnSpPr/>
+          <p:nvPr/>
+        </p:nvCxnSpPr>
+        <p:spPr>
+          <a:xfrm>
+            <a:off x="5952744" y="1133856"/>
+            <a:ext cx="292608" cy="0"/>
+          </a:xfrm>
+          <a:prstGeom prst="line">
+            <a:avLst/>
+          </a:prstGeom>
+          <a:ln w="76200">
+            <a:solidFill>
+              <a:srgbClr val="00305C"/>
+            </a:solidFill>
+          </a:ln>
+        </p:spPr>
+        <p:style>
+          <a:lnRef idx="2">
+            <a:schemeClr val="accent1"/>
+          </a:lnRef>
+          <a:fillRef idx="0">
+            <a:schemeClr val="accent1"/>
+          </a:fillRef>
+          <a:effectRef idx="1">
+            <a:schemeClr val="accent1"/>
+          </a:effectRef>
+          <a:fontRef idx="minor">
+            <a:schemeClr val="tx1"/>
+          </a:fontRef>
+        </p:style>
+      </p:cxnSp>
+      <p:cxnSp>
+        <p:nvCxnSpPr>
+          <p:cNvPr id="6" name="Connector 5"/>
+          <p:cNvCxnSpPr/>
+          <p:nvPr/>
+        </p:nvCxnSpPr>
+        <p:spPr>
+          <a:xfrm>
+            <a:off x="896112" y="2304288"/>
+            <a:ext cx="10296144" cy="0"/>
+          </a:xfrm>
+          <a:prstGeom prst="line">
+            <a:avLst/>
+          </a:prstGeom>
+          <a:ln w="28575">
+            <a:solidFill>
+              <a:srgbClr val="B9975B"/>
+            </a:solidFill>
+            <a:tailEnd type="triangle"/>
+          </a:ln>
+        </p:spPr>
+        <p:style>
+          <a:lnRef idx="2">
+            <a:schemeClr val="accent1"/>
+          </a:lnRef>
+          <a:fillRef idx="0">
+            <a:schemeClr val="accent1"/>
+          </a:fillRef>
+          <a:effectRef idx="1">
+            <a:schemeClr val="accent1"/>
+          </a:effectRef>
+          <a:fontRef idx="minor">
+            <a:schemeClr val="tx1"/>
+          </a:fontRef>
+        </p:style>
+      </p:cxnSp>
+      <p:cxnSp>
+        <p:nvCxnSpPr>
+          <p:cNvPr id="7" name="Connector 6"/>
+          <p:cNvCxnSpPr/>
+          <p:nvPr/>
+        </p:nvCxnSpPr>
+        <p:spPr>
+          <a:xfrm>
+            <a:off x="982980" y="2276856"/>
+            <a:ext cx="0" cy="2414016"/>
+          </a:xfrm>
+          <a:prstGeom prst="line">
+            <a:avLst/>
+          </a:prstGeom>
+          <a:ln w="12700">
+            <a:solidFill>
+              <a:srgbClr val="B9975B"/>
+            </a:solidFill>
+          </a:ln>
+        </p:spPr>
+        <p:style>
+          <a:lnRef idx="2">
+            <a:schemeClr val="accent1"/>
+          </a:lnRef>
+          <a:fillRef idx="0">
+            <a:schemeClr val="accent1"/>
+          </a:fillRef>
+          <a:effectRef idx="1">
+            <a:schemeClr val="accent1"/>
+          </a:effectRef>
+          <a:fontRef idx="minor">
+            <a:schemeClr val="tx1"/>
+          </a:fontRef>
+        </p:style>
+      </p:cxnSp>
+      <p:sp>
+        <p:nvSpPr>
+          <p:cNvPr id="8" name="Oval 7"/>
+          <p:cNvSpPr/>
+          <p:nvPr/>
+        </p:nvSpPr>
+        <p:spPr>
+          <a:xfrm>
+            <a:off x="768096" y="2093976"/>
+            <a:ext cx="429768" cy="429768"/>
+          </a:xfrm>
+          <a:prstGeom prst="ellipse">
+            <a:avLst/>
+          </a:prstGeom>
+          <a:solidFill>
+            <a:srgbClr val="FFFFFF"/>
+          </a:solidFill>
+          <a:ln w="19050">
+            <a:solidFill>
+              <a:srgbClr val="B9975B"/>
+            </a:solidFill>
+          </a:ln>
+          <a:effectLst/>
+        </p:spPr>
+        <p:style>
+          <a:lnRef idx="1">
+            <a:schemeClr val="accent1"/>
+          </a:lnRef>
+          <a:fillRef idx="3">
+            <a:schemeClr val="accent1"/>
+          </a:fillRef>
+          <a:effectRef idx="2">
+            <a:schemeClr val="accent1"/>
+          </a:effectRef>
+          <a:fontRef idx="minor">
+            <a:schemeClr val="lt1"/>
+          </a:fontRef>
+        </p:style>
+        <p:txBody>
+          <a:bodyPr rtlCol="0" anchor="ctr"/>
+          <a:lstStyle/>
+          <a:p>
+            <a:pPr algn="ctr"/>
+          </a:p>
+        </p:txBody>
+      </p:sp>
+      <p:sp>
+        <p:nvSpPr>
+          <p:cNvPr id="9" name="TextBox 8"/>
+          <p:cNvSpPr txBox="1"/>
+          <p:nvPr/>
+        </p:nvSpPr>
+        <p:spPr>
+          <a:xfrm>
+            <a:off x="1271016" y="2624328"/>
+            <a:ext cx="2194560" cy="457200"/>
+          </a:xfrm>
+          <a:prstGeom prst="rect">
+            <a:avLst/>
+          </a:prstGeom>
+          <a:noFill/>
+        </p:spPr>
+        <p:txBody>
+          <a:bodyPr wrap="square" anchor="t">
+            <a:spAutoFit/>
+          </a:bodyPr>
+          <a:lstStyle/>
+          <a:p>
+            <a:pPr algn="l">
+              <a:spcAft>
+                <a:spcPts val="400"/>
+              </a:spcAft>
+            </a:pPr>
+            <a:r>
+              <a:rPr sz="1600" b="1" i="0">
+                <a:solidFill>
+                  <a:srgbClr val="000000"/>
+                </a:solidFill>
+                <a:latin typeface="Arial"/>
+              </a:rPr>
+              <a:t>Six pitches</a:t>
+            </a:r>
+          </a:p>
+        </p:txBody>
+      </p:sp>
+      <p:sp>
+        <p:nvSpPr>
+          <p:cNvPr id="10" name="TextBox 9"/>
+          <p:cNvSpPr txBox="1"/>
+          <p:nvPr/>
+        </p:nvSpPr>
+        <p:spPr>
+          <a:xfrm>
+            <a:off x="1271016" y="3063240"/>
+            <a:ext cx="2194560" cy="1280160"/>
+          </a:xfrm>
+          <a:prstGeom prst="rect">
+            <a:avLst/>
+          </a:prstGeom>
+          <a:noFill/>
+        </p:spPr>
+        <p:txBody>
+          <a:bodyPr wrap="square" anchor="t">
+            <a:spAutoFit/>
+          </a:bodyPr>
+          <a:lstStyle/>
+          <a:p>
+            <a:pPr algn="l">
+              <a:spcAft>
+                <a:spcPts val="400"/>
+              </a:spcAft>
+            </a:pPr>
+            <a:r>
+              <a:rPr sz="1200" b="0" i="0">
+                <a:solidFill>
+                  <a:srgbClr val="000000"/>
+                </a:solidFill>
+                <a:latin typeface="Arial"/>
+              </a:rPr>
+              <a:t>One minute each: the request that starts it, the steps, who touches it, where it waits, what good looks like.</a:t>
+            </a:r>
+          </a:p>
+        </p:txBody>
+      </p:sp>
+      <p:sp>
+        <p:nvSpPr>
+          <p:cNvPr id="11" name="Rounded Rectangle 10"/>
+          <p:cNvSpPr/>
+          <p:nvPr/>
+        </p:nvSpPr>
+        <p:spPr>
+          <a:xfrm>
+            <a:off x="914400" y="4306824"/>
+            <a:ext cx="2057400" cy="320040"/>
+          </a:xfrm>
+          <a:prstGeom prst="roundRect">
+            <a:avLst/>
+          </a:prstGeom>
+          <a:solidFill>
+            <a:srgbClr val="00305C"/>
+          </a:solidFill>
+          <a:ln>
+            <a:noFill/>
+          </a:ln>
+          <a:effectLst/>
+        </p:spPr>
+        <p:style>
+          <a:lnRef idx="1">
+            <a:schemeClr val="accent1"/>
+          </a:lnRef>
+          <a:fillRef idx="3">
+            <a:schemeClr val="accent1"/>
+          </a:fillRef>
+          <a:effectRef idx="2">
+            <a:schemeClr val="accent1"/>
+          </a:effectRef>
+          <a:fontRef idx="minor">
+            <a:schemeClr val="lt1"/>
+          </a:fontRef>
+        </p:style>
+        <p:txBody>
+          <a:bodyPr rtlCol="0" anchor="ctr" tIns="0" bIns="0"/>
+          <a:lstStyle/>
+          <a:p>
+            <a:pPr algn="ctr"/>
+            <a:r>
+              <a:rPr sz="1600" b="1" i="0">
+                <a:solidFill>
+                  <a:srgbClr val="FFFFFF"/>
+                </a:solidFill>
+                <a:latin typeface="Arial"/>
+              </a:rPr>
+              <a:t>Step 1 · pitch</a:t>
+            </a:r>
+          </a:p>
+        </p:txBody>
+      </p:sp>
+      <p:sp>
+        <p:nvSpPr>
+          <p:cNvPr id="12" name="TextBox 11"/>
+          <p:cNvSpPr txBox="1"/>
+          <p:nvPr/>
+        </p:nvSpPr>
+        <p:spPr>
+          <a:xfrm>
+            <a:off x="914400" y="4681728"/>
+            <a:ext cx="2057400" cy="320040"/>
+          </a:xfrm>
+          <a:prstGeom prst="rect">
+            <a:avLst/>
+          </a:prstGeom>
+          <a:noFill/>
+        </p:spPr>
+        <p:txBody>
+          <a:bodyPr wrap="square" anchor="t">
+            <a:spAutoFit/>
+          </a:bodyPr>
+          <a:lstStyle/>
+          <a:p>
+            <a:pPr algn="ctr">
+              <a:spcAft>
+                <a:spcPts val="400"/>
+              </a:spcAft>
+            </a:pPr>
+            <a:r>
+              <a:rPr sz="1200" b="0" i="0">
+                <a:solidFill>
+                  <a:srgbClr val="6B7280"/>
+                </a:solidFill>
+                <a:latin typeface="Arial"/>
+              </a:rPr>
+              <a:t>0–8 min</a:t>
+            </a:r>
+          </a:p>
+        </p:txBody>
+      </p:sp>
+      <p:cxnSp>
+        <p:nvCxnSpPr>
+          <p:cNvPr id="13" name="Connector 12"/>
+          <p:cNvCxnSpPr/>
+          <p:nvPr/>
+        </p:nvCxnSpPr>
+        <p:spPr>
+          <a:xfrm>
+            <a:off x="3680460" y="2276856"/>
+            <a:ext cx="0" cy="2414016"/>
+          </a:xfrm>
+          <a:prstGeom prst="line">
+            <a:avLst/>
+          </a:prstGeom>
+          <a:ln w="12700">
+            <a:solidFill>
+              <a:srgbClr val="B9975B"/>
+            </a:solidFill>
+          </a:ln>
+        </p:spPr>
+        <p:style>
+          <a:lnRef idx="2">
+            <a:schemeClr val="accent1"/>
+          </a:lnRef>
+          <a:fillRef idx="0">
+            <a:schemeClr val="accent1"/>
+          </a:fillRef>
+          <a:effectRef idx="1">
+            <a:schemeClr val="accent1"/>
+          </a:effectRef>
+          <a:fontRef idx="minor">
+            <a:schemeClr val="tx1"/>
+          </a:fontRef>
+        </p:style>
+      </p:cxnSp>
+      <p:sp>
+        <p:nvSpPr>
+          <p:cNvPr id="14" name="Oval 13"/>
+          <p:cNvSpPr/>
+          <p:nvPr/>
+        </p:nvSpPr>
+        <p:spPr>
+          <a:xfrm>
+            <a:off x="3465576" y="2093976"/>
+            <a:ext cx="429768" cy="429768"/>
+          </a:xfrm>
+          <a:prstGeom prst="ellipse">
+            <a:avLst/>
+          </a:prstGeom>
+          <a:solidFill>
+            <a:srgbClr val="FFFFFF"/>
+          </a:solidFill>
+          <a:ln w="19050">
+            <a:solidFill>
+              <a:srgbClr val="B9975B"/>
+            </a:solidFill>
+          </a:ln>
+          <a:effectLst/>
+        </p:spPr>
+        <p:style>
+          <a:lnRef idx="1">
+            <a:schemeClr val="accent1"/>
+          </a:lnRef>
+          <a:fillRef idx="3">
+            <a:schemeClr val="accent1"/>
+          </a:fillRef>
+          <a:effectRef idx="2">
+            <a:schemeClr val="accent1"/>
+          </a:effectRef>
+          <a:fontRef idx="minor">
+            <a:schemeClr val="lt1"/>
+          </a:fontRef>
+        </p:style>
+        <p:txBody>
+          <a:bodyPr rtlCol="0" anchor="ctr"/>
+          <a:lstStyle/>
+          <a:p>
+            <a:pPr algn="ctr"/>
+          </a:p>
+        </p:txBody>
+      </p:sp>
+      <p:sp>
+        <p:nvSpPr>
+          <p:cNvPr id="15" name="TextBox 14"/>
+          <p:cNvSpPr txBox="1"/>
+          <p:nvPr/>
+        </p:nvSpPr>
+        <p:spPr>
+          <a:xfrm>
+            <a:off x="3968496" y="2624328"/>
+            <a:ext cx="2194560" cy="457200"/>
+          </a:xfrm>
+          <a:prstGeom prst="rect">
+            <a:avLst/>
+          </a:prstGeom>
+          <a:noFill/>
+        </p:spPr>
+        <p:txBody>
+          <a:bodyPr wrap="square" anchor="t">
+            <a:spAutoFit/>
+          </a:bodyPr>
+          <a:lstStyle/>
+          <a:p>
+            <a:pPr algn="l">
+              <a:spcAft>
+                <a:spcPts val="400"/>
+              </a:spcAft>
+            </a:pPr>
+            <a:r>
+              <a:rPr sz="1600" b="1" i="0">
+                <a:solidFill>
+                  <a:srgbClr val="000000"/>
+                </a:solidFill>
+                <a:latin typeface="Arial"/>
+              </a:rPr>
+              <a:t>Pick one</a:t>
+            </a:r>
+          </a:p>
+        </p:txBody>
+      </p:sp>
+      <p:sp>
+        <p:nvSpPr>
+          <p:cNvPr id="16" name="TextBox 15"/>
+          <p:cNvSpPr txBox="1"/>
+          <p:nvPr/>
+        </p:nvSpPr>
+        <p:spPr>
+          <a:xfrm>
+            <a:off x="3968496" y="3063240"/>
+            <a:ext cx="2194560" cy="1280160"/>
+          </a:xfrm>
+          <a:prstGeom prst="rect">
+            <a:avLst/>
+          </a:prstGeom>
+          <a:noFill/>
+        </p:spPr>
+        <p:txBody>
+          <a:bodyPr wrap="square" anchor="t">
+            <a:spAutoFit/>
+          </a:bodyPr>
+          <a:lstStyle/>
+          <a:p>
+            <a:pPr algn="l">
+              <a:spcAft>
+                <a:spcPts val="400"/>
+              </a:spcAft>
+            </a:pPr>
+            <a:r>
+              <a:rPr sz="1200" b="0" i="0">
+                <a:solidFill>
+                  <a:srgbClr val="000000"/>
+                </a:solidFill>
+                <a:latin typeface="Arial"/>
+              </a:rPr>
+              <a:t>Use the four criteria on the next slide. Vote if you must; do not debate past three minutes.</a:t>
+            </a:r>
+          </a:p>
+        </p:txBody>
+      </p:sp>
+      <p:sp>
+        <p:nvSpPr>
+          <p:cNvPr id="17" name="Rounded Rectangle 16"/>
+          <p:cNvSpPr/>
+          <p:nvPr/>
+        </p:nvSpPr>
+        <p:spPr>
+          <a:xfrm>
+            <a:off x="3611880" y="4306824"/>
+            <a:ext cx="2057400" cy="320040"/>
+          </a:xfrm>
+          <a:prstGeom prst="roundRect">
+            <a:avLst/>
+          </a:prstGeom>
+          <a:solidFill>
+            <a:srgbClr val="00305C"/>
+          </a:solidFill>
+          <a:ln>
+            <a:noFill/>
+          </a:ln>
+          <a:effectLst/>
+        </p:spPr>
+        <p:style>
+          <a:lnRef idx="1">
+            <a:schemeClr val="accent1"/>
+          </a:lnRef>
+          <a:fillRef idx="3">
+            <a:schemeClr val="accent1"/>
+          </a:fillRef>
+          <a:effectRef idx="2">
+            <a:schemeClr val="accent1"/>
+          </a:effectRef>
+          <a:fontRef idx="minor">
+            <a:schemeClr val="lt1"/>
+          </a:fontRef>
+        </p:style>
+        <p:txBody>
+          <a:bodyPr rtlCol="0" anchor="ctr" tIns="0" bIns="0"/>
+          <a:lstStyle/>
+          <a:p>
+            <a:pPr algn="ctr"/>
+            <a:r>
+              <a:rPr sz="1600" b="1" i="0">
+                <a:solidFill>
+                  <a:srgbClr val="FFFFFF"/>
+                </a:solidFill>
+                <a:latin typeface="Arial"/>
+              </a:rPr>
+              <a:t>Step 2 · select</a:t>
+            </a:r>
+          </a:p>
+        </p:txBody>
+      </p:sp>
+      <p:sp>
+        <p:nvSpPr>
+          <p:cNvPr id="18" name="TextBox 17"/>
+          <p:cNvSpPr txBox="1"/>
+          <p:nvPr/>
+        </p:nvSpPr>
+        <p:spPr>
+          <a:xfrm>
+            <a:off x="3611880" y="4681728"/>
+            <a:ext cx="2057400" cy="320040"/>
+          </a:xfrm>
+          <a:prstGeom prst="rect">
+            <a:avLst/>
+          </a:prstGeom>
+          <a:noFill/>
+        </p:spPr>
+        <p:txBody>
+          <a:bodyPr wrap="square" anchor="t">
+            <a:spAutoFit/>
+          </a:bodyPr>
+          <a:lstStyle/>
+          <a:p>
+            <a:pPr algn="ctr">
+              <a:spcAft>
+                <a:spcPts val="400"/>
+              </a:spcAft>
+            </a:pPr>
+            <a:r>
+              <a:rPr sz="1200" b="0" i="0">
+                <a:solidFill>
+                  <a:srgbClr val="6B7280"/>
+                </a:solidFill>
+                <a:latin typeface="Arial"/>
+              </a:rPr>
+              <a:t>8–11 min</a:t>
+            </a:r>
+          </a:p>
+        </p:txBody>
+      </p:sp>
+      <p:cxnSp>
+        <p:nvCxnSpPr>
+          <p:cNvPr id="19" name="Connector 18"/>
+          <p:cNvCxnSpPr/>
+          <p:nvPr/>
+        </p:nvCxnSpPr>
+        <p:spPr>
+          <a:xfrm>
+            <a:off x="6377940" y="2276856"/>
+            <a:ext cx="0" cy="2414016"/>
+          </a:xfrm>
+          <a:prstGeom prst="line">
+            <a:avLst/>
+          </a:prstGeom>
+          <a:ln w="12700">
+            <a:solidFill>
+              <a:srgbClr val="B9975B"/>
+            </a:solidFill>
+          </a:ln>
+        </p:spPr>
+        <p:style>
+          <a:lnRef idx="2">
+            <a:schemeClr val="accent1"/>
+          </a:lnRef>
+          <a:fillRef idx="0">
+            <a:schemeClr val="accent1"/>
+          </a:fillRef>
+          <a:effectRef idx="1">
+            <a:schemeClr val="accent1"/>
+          </a:effectRef>
+          <a:fontRef idx="minor">
+            <a:schemeClr val="tx1"/>
+          </a:fontRef>
+        </p:style>
+      </p:cxnSp>
+      <p:sp>
+        <p:nvSpPr>
+          <p:cNvPr id="20" name="Oval 19"/>
+          <p:cNvSpPr/>
+          <p:nvPr/>
+        </p:nvSpPr>
+        <p:spPr>
+          <a:xfrm>
+            <a:off x="6163056" y="2093976"/>
+            <a:ext cx="429768" cy="429768"/>
+          </a:xfrm>
+          <a:prstGeom prst="ellipse">
+            <a:avLst/>
+          </a:prstGeom>
+          <a:solidFill>
+            <a:srgbClr val="FFFFFF"/>
+          </a:solidFill>
+          <a:ln w="19050">
+            <a:solidFill>
+              <a:srgbClr val="B9975B"/>
+            </a:solidFill>
+          </a:ln>
+          <a:effectLst/>
+        </p:spPr>
+        <p:style>
+          <a:lnRef idx="1">
+            <a:schemeClr val="accent1"/>
+          </a:lnRef>
+          <a:fillRef idx="3">
+            <a:schemeClr val="accent1"/>
+          </a:fillRef>
+          <a:effectRef idx="2">
+            <a:schemeClr val="accent1"/>
+          </a:effectRef>
+          <a:fontRef idx="minor">
+            <a:schemeClr val="lt1"/>
+          </a:fontRef>
+        </p:style>
+        <p:txBody>
+          <a:bodyPr rtlCol="0" anchor="ctr"/>
+          <a:lstStyle/>
+          <a:p>
+            <a:pPr algn="ctr"/>
+          </a:p>
+        </p:txBody>
+      </p:sp>
+      <p:sp>
+        <p:nvSpPr>
+          <p:cNvPr id="21" name="TextBox 20"/>
+          <p:cNvSpPr txBox="1"/>
+          <p:nvPr/>
+        </p:nvSpPr>
+        <p:spPr>
+          <a:xfrm>
+            <a:off x="6665976" y="2624328"/>
+            <a:ext cx="2194560" cy="457200"/>
+          </a:xfrm>
+          <a:prstGeom prst="rect">
+            <a:avLst/>
+          </a:prstGeom>
+          <a:noFill/>
+        </p:spPr>
+        <p:txBody>
+          <a:bodyPr wrap="square" anchor="t">
+            <a:spAutoFit/>
+          </a:bodyPr>
+          <a:lstStyle/>
+          <a:p>
+            <a:pPr algn="l">
+              <a:spcAft>
+                <a:spcPts val="400"/>
+              </a:spcAft>
+            </a:pPr>
+            <a:r>
+              <a:rPr sz="1600" b="1" i="0">
+                <a:solidFill>
+                  <a:srgbClr val="000000"/>
+                </a:solidFill>
+                <a:latin typeface="Arial"/>
+              </a:rPr>
+              <a:t>Map it twice</a:t>
+            </a:r>
+          </a:p>
+        </p:txBody>
+      </p:sp>
+      <p:sp>
+        <p:nvSpPr>
+          <p:cNvPr id="22" name="TextBox 21"/>
+          <p:cNvSpPr txBox="1"/>
+          <p:nvPr/>
+        </p:nvSpPr>
+        <p:spPr>
+          <a:xfrm>
+            <a:off x="6665976" y="3063240"/>
+            <a:ext cx="2194560" cy="1280160"/>
+          </a:xfrm>
+          <a:prstGeom prst="rect">
+            <a:avLst/>
+          </a:prstGeom>
+          <a:noFill/>
+        </p:spPr>
+        <p:txBody>
+          <a:bodyPr wrap="square" anchor="t">
+            <a:spAutoFit/>
+          </a:bodyPr>
+          <a:lstStyle/>
+          <a:p>
+            <a:pPr algn="l">
+              <a:spcAft>
+                <a:spcPts val="400"/>
+              </a:spcAft>
+            </a:pPr>
+            <a:r>
+              <a:rPr sz="1200" b="0" i="0">
+                <a:solidFill>
+                  <a:srgbClr val="000000"/>
+                </a:solidFill>
+                <a:latin typeface="Arial"/>
+              </a:rPr>
+              <a:t>Five steps as they are today. Then the agentic design: intake, checks, decision, human line, response.</a:t>
+            </a:r>
+          </a:p>
+        </p:txBody>
+      </p:sp>
+      <p:sp>
+        <p:nvSpPr>
+          <p:cNvPr id="23" name="Rounded Rectangle 22"/>
+          <p:cNvSpPr/>
+          <p:nvPr/>
+        </p:nvSpPr>
+        <p:spPr>
+          <a:xfrm>
+            <a:off x="6309360" y="4306824"/>
+            <a:ext cx="2057400" cy="320040"/>
+          </a:xfrm>
+          <a:prstGeom prst="roundRect">
+            <a:avLst/>
+          </a:prstGeom>
+          <a:solidFill>
+            <a:srgbClr val="00305C"/>
+          </a:solidFill>
+          <a:ln>
+            <a:noFill/>
+          </a:ln>
+          <a:effectLst/>
+        </p:spPr>
+        <p:style>
+          <a:lnRef idx="1">
+            <a:schemeClr val="accent1"/>
+          </a:lnRef>
+          <a:fillRef idx="3">
+            <a:schemeClr val="accent1"/>
+          </a:fillRef>
+          <a:effectRef idx="2">
+            <a:schemeClr val="accent1"/>
+          </a:effectRef>
+          <a:fontRef idx="minor">
+            <a:schemeClr val="lt1"/>
+          </a:fontRef>
+        </p:style>
+        <p:txBody>
+          <a:bodyPr rtlCol="0" anchor="ctr" tIns="0" bIns="0"/>
+          <a:lstStyle/>
+          <a:p>
+            <a:pPr algn="ctr"/>
+            <a:r>
+              <a:rPr sz="1600" b="1" i="0">
+                <a:solidFill>
+                  <a:srgbClr val="FFFFFF"/>
+                </a:solidFill>
+                <a:latin typeface="Arial"/>
+              </a:rPr>
+              <a:t>Step 3 · map</a:t>
+            </a:r>
+          </a:p>
+        </p:txBody>
+      </p:sp>
+      <p:sp>
+        <p:nvSpPr>
+          <p:cNvPr id="24" name="TextBox 23"/>
+          <p:cNvSpPr txBox="1"/>
+          <p:nvPr/>
+        </p:nvSpPr>
+        <p:spPr>
+          <a:xfrm>
+            <a:off x="6309360" y="4681728"/>
+            <a:ext cx="2057400" cy="320040"/>
+          </a:xfrm>
+          <a:prstGeom prst="rect">
+            <a:avLst/>
+          </a:prstGeom>
+          <a:noFill/>
+        </p:spPr>
+        <p:txBody>
+          <a:bodyPr wrap="square" anchor="t">
+            <a:spAutoFit/>
+          </a:bodyPr>
+          <a:lstStyle/>
+          <a:p>
+            <a:pPr algn="ctr">
+              <a:spcAft>
+                <a:spcPts val="400"/>
+              </a:spcAft>
+            </a:pPr>
+            <a:r>
+              <a:rPr sz="1200" b="0" i="0">
+                <a:solidFill>
+                  <a:srgbClr val="6B7280"/>
+                </a:solidFill>
+                <a:latin typeface="Arial"/>
+              </a:rPr>
+              <a:t>11–21 min</a:t>
+            </a:r>
+          </a:p>
+        </p:txBody>
+      </p:sp>
+      <p:cxnSp>
+        <p:nvCxnSpPr>
+          <p:cNvPr id="25" name="Connector 24"/>
+          <p:cNvCxnSpPr/>
+          <p:nvPr/>
+        </p:nvCxnSpPr>
+        <p:spPr>
+          <a:xfrm>
+            <a:off x="9075420" y="2276856"/>
+            <a:ext cx="0" cy="2414016"/>
+          </a:xfrm>
+          <a:prstGeom prst="line">
+            <a:avLst/>
+          </a:prstGeom>
+          <a:ln w="12700">
+            <a:solidFill>
+              <a:srgbClr val="B9975B"/>
+            </a:solidFill>
+          </a:ln>
+        </p:spPr>
+        <p:style>
+          <a:lnRef idx="2">
+            <a:schemeClr val="accent1"/>
+          </a:lnRef>
+          <a:fillRef idx="0">
+            <a:schemeClr val="accent1"/>
+          </a:fillRef>
+          <a:effectRef idx="1">
+            <a:schemeClr val="accent1"/>
+          </a:effectRef>
+          <a:fontRef idx="minor">
+            <a:schemeClr val="tx1"/>
+          </a:fontRef>
+        </p:style>
+      </p:cxnSp>
+      <p:sp>
+        <p:nvSpPr>
+          <p:cNvPr id="26" name="Oval 25"/>
+          <p:cNvSpPr/>
+          <p:nvPr/>
+        </p:nvSpPr>
+        <p:spPr>
+          <a:xfrm>
+            <a:off x="8860536" y="2093976"/>
+            <a:ext cx="429768" cy="429768"/>
+          </a:xfrm>
+          <a:prstGeom prst="ellipse">
+            <a:avLst/>
+          </a:prstGeom>
+          <a:solidFill>
+            <a:srgbClr val="FFFFFF"/>
+          </a:solidFill>
+          <a:ln w="19050">
+            <a:solidFill>
+              <a:srgbClr val="B9975B"/>
+            </a:solidFill>
+          </a:ln>
+          <a:effectLst/>
+        </p:spPr>
+        <p:style>
+          <a:lnRef idx="1">
+            <a:schemeClr val="accent1"/>
+          </a:lnRef>
+          <a:fillRef idx="3">
+            <a:schemeClr val="accent1"/>
+          </a:fillRef>
+          <a:effectRef idx="2">
+            <a:schemeClr val="accent1"/>
+          </a:effectRef>
+          <a:fontRef idx="minor">
+            <a:schemeClr val="lt1"/>
+          </a:fontRef>
+        </p:style>
+        <p:txBody>
+          <a:bodyPr rtlCol="0" anchor="ctr"/>
+          <a:lstStyle/>
+          <a:p>
+            <a:pPr algn="ctr"/>
+          </a:p>
+        </p:txBody>
+      </p:sp>
+      <p:sp>
+        <p:nvSpPr>
+          <p:cNvPr id="27" name="TextBox 26"/>
+          <p:cNvSpPr txBox="1"/>
+          <p:nvPr/>
+        </p:nvSpPr>
+        <p:spPr>
+          <a:xfrm>
+            <a:off x="9363456" y="2624328"/>
+            <a:ext cx="2194560" cy="457200"/>
+          </a:xfrm>
+          <a:prstGeom prst="rect">
+            <a:avLst/>
+          </a:prstGeom>
+          <a:noFill/>
+        </p:spPr>
+        <p:txBody>
+          <a:bodyPr wrap="square" anchor="t">
+            <a:spAutoFit/>
+          </a:bodyPr>
+          <a:lstStyle/>
+          <a:p>
+            <a:pPr algn="l">
+              <a:spcAft>
+                <a:spcPts val="400"/>
+              </a:spcAft>
+            </a:pPr>
+            <a:r>
+              <a:rPr sz="1600" b="1" i="0">
+                <a:solidFill>
+                  <a:srgbClr val="000000"/>
+                </a:solidFill>
+                <a:latin typeface="Arial"/>
+              </a:rPr>
+              <a:t>The minute</a:t>
+            </a:r>
+          </a:p>
+        </p:txBody>
+      </p:sp>
+      <p:sp>
+        <p:nvSpPr>
+          <p:cNvPr id="28" name="TextBox 27"/>
+          <p:cNvSpPr txBox="1"/>
+          <p:nvPr/>
+        </p:nvSpPr>
+        <p:spPr>
+          <a:xfrm>
+            <a:off x="9363456" y="3063240"/>
+            <a:ext cx="2194560" cy="1280160"/>
+          </a:xfrm>
+          <a:prstGeom prst="rect">
+            <a:avLst/>
+          </a:prstGeom>
+          <a:noFill/>
+        </p:spPr>
+        <p:txBody>
+          <a:bodyPr wrap="square" anchor="t">
+            <a:spAutoFit/>
+          </a:bodyPr>
+          <a:lstStyle/>
+          <a:p>
+            <a:pPr algn="l">
+              <a:spcAft>
+                <a:spcPts val="400"/>
+              </a:spcAft>
+            </a:pPr>
+            <a:r>
+              <a:rPr sz="1200" b="0" i="0">
+                <a:solidFill>
+                  <a:srgbClr val="000000"/>
+                </a:solidFill>
+                <a:latin typeface="Arial"/>
+              </a:rPr>
+              <a:t>Three sentences, one per question. Pick the reporter. Rehearse it once.</a:t>
+            </a:r>
+          </a:p>
+        </p:txBody>
+      </p:sp>
+      <p:sp>
+        <p:nvSpPr>
+          <p:cNvPr id="29" name="Rounded Rectangle 28"/>
+          <p:cNvSpPr/>
+          <p:nvPr/>
+        </p:nvSpPr>
+        <p:spPr>
+          <a:xfrm>
+            <a:off x="9006840" y="4306824"/>
+            <a:ext cx="2057400" cy="320040"/>
+          </a:xfrm>
+          <a:prstGeom prst="roundRect">
+            <a:avLst/>
+          </a:prstGeom>
+          <a:solidFill>
+            <a:srgbClr val="00305C"/>
+          </a:solidFill>
+          <a:ln>
+            <a:noFill/>
+          </a:ln>
+          <a:effectLst/>
+        </p:spPr>
+        <p:style>
+          <a:lnRef idx="1">
+            <a:schemeClr val="accent1"/>
+          </a:lnRef>
+          <a:fillRef idx="3">
+            <a:schemeClr val="accent1"/>
+          </a:fillRef>
+          <a:effectRef idx="2">
+            <a:schemeClr val="accent1"/>
+          </a:effectRef>
+          <a:fontRef idx="minor">
+            <a:schemeClr val="lt1"/>
+          </a:fontRef>
+        </p:style>
+        <p:txBody>
+          <a:bodyPr rtlCol="0" anchor="ctr" tIns="0" bIns="0"/>
+          <a:lstStyle/>
+          <a:p>
+            <a:pPr algn="ctr"/>
+            <a:r>
+              <a:rPr sz="1600" b="1" i="0">
+                <a:solidFill>
+                  <a:srgbClr val="FFFFFF"/>
+                </a:solidFill>
+                <a:latin typeface="Arial"/>
+              </a:rPr>
+              <a:t>Step 4 · prepare</a:t>
+            </a:r>
+          </a:p>
+        </p:txBody>
+      </p:sp>
+      <p:sp>
+        <p:nvSpPr>
+          <p:cNvPr id="30" name="TextBox 29"/>
+          <p:cNvSpPr txBox="1"/>
+          <p:nvPr/>
+        </p:nvSpPr>
+        <p:spPr>
+          <a:xfrm>
+            <a:off x="9006840" y="4681728"/>
+            <a:ext cx="2057400" cy="320040"/>
+          </a:xfrm>
+          <a:prstGeom prst="rect">
+            <a:avLst/>
+          </a:prstGeom>
+          <a:noFill/>
+        </p:spPr>
+        <p:txBody>
+          <a:bodyPr wrap="square" anchor="t">
+            <a:spAutoFit/>
+          </a:bodyPr>
+          <a:lstStyle/>
+          <a:p>
+            <a:pPr algn="ctr">
+              <a:spcAft>
+                <a:spcPts val="400"/>
+              </a:spcAft>
+            </a:pPr>
+            <a:r>
+              <a:rPr sz="1200" b="0" i="0">
+                <a:solidFill>
+                  <a:srgbClr val="6B7280"/>
+                </a:solidFill>
+                <a:latin typeface="Arial"/>
+              </a:rPr>
+              <a:t>21–25 min</a:t>
+            </a:r>
+          </a:p>
+        </p:txBody>
+      </p:sp>
+      <p:sp>
+        <p:nvSpPr>
+          <p:cNvPr id="31" name="TextBox 30"/>
+          <p:cNvSpPr txBox="1"/>
+          <p:nvPr/>
+        </p:nvSpPr>
+        <p:spPr>
+          <a:xfrm>
+            <a:off x="822960" y="5394960"/>
+            <a:ext cx="10515600" cy="731520"/>
+          </a:xfrm>
+          <a:prstGeom prst="rect">
+            <a:avLst/>
+          </a:prstGeom>
+          <a:noFill/>
+        </p:spPr>
+        <p:txBody>
+          <a:bodyPr wrap="square" anchor="t">
+            <a:spAutoFit/>
+          </a:bodyPr>
+          <a:lstStyle/>
+          <a:p>
+            <a:pPr algn="l">
+              <a:spcAft>
+                <a:spcPts val="400"/>
+              </a:spcAft>
+            </a:pPr>
+            <a:r>
+              <a:rPr sz="1300" b="0" i="1">
+                <a:solidFill>
+                  <a:srgbClr val="002060"/>
+                </a:solidFill>
+                <a:latin typeface="Arial"/>
+              </a:rPr>
+              <a:t>Step 3 is the work. If the pitches run long, cut them to forty seconds each; never cut the mapping.</a:t>
+            </a:r>
+          </a:p>
+        </p:txBody>
+      </p:sp>
+    </p:spTree>
+  </p:cSld>
+  <p:clrMapOvr>
+    <a:masterClrMapping/>
+  </p:clrMapOvr>
+</p:sld>
+</file>
+
+<file path=ppt/slides/slide21.xml><?xml version="1.0" encoding="utf-8"?>
+<p:sld xmlns:a="http://schemas.openxmlformats.org/drawingml/2006/main" xmlns:p="http://schemas.openxmlformats.org/presentationml/2006/main" xmlns:r="http://schemas.openxmlformats.org/officeDocument/2006/relationships">
+  <p:cSld>
+    <p:spTree>
+      <p:nvGrpSpPr>
+        <p:cNvPr id="1" name=""/>
+        <p:cNvGrpSpPr/>
+        <p:nvPr/>
+      </p:nvGrpSpPr>
+      <p:grpSpPr/>
+      <p:sp>
+        <p:nvSpPr>
+          <p:cNvPr id="2" name="TextBox 1"/>
+          <p:cNvSpPr txBox="1"/>
+          <p:nvPr/>
+        </p:nvSpPr>
+        <p:spPr>
+          <a:xfrm>
+            <a:off x="9893808" y="6492240"/>
+            <a:ext cx="2084831" cy="274320"/>
+          </a:xfrm>
+          <a:prstGeom prst="rect">
+            <a:avLst/>
+          </a:prstGeom>
+          <a:noFill/>
+        </p:spPr>
+        <p:txBody>
+          <a:bodyPr wrap="square" anchor="t">
+            <a:spAutoFit/>
+          </a:bodyPr>
+          <a:lstStyle/>
+          <a:p>
+            <a:pPr algn="r">
+              <a:spcAft>
+                <a:spcPts val="400"/>
+              </a:spcAft>
+            </a:pPr>
+            <a:r>
+              <a:rPr sz="1000" b="0" i="0">
+                <a:solidFill>
+                  <a:srgbClr val="6B7280"/>
+                </a:solidFill>
+                <a:latin typeface="Arial"/>
+              </a:rPr>
+              <a:t>21</a:t>
+            </a:r>
+          </a:p>
+        </p:txBody>
+      </p:sp>
+      <p:sp>
+        <p:nvSpPr>
+          <p:cNvPr id="3" name="TextBox 2"/>
+          <p:cNvSpPr txBox="1"/>
+          <p:nvPr/>
+        </p:nvSpPr>
+        <p:spPr>
+          <a:xfrm>
+            <a:off x="838047" y="192024"/>
+            <a:ext cx="10515600" cy="813816"/>
+          </a:xfrm>
+          <a:prstGeom prst="rect">
+            <a:avLst/>
+          </a:prstGeom>
+          <a:noFill/>
+        </p:spPr>
+        <p:txBody>
+          <a:bodyPr wrap="square" anchor="ctr">
+            <a:spAutoFit/>
+          </a:bodyPr>
+          <a:lstStyle/>
+          <a:p>
+            <a:pPr algn="ctr">
+              <a:spcAft>
+                <a:spcPts val="400"/>
+              </a:spcAft>
+            </a:pPr>
+            <a:r>
+              <a:rPr sz="2800" b="1" i="0">
+                <a:solidFill>
+                  <a:srgbClr val="002060"/>
+                </a:solidFill>
+                <a:latin typeface="Arial"/>
+              </a:rPr>
+              <a:t>STEP 1 · YOUR SIXTY-SECOND PITCH</a:t>
+            </a:r>
+          </a:p>
+        </p:txBody>
+      </p:sp>
+      <p:cxnSp>
+        <p:nvCxnSpPr>
+          <p:cNvPr id="4" name="Connector 3"/>
+          <p:cNvCxnSpPr/>
+          <p:nvPr/>
+        </p:nvCxnSpPr>
+        <p:spPr>
+          <a:xfrm>
+            <a:off x="0" y="1097280"/>
+            <a:ext cx="12191695" cy="0"/>
+          </a:xfrm>
+          <a:prstGeom prst="line">
+            <a:avLst/>
+          </a:prstGeom>
+          <a:ln w="9525">
+            <a:solidFill>
+              <a:srgbClr val="D5DBE2"/>
+            </a:solidFill>
+          </a:ln>
+        </p:spPr>
+        <p:style>
+          <a:lnRef idx="2">
+            <a:schemeClr val="accent1"/>
+          </a:lnRef>
+          <a:fillRef idx="0">
+            <a:schemeClr val="accent1"/>
+          </a:fillRef>
+          <a:effectRef idx="1">
+            <a:schemeClr val="accent1"/>
+          </a:effectRef>
+          <a:fontRef idx="minor">
+            <a:schemeClr val="tx1"/>
+          </a:fontRef>
+        </p:style>
+      </p:cxnSp>
+      <p:cxnSp>
+        <p:nvCxnSpPr>
+          <p:cNvPr id="5" name="Connector 4"/>
+          <p:cNvCxnSpPr/>
+          <p:nvPr/>
+        </p:nvCxnSpPr>
+        <p:spPr>
+          <a:xfrm>
+            <a:off x="5952744" y="1133856"/>
+            <a:ext cx="292608" cy="0"/>
+          </a:xfrm>
+          <a:prstGeom prst="line">
+            <a:avLst/>
+          </a:prstGeom>
+          <a:ln w="76200">
+            <a:solidFill>
+              <a:srgbClr val="00305C"/>
+            </a:solidFill>
+          </a:ln>
+        </p:spPr>
+        <p:style>
+          <a:lnRef idx="2">
+            <a:schemeClr val="accent1"/>
+          </a:lnRef>
+          <a:fillRef idx="0">
+            <a:schemeClr val="accent1"/>
+          </a:fillRef>
+          <a:effectRef idx="1">
+            <a:schemeClr val="accent1"/>
+          </a:effectRef>
+          <a:fontRef idx="minor">
+            <a:schemeClr val="tx1"/>
+          </a:fontRef>
+        </p:style>
+      </p:cxnSp>
+      <p:sp>
+        <p:nvSpPr>
+          <p:cNvPr id="6" name="Rectangle 5"/>
+          <p:cNvSpPr/>
+          <p:nvPr/>
+        </p:nvSpPr>
+        <p:spPr>
+          <a:xfrm>
+            <a:off x="822960" y="1417320"/>
+            <a:ext cx="5120640" cy="4846320"/>
+          </a:xfrm>
+          <a:prstGeom prst="rect">
+            <a:avLst/>
+          </a:prstGeom>
+          <a:solidFill>
+            <a:srgbClr val="EEF1F5"/>
+          </a:solidFill>
+          <a:ln>
+            <a:noFill/>
+          </a:ln>
+          <a:effectLst/>
+        </p:spPr>
+        <p:style>
+          <a:lnRef idx="1">
+            <a:schemeClr val="accent1"/>
+          </a:lnRef>
+          <a:fillRef idx="3">
+            <a:schemeClr val="accent1"/>
+          </a:fillRef>
+          <a:effectRef idx="2">
+            <a:schemeClr val="accent1"/>
+          </a:effectRef>
+          <a:fontRef idx="minor">
+            <a:schemeClr val="lt1"/>
+          </a:fontRef>
+        </p:style>
+        <p:txBody>
+          <a:bodyPr rtlCol="0" anchor="ctr"/>
+          <a:lstStyle/>
+          <a:p>
+            <a:pPr algn="ctr"/>
+          </a:p>
+        </p:txBody>
+      </p:sp>
+      <p:sp>
+        <p:nvSpPr>
+          <p:cNvPr id="7" name="TextBox 6"/>
+          <p:cNvSpPr txBox="1"/>
+          <p:nvPr/>
+        </p:nvSpPr>
+        <p:spPr>
+          <a:xfrm>
+            <a:off x="1005840" y="1554480"/>
+            <a:ext cx="4754879" cy="365760"/>
+          </a:xfrm>
+          <a:prstGeom prst="rect">
+            <a:avLst/>
+          </a:prstGeom>
+          <a:noFill/>
+        </p:spPr>
+        <p:txBody>
+          <a:bodyPr wrap="square" anchor="t">
+            <a:spAutoFit/>
+          </a:bodyPr>
+          <a:lstStyle/>
+          <a:p>
+            <a:pPr algn="l">
+              <a:spcAft>
+                <a:spcPts val="400"/>
+              </a:spcAft>
+            </a:pPr>
+            <a:r>
+              <a:rPr sz="1500" b="1" i="0">
+                <a:solidFill>
+                  <a:srgbClr val="002060"/>
+                </a:solidFill>
+                <a:latin typeface="Arial"/>
+              </a:rPr>
+              <a:t>Say five things</a:t>
+            </a:r>
+          </a:p>
+        </p:txBody>
+      </p:sp>
+      <p:sp>
+        <p:nvSpPr>
+          <p:cNvPr id="8" name="TextBox 7"/>
+          <p:cNvSpPr txBox="1"/>
+          <p:nvPr/>
+        </p:nvSpPr>
+        <p:spPr>
+          <a:xfrm>
+            <a:off x="1005840" y="1965960"/>
+            <a:ext cx="4754879" cy="4160520"/>
+          </a:xfrm>
+          <a:prstGeom prst="rect">
+            <a:avLst/>
+          </a:prstGeom>
+          <a:noFill/>
+        </p:spPr>
+        <p:txBody>
+          <a:bodyPr wrap="square" anchor="t">
+            <a:spAutoFit/>
+          </a:bodyPr>
+          <a:lstStyle/>
+          <a:p>
+            <a:pPr algn="l">
+              <a:spcAft>
+                <a:spcPts val="500"/>
+              </a:spcAft>
+            </a:pPr>
+            <a:r>
+              <a:rPr sz="1300" b="0" i="0">
+                <a:solidFill>
+                  <a:srgbClr val="000000"/>
+                </a:solidFill>
+                <a:latin typeface="Arial"/>
+              </a:rPr>
+              <a:t>The request that starts it: who sends it, through what channel</a:t>
+            </a:r>
+          </a:p>
+          <a:p>
+            <a:pPr algn="l">
+              <a:spcAft>
+                <a:spcPts val="500"/>
+              </a:spcAft>
+            </a:pPr>
+            <a:r>
+              <a:rPr sz="1300" b="0" i="0">
+                <a:solidFill>
+                  <a:srgbClr val="000000"/>
+                </a:solidFill>
+                <a:latin typeface="Arial"/>
+              </a:rPr>
+              <a:t>The steps it goes through today, and roughly how long</a:t>
+            </a:r>
+          </a:p>
+          <a:p>
+            <a:pPr algn="l">
+              <a:spcAft>
+                <a:spcPts val="500"/>
+              </a:spcAft>
+            </a:pPr>
+            <a:r>
+              <a:rPr sz="1300" b="0" i="0">
+                <a:solidFill>
+                  <a:srgbClr val="000000"/>
+                </a:solidFill>
+                <a:latin typeface="Arial"/>
+              </a:rPr>
+              <a:t>Who touches it: how many people, in how many teams</a:t>
+            </a:r>
+          </a:p>
+          <a:p>
+            <a:pPr algn="l">
+              <a:spcAft>
+                <a:spcPts val="500"/>
+              </a:spcAft>
+            </a:pPr>
+            <a:r>
+              <a:rPr sz="1300" b="0" i="0">
+                <a:solidFill>
+                  <a:srgbClr val="000000"/>
+                </a:solidFill>
+                <a:latin typeface="Arial"/>
+              </a:rPr>
+              <a:t>Where it waits: the inbox, the approval, the missing information</a:t>
+            </a:r>
+          </a:p>
+          <a:p>
+            <a:pPr algn="l">
+              <a:spcAft>
+                <a:spcPts val="500"/>
+              </a:spcAft>
+            </a:pPr>
+            <a:r>
+              <a:rPr sz="1300" b="0" i="0">
+                <a:solidFill>
+                  <a:srgbClr val="000000"/>
+                </a:solidFill>
+                <a:latin typeface="Arial"/>
+              </a:rPr>
+              <a:t>What a good outcome looks like, for the requester and for you</a:t>
+            </a:r>
+          </a:p>
+        </p:txBody>
+      </p:sp>
+      <p:sp>
+        <p:nvSpPr>
+          <p:cNvPr id="9" name="TextBox 8"/>
+          <p:cNvSpPr txBox="1"/>
+          <p:nvPr/>
+        </p:nvSpPr>
+        <p:spPr>
+          <a:xfrm>
+            <a:off x="6309360" y="1463040"/>
+            <a:ext cx="5120640" cy="365760"/>
+          </a:xfrm>
+          <a:prstGeom prst="rect">
+            <a:avLst/>
+          </a:prstGeom>
+          <a:noFill/>
+        </p:spPr>
+        <p:txBody>
+          <a:bodyPr wrap="square" anchor="t">
+            <a:spAutoFit/>
+          </a:bodyPr>
+          <a:lstStyle/>
+          <a:p>
+            <a:pPr algn="l">
+              <a:spcAft>
+                <a:spcPts val="400"/>
+              </a:spcAft>
+            </a:pPr>
+            <a:r>
+              <a:rPr sz="1500" b="1" i="0">
+                <a:solidFill>
+                  <a:srgbClr val="002060"/>
+                </a:solidFill>
+                <a:latin typeface="Arial"/>
+              </a:rPr>
+              <a:t>Examples from any function</a:t>
+            </a:r>
+          </a:p>
+        </p:txBody>
+      </p:sp>
+      <p:sp>
+        <p:nvSpPr>
+          <p:cNvPr id="10" name="TextBox 9"/>
+          <p:cNvSpPr txBox="1"/>
+          <p:nvPr/>
+        </p:nvSpPr>
+        <p:spPr>
+          <a:xfrm>
+            <a:off x="6309360" y="1920240"/>
+            <a:ext cx="1737360" cy="457200"/>
+          </a:xfrm>
+          <a:prstGeom prst="rect">
+            <a:avLst/>
+          </a:prstGeom>
+          <a:noFill/>
+        </p:spPr>
+        <p:txBody>
+          <a:bodyPr wrap="square" anchor="ctr">
+            <a:spAutoFit/>
+          </a:bodyPr>
+          <a:lstStyle/>
+          <a:p>
+            <a:pPr algn="l">
+              <a:spcAft>
+                <a:spcPts val="400"/>
+              </a:spcAft>
+            </a:pPr>
+            <a:r>
+              <a:rPr sz="1200" b="1" i="0">
+                <a:solidFill>
+                  <a:srgbClr val="002060"/>
+                </a:solidFill>
+                <a:latin typeface="Arial"/>
+              </a:rPr>
+              <a:t>Customer service</a:t>
+            </a:r>
+          </a:p>
+        </p:txBody>
+      </p:sp>
+      <p:sp>
+        <p:nvSpPr>
+          <p:cNvPr id="11" name="TextBox 10"/>
+          <p:cNvSpPr txBox="1"/>
+          <p:nvPr/>
+        </p:nvSpPr>
+        <p:spPr>
+          <a:xfrm>
+            <a:off x="8046720" y="1920240"/>
+            <a:ext cx="3383280" cy="457200"/>
+          </a:xfrm>
+          <a:prstGeom prst="rect">
+            <a:avLst/>
+          </a:prstGeom>
+          <a:noFill/>
+        </p:spPr>
+        <p:txBody>
+          <a:bodyPr wrap="square" anchor="ctr">
+            <a:spAutoFit/>
+          </a:bodyPr>
+          <a:lstStyle/>
+          <a:p>
+            <a:pPr algn="l">
+              <a:spcAft>
+                <a:spcPts val="400"/>
+              </a:spcAft>
+            </a:pPr>
+            <a:r>
+              <a:rPr sz="1200" b="0" i="0">
+                <a:solidFill>
+                  <a:srgbClr val="000000"/>
+                </a:solidFill>
+                <a:latin typeface="Arial"/>
+              </a:rPr>
+              <a:t>a complaint about a late or wrong delivery</a:t>
+            </a:r>
+          </a:p>
+        </p:txBody>
+      </p:sp>
+      <p:sp>
+        <p:nvSpPr>
+          <p:cNvPr id="12" name="TextBox 11"/>
+          <p:cNvSpPr txBox="1"/>
+          <p:nvPr/>
+        </p:nvSpPr>
+        <p:spPr>
+          <a:xfrm>
+            <a:off x="6309360" y="2450592"/>
+            <a:ext cx="1737360" cy="457200"/>
+          </a:xfrm>
+          <a:prstGeom prst="rect">
+            <a:avLst/>
+          </a:prstGeom>
+          <a:noFill/>
+        </p:spPr>
+        <p:txBody>
+          <a:bodyPr wrap="square" anchor="ctr">
+            <a:spAutoFit/>
+          </a:bodyPr>
+          <a:lstStyle/>
+          <a:p>
+            <a:pPr algn="l">
+              <a:spcAft>
+                <a:spcPts val="400"/>
+              </a:spcAft>
+            </a:pPr>
+            <a:r>
+              <a:rPr sz="1200" b="1" i="0">
+                <a:solidFill>
+                  <a:srgbClr val="002060"/>
+                </a:solidFill>
+                <a:latin typeface="Arial"/>
+              </a:rPr>
+              <a:t>Finance</a:t>
+            </a:r>
+          </a:p>
+        </p:txBody>
+      </p:sp>
+      <p:sp>
+        <p:nvSpPr>
+          <p:cNvPr id="13" name="TextBox 12"/>
+          <p:cNvSpPr txBox="1"/>
+          <p:nvPr/>
+        </p:nvSpPr>
+        <p:spPr>
+          <a:xfrm>
+            <a:off x="8046720" y="2450592"/>
+            <a:ext cx="3383280" cy="457200"/>
+          </a:xfrm>
+          <a:prstGeom prst="rect">
+            <a:avLst/>
+          </a:prstGeom>
+          <a:noFill/>
+        </p:spPr>
+        <p:txBody>
+          <a:bodyPr wrap="square" anchor="ctr">
+            <a:spAutoFit/>
+          </a:bodyPr>
+          <a:lstStyle/>
+          <a:p>
+            <a:pPr algn="l">
+              <a:spcAft>
+                <a:spcPts val="400"/>
+              </a:spcAft>
+            </a:pPr>
+            <a:r>
+              <a:rPr sz="1200" b="0" i="0">
+                <a:solidFill>
+                  <a:srgbClr val="000000"/>
+                </a:solidFill>
+                <a:latin typeface="Arial"/>
+              </a:rPr>
+              <a:t>an invoice dispute or a payment status query</a:t>
+            </a:r>
+          </a:p>
+        </p:txBody>
+      </p:sp>
+      <p:sp>
+        <p:nvSpPr>
+          <p:cNvPr id="14" name="TextBox 13"/>
+          <p:cNvSpPr txBox="1"/>
+          <p:nvPr/>
+        </p:nvSpPr>
+        <p:spPr>
+          <a:xfrm>
+            <a:off x="6309360" y="2980944"/>
+            <a:ext cx="1737360" cy="457200"/>
+          </a:xfrm>
+          <a:prstGeom prst="rect">
+            <a:avLst/>
+          </a:prstGeom>
+          <a:noFill/>
+        </p:spPr>
+        <p:txBody>
+          <a:bodyPr wrap="square" anchor="ctr">
+            <a:spAutoFit/>
+          </a:bodyPr>
+          <a:lstStyle/>
+          <a:p>
+            <a:pPr algn="l">
+              <a:spcAft>
+                <a:spcPts val="400"/>
+              </a:spcAft>
+            </a:pPr>
+            <a:r>
+              <a:rPr sz="1200" b="1" i="0">
+                <a:solidFill>
+                  <a:srgbClr val="002060"/>
+                </a:solidFill>
+                <a:latin typeface="Arial"/>
+              </a:rPr>
+              <a:t>HR</a:t>
+            </a:r>
+          </a:p>
+        </p:txBody>
+      </p:sp>
+      <p:sp>
+        <p:nvSpPr>
+          <p:cNvPr id="15" name="TextBox 14"/>
+          <p:cNvSpPr txBox="1"/>
+          <p:nvPr/>
+        </p:nvSpPr>
+        <p:spPr>
+          <a:xfrm>
+            <a:off x="8046720" y="2980944"/>
+            <a:ext cx="3383280" cy="457200"/>
+          </a:xfrm>
+          <a:prstGeom prst="rect">
+            <a:avLst/>
+          </a:prstGeom>
+          <a:noFill/>
+        </p:spPr>
+        <p:txBody>
+          <a:bodyPr wrap="square" anchor="ctr">
+            <a:spAutoFit/>
+          </a:bodyPr>
+          <a:lstStyle/>
+          <a:p>
+            <a:pPr algn="l">
+              <a:spcAft>
+                <a:spcPts val="400"/>
+              </a:spcAft>
+            </a:pPr>
+            <a:r>
+              <a:rPr sz="1200" b="0" i="0">
+                <a:solidFill>
+                  <a:srgbClr val="000000"/>
+                </a:solidFill>
+                <a:latin typeface="Arial"/>
+              </a:rPr>
+              <a:t>a leave request, a contract change, a reference letter</a:t>
+            </a:r>
+          </a:p>
+        </p:txBody>
+      </p:sp>
+      <p:sp>
+        <p:nvSpPr>
+          <p:cNvPr id="16" name="TextBox 15"/>
+          <p:cNvSpPr txBox="1"/>
+          <p:nvPr/>
+        </p:nvSpPr>
+        <p:spPr>
+          <a:xfrm>
+            <a:off x="6309360" y="3511296"/>
+            <a:ext cx="1737360" cy="457200"/>
+          </a:xfrm>
+          <a:prstGeom prst="rect">
+            <a:avLst/>
+          </a:prstGeom>
+          <a:noFill/>
+        </p:spPr>
+        <p:txBody>
+          <a:bodyPr wrap="square" anchor="ctr">
+            <a:spAutoFit/>
+          </a:bodyPr>
+          <a:lstStyle/>
+          <a:p>
+            <a:pPr algn="l">
+              <a:spcAft>
+                <a:spcPts val="400"/>
+              </a:spcAft>
+            </a:pPr>
+            <a:r>
+              <a:rPr sz="1200" b="1" i="0">
+                <a:solidFill>
+                  <a:srgbClr val="002060"/>
+                </a:solidFill>
+                <a:latin typeface="Arial"/>
+              </a:rPr>
+              <a:t>Sales</a:t>
+            </a:r>
+          </a:p>
+        </p:txBody>
+      </p:sp>
+      <p:sp>
+        <p:nvSpPr>
+          <p:cNvPr id="17" name="TextBox 16"/>
+          <p:cNvSpPr txBox="1"/>
+          <p:nvPr/>
+        </p:nvSpPr>
+        <p:spPr>
+          <a:xfrm>
+            <a:off x="8046720" y="3511296"/>
+            <a:ext cx="3383280" cy="457200"/>
+          </a:xfrm>
+          <a:prstGeom prst="rect">
+            <a:avLst/>
+          </a:prstGeom>
+          <a:noFill/>
+        </p:spPr>
+        <p:txBody>
+          <a:bodyPr wrap="square" anchor="ctr">
+            <a:spAutoFit/>
+          </a:bodyPr>
+          <a:lstStyle/>
+          <a:p>
+            <a:pPr algn="l">
+              <a:spcAft>
+                <a:spcPts val="400"/>
+              </a:spcAft>
+            </a:pPr>
+            <a:r>
+              <a:rPr sz="1200" b="0" i="0">
+                <a:solidFill>
+                  <a:srgbClr val="000000"/>
+                </a:solidFill>
+                <a:latin typeface="Arial"/>
+              </a:rPr>
+              <a:t>a quote request that needs pricing and stock checks</a:t>
+            </a:r>
+          </a:p>
+        </p:txBody>
+      </p:sp>
+      <p:sp>
+        <p:nvSpPr>
+          <p:cNvPr id="18" name="TextBox 17"/>
+          <p:cNvSpPr txBox="1"/>
+          <p:nvPr/>
+        </p:nvSpPr>
+        <p:spPr>
+          <a:xfrm>
+            <a:off x="6309360" y="4041648"/>
+            <a:ext cx="1737360" cy="457200"/>
+          </a:xfrm>
+          <a:prstGeom prst="rect">
+            <a:avLst/>
+          </a:prstGeom>
+          <a:noFill/>
+        </p:spPr>
+        <p:txBody>
+          <a:bodyPr wrap="square" anchor="ctr">
+            <a:spAutoFit/>
+          </a:bodyPr>
+          <a:lstStyle/>
+          <a:p>
+            <a:pPr algn="l">
+              <a:spcAft>
+                <a:spcPts val="400"/>
+              </a:spcAft>
+            </a:pPr>
+            <a:r>
+              <a:rPr sz="1200" b="1" i="0">
+                <a:solidFill>
+                  <a:srgbClr val="002060"/>
+                </a:solidFill>
+                <a:latin typeface="Arial"/>
+              </a:rPr>
+              <a:t>Operations</a:t>
+            </a:r>
+          </a:p>
+        </p:txBody>
+      </p:sp>
+      <p:sp>
+        <p:nvSpPr>
+          <p:cNvPr id="19" name="TextBox 18"/>
+          <p:cNvSpPr txBox="1"/>
+          <p:nvPr/>
+        </p:nvSpPr>
+        <p:spPr>
+          <a:xfrm>
+            <a:off x="8046720" y="4041648"/>
+            <a:ext cx="3383280" cy="457200"/>
+          </a:xfrm>
+          <a:prstGeom prst="rect">
+            <a:avLst/>
+          </a:prstGeom>
+          <a:noFill/>
+        </p:spPr>
+        <p:txBody>
+          <a:bodyPr wrap="square" anchor="ctr">
+            <a:spAutoFit/>
+          </a:bodyPr>
+          <a:lstStyle/>
+          <a:p>
+            <a:pPr algn="l">
+              <a:spcAft>
+                <a:spcPts val="400"/>
+              </a:spcAft>
+            </a:pPr>
+            <a:r>
+              <a:rPr sz="1200" b="0" i="0">
+                <a:solidFill>
+                  <a:srgbClr val="000000"/>
+                </a:solidFill>
+                <a:latin typeface="Arial"/>
+              </a:rPr>
+              <a:t>a maintenance ticket or a quality deviation</a:t>
+            </a:r>
+          </a:p>
+        </p:txBody>
+      </p:sp>
+      <p:sp>
+        <p:nvSpPr>
+          <p:cNvPr id="20" name="TextBox 19"/>
+          <p:cNvSpPr txBox="1"/>
+          <p:nvPr/>
+        </p:nvSpPr>
+        <p:spPr>
+          <a:xfrm>
+            <a:off x="6309360" y="4572000"/>
+            <a:ext cx="1737360" cy="457200"/>
+          </a:xfrm>
+          <a:prstGeom prst="rect">
+            <a:avLst/>
+          </a:prstGeom>
+          <a:noFill/>
+        </p:spPr>
+        <p:txBody>
+          <a:bodyPr wrap="square" anchor="ctr">
+            <a:spAutoFit/>
+          </a:bodyPr>
+          <a:lstStyle/>
+          <a:p>
+            <a:pPr algn="l">
+              <a:spcAft>
+                <a:spcPts val="400"/>
+              </a:spcAft>
+            </a:pPr>
+            <a:r>
+              <a:rPr sz="1200" b="1" i="0">
+                <a:solidFill>
+                  <a:srgbClr val="002060"/>
+                </a:solidFill>
+                <a:latin typeface="Arial"/>
+              </a:rPr>
+              <a:t>Procurement</a:t>
+            </a:r>
+          </a:p>
+        </p:txBody>
+      </p:sp>
+      <p:sp>
+        <p:nvSpPr>
+          <p:cNvPr id="21" name="TextBox 20"/>
+          <p:cNvSpPr txBox="1"/>
+          <p:nvPr/>
+        </p:nvSpPr>
+        <p:spPr>
+          <a:xfrm>
+            <a:off x="8046720" y="4572000"/>
+            <a:ext cx="3383280" cy="457200"/>
+          </a:xfrm>
+          <a:prstGeom prst="rect">
+            <a:avLst/>
+          </a:prstGeom>
+          <a:noFill/>
+        </p:spPr>
+        <p:txBody>
+          <a:bodyPr wrap="square" anchor="ctr">
+            <a:spAutoFit/>
+          </a:bodyPr>
+          <a:lstStyle/>
+          <a:p>
+            <a:pPr algn="l">
+              <a:spcAft>
+                <a:spcPts val="400"/>
+              </a:spcAft>
+            </a:pPr>
+            <a:r>
+              <a:rPr sz="1200" b="0" i="0">
+                <a:solidFill>
+                  <a:srgbClr val="000000"/>
+                </a:solidFill>
+                <a:latin typeface="Arial"/>
+              </a:rPr>
+              <a:t>a new supplier or a purchase request</a:t>
+            </a:r>
+          </a:p>
+        </p:txBody>
+      </p:sp>
+      <p:sp>
+        <p:nvSpPr>
+          <p:cNvPr id="22" name="TextBox 21"/>
+          <p:cNvSpPr txBox="1"/>
+          <p:nvPr/>
+        </p:nvSpPr>
+        <p:spPr>
+          <a:xfrm>
+            <a:off x="6309360" y="5102352"/>
+            <a:ext cx="1737360" cy="457200"/>
+          </a:xfrm>
+          <a:prstGeom prst="rect">
+            <a:avLst/>
+          </a:prstGeom>
+          <a:noFill/>
+        </p:spPr>
+        <p:txBody>
+          <a:bodyPr wrap="square" anchor="ctr">
+            <a:spAutoFit/>
+          </a:bodyPr>
+          <a:lstStyle/>
+          <a:p>
+            <a:pPr algn="l">
+              <a:spcAft>
+                <a:spcPts val="400"/>
+              </a:spcAft>
+            </a:pPr>
+            <a:r>
+              <a:rPr sz="1200" b="1" i="0">
+                <a:solidFill>
+                  <a:srgbClr val="002060"/>
+                </a:solidFill>
+                <a:latin typeface="Arial"/>
+              </a:rPr>
+              <a:t>Legal &amp; compliance</a:t>
+            </a:r>
+          </a:p>
+        </p:txBody>
+      </p:sp>
+      <p:sp>
+        <p:nvSpPr>
+          <p:cNvPr id="23" name="TextBox 22"/>
+          <p:cNvSpPr txBox="1"/>
+          <p:nvPr/>
+        </p:nvSpPr>
+        <p:spPr>
+          <a:xfrm>
+            <a:off x="8046720" y="5102352"/>
+            <a:ext cx="3383280" cy="457200"/>
+          </a:xfrm>
+          <a:prstGeom prst="rect">
+            <a:avLst/>
+          </a:prstGeom>
+          <a:noFill/>
+        </p:spPr>
+        <p:txBody>
+          <a:bodyPr wrap="square" anchor="ctr">
+            <a:spAutoFit/>
+          </a:bodyPr>
+          <a:lstStyle/>
+          <a:p>
+            <a:pPr algn="l">
+              <a:spcAft>
+                <a:spcPts val="400"/>
+              </a:spcAft>
+            </a:pPr>
+            <a:r>
+              <a:rPr sz="1200" b="0" i="0">
+                <a:solidFill>
+                  <a:srgbClr val="000000"/>
+                </a:solidFill>
+                <a:latin typeface="Arial"/>
+              </a:rPr>
+              <a:t>an NDA request or a data access request</a:t>
+            </a:r>
+          </a:p>
+        </p:txBody>
+      </p:sp>
+      <p:sp>
+        <p:nvSpPr>
+          <p:cNvPr id="24" name="TextBox 23"/>
+          <p:cNvSpPr txBox="1"/>
+          <p:nvPr/>
+        </p:nvSpPr>
+        <p:spPr>
+          <a:xfrm>
+            <a:off x="6309360" y="5632704"/>
+            <a:ext cx="1737360" cy="457200"/>
+          </a:xfrm>
+          <a:prstGeom prst="rect">
+            <a:avLst/>
+          </a:prstGeom>
+          <a:noFill/>
+        </p:spPr>
+        <p:txBody>
+          <a:bodyPr wrap="square" anchor="ctr">
+            <a:spAutoFit/>
+          </a:bodyPr>
+          <a:lstStyle/>
+          <a:p>
+            <a:pPr algn="l">
+              <a:spcAft>
+                <a:spcPts val="400"/>
+              </a:spcAft>
+            </a:pPr>
+            <a:r>
+              <a:rPr sz="1200" b="1" i="0">
+                <a:solidFill>
+                  <a:srgbClr val="002060"/>
+                </a:solidFill>
+                <a:latin typeface="Arial"/>
+              </a:rPr>
+              <a:t>IT</a:t>
+            </a:r>
+          </a:p>
+        </p:txBody>
+      </p:sp>
+      <p:sp>
+        <p:nvSpPr>
+          <p:cNvPr id="25" name="TextBox 24"/>
+          <p:cNvSpPr txBox="1"/>
+          <p:nvPr/>
+        </p:nvSpPr>
+        <p:spPr>
+          <a:xfrm>
+            <a:off x="8046720" y="5632704"/>
+            <a:ext cx="3383280" cy="457200"/>
+          </a:xfrm>
+          <a:prstGeom prst="rect">
+            <a:avLst/>
+          </a:prstGeom>
+          <a:noFill/>
+        </p:spPr>
+        <p:txBody>
+          <a:bodyPr wrap="square" anchor="ctr">
+            <a:spAutoFit/>
+          </a:bodyPr>
+          <a:lstStyle/>
+          <a:p>
+            <a:pPr algn="l">
+              <a:spcAft>
+                <a:spcPts val="400"/>
+              </a:spcAft>
+            </a:pPr>
+            <a:r>
+              <a:rPr sz="1200" b="0" i="0">
+                <a:solidFill>
+                  <a:srgbClr val="000000"/>
+                </a:solidFill>
+                <a:latin typeface="Arial"/>
+              </a:rPr>
+              <a:t>an access request or an incident report</a:t>
+            </a:r>
+          </a:p>
+        </p:txBody>
+      </p:sp>
+    </p:spTree>
+  </p:cSld>
+  <p:clrMapOvr>
+    <a:masterClrMapping/>
+  </p:clrMapOvr>
+</p:sld>
+</file>
+
+<file path=ppt/slides/slide22.xml><?xml version="1.0" encoding="utf-8"?>
+<p:sld xmlns:a="http://schemas.openxmlformats.org/drawingml/2006/main" xmlns:p="http://schemas.openxmlformats.org/presentationml/2006/main" xmlns:r="http://schemas.openxmlformats.org/officeDocument/2006/relationships">
+  <p:cSld>
+    <p:spTree>
+      <p:nvGrpSpPr>
+        <p:cNvPr id="1" name=""/>
+        <p:cNvGrpSpPr/>
+        <p:nvPr/>
+      </p:nvGrpSpPr>
+      <p:grpSpPr/>
+      <p:sp>
+        <p:nvSpPr>
+          <p:cNvPr id="2" name="TextBox 1"/>
+          <p:cNvSpPr txBox="1"/>
+          <p:nvPr/>
+        </p:nvSpPr>
+        <p:spPr>
+          <a:xfrm>
+            <a:off x="9893808" y="6492240"/>
+            <a:ext cx="2084831" cy="274320"/>
+          </a:xfrm>
+          <a:prstGeom prst="rect">
+            <a:avLst/>
+          </a:prstGeom>
+          <a:noFill/>
+        </p:spPr>
+        <p:txBody>
+          <a:bodyPr wrap="square" anchor="t">
+            <a:spAutoFit/>
+          </a:bodyPr>
+          <a:lstStyle/>
+          <a:p>
+            <a:pPr algn="r">
+              <a:spcAft>
+                <a:spcPts val="400"/>
+              </a:spcAft>
+            </a:pPr>
+            <a:r>
+              <a:rPr sz="1000" b="0" i="0">
+                <a:solidFill>
+                  <a:srgbClr val="6B7280"/>
+                </a:solidFill>
+                <a:latin typeface="Arial"/>
+              </a:rPr>
+              <a:t>22</a:t>
+            </a:r>
+          </a:p>
+        </p:txBody>
+      </p:sp>
+      <p:sp>
+        <p:nvSpPr>
+          <p:cNvPr id="3" name="TextBox 2"/>
+          <p:cNvSpPr txBox="1"/>
+          <p:nvPr/>
+        </p:nvSpPr>
+        <p:spPr>
+          <a:xfrm>
+            <a:off x="838047" y="192024"/>
+            <a:ext cx="10515600" cy="813816"/>
+          </a:xfrm>
+          <a:prstGeom prst="rect">
+            <a:avLst/>
+          </a:prstGeom>
+          <a:noFill/>
+        </p:spPr>
+        <p:txBody>
+          <a:bodyPr wrap="square" anchor="ctr">
+            <a:spAutoFit/>
+          </a:bodyPr>
+          <a:lstStyle/>
+          <a:p>
+            <a:pPr algn="ctr">
+              <a:spcAft>
+                <a:spcPts val="400"/>
+              </a:spcAft>
+            </a:pPr>
+            <a:r>
+              <a:rPr sz="2800" b="1" i="0">
+                <a:solidFill>
+                  <a:srgbClr val="002060"/>
+                </a:solidFill>
+                <a:latin typeface="Arial"/>
+              </a:rPr>
+              <a:t>STEP 2 · PICK THE ONE THAT WILL TEACH YOU THE MOST</a:t>
+            </a:r>
+          </a:p>
+        </p:txBody>
+      </p:sp>
+      <p:cxnSp>
+        <p:nvCxnSpPr>
+          <p:cNvPr id="4" name="Connector 3"/>
+          <p:cNvCxnSpPr/>
+          <p:nvPr/>
+        </p:nvCxnSpPr>
+        <p:spPr>
+          <a:xfrm>
+            <a:off x="0" y="1097280"/>
+            <a:ext cx="12191695" cy="0"/>
+          </a:xfrm>
+          <a:prstGeom prst="line">
+            <a:avLst/>
+          </a:prstGeom>
+          <a:ln w="9525">
+            <a:solidFill>
+              <a:srgbClr val="D5DBE2"/>
+            </a:solidFill>
+          </a:ln>
+        </p:spPr>
+        <p:style>
+          <a:lnRef idx="2">
+            <a:schemeClr val="accent1"/>
+          </a:lnRef>
+          <a:fillRef idx="0">
+            <a:schemeClr val="accent1"/>
+          </a:fillRef>
+          <a:effectRef idx="1">
+            <a:schemeClr val="accent1"/>
+          </a:effectRef>
+          <a:fontRef idx="minor">
+            <a:schemeClr val="tx1"/>
+          </a:fontRef>
+        </p:style>
+      </p:cxnSp>
+      <p:cxnSp>
+        <p:nvCxnSpPr>
+          <p:cNvPr id="5" name="Connector 4"/>
+          <p:cNvCxnSpPr/>
+          <p:nvPr/>
+        </p:nvCxnSpPr>
+        <p:spPr>
+          <a:xfrm>
+            <a:off x="5952744" y="1133856"/>
+            <a:ext cx="292608" cy="0"/>
+          </a:xfrm>
+          <a:prstGeom prst="line">
+            <a:avLst/>
+          </a:prstGeom>
+          <a:ln w="76200">
+            <a:solidFill>
+              <a:srgbClr val="00305C"/>
+            </a:solidFill>
+          </a:ln>
+        </p:spPr>
+        <p:style>
+          <a:lnRef idx="2">
+            <a:schemeClr val="accent1"/>
+          </a:lnRef>
+          <a:fillRef idx="0">
+            <a:schemeClr val="accent1"/>
+          </a:fillRef>
+          <a:effectRef idx="1">
+            <a:schemeClr val="accent1"/>
+          </a:effectRef>
+          <a:fontRef idx="minor">
+            <a:schemeClr val="tx1"/>
+          </a:fontRef>
+        </p:style>
+      </p:cxnSp>
+      <p:sp>
+        <p:nvSpPr>
+          <p:cNvPr id="6" name="TextBox 5"/>
+          <p:cNvSpPr txBox="1"/>
+          <p:nvPr/>
+        </p:nvSpPr>
+        <p:spPr>
+          <a:xfrm>
+            <a:off x="822960" y="1371600"/>
+            <a:ext cx="5120640" cy="365760"/>
+          </a:xfrm>
+          <a:prstGeom prst="rect">
+            <a:avLst/>
+          </a:prstGeom>
+          <a:noFill/>
+        </p:spPr>
+        <p:txBody>
+          <a:bodyPr wrap="square" anchor="t">
+            <a:spAutoFit/>
+          </a:bodyPr>
+          <a:lstStyle/>
+          <a:p>
+            <a:pPr algn="l">
+              <a:spcAft>
+                <a:spcPts val="400"/>
+              </a:spcAft>
+            </a:pPr>
+            <a:r>
+              <a:rPr sz="1600" b="1" i="0">
+                <a:solidFill>
+                  <a:srgbClr val="2C8A5A"/>
+                </a:solidFill>
+                <a:latin typeface="Arial"/>
+              </a:rPr>
+              <a:t>Choose it if</a:t>
+            </a:r>
+          </a:p>
+        </p:txBody>
+      </p:sp>
+      <p:sp>
+        <p:nvSpPr>
+          <p:cNvPr id="7" name="TextBox 6"/>
+          <p:cNvSpPr txBox="1"/>
+          <p:nvPr/>
+        </p:nvSpPr>
+        <p:spPr>
+          <a:xfrm>
+            <a:off x="6309360" y="1371600"/>
+            <a:ext cx="5120640" cy="365760"/>
+          </a:xfrm>
+          <a:prstGeom prst="rect">
+            <a:avLst/>
+          </a:prstGeom>
+          <a:noFill/>
+        </p:spPr>
+        <p:txBody>
+          <a:bodyPr wrap="square" anchor="t">
+            <a:spAutoFit/>
+          </a:bodyPr>
+          <a:lstStyle/>
+          <a:p>
+            <a:pPr algn="l">
+              <a:spcAft>
+                <a:spcPts val="400"/>
+              </a:spcAft>
+            </a:pPr>
+            <a:r>
+              <a:rPr sz="1600" b="1" i="0">
+                <a:solidFill>
+                  <a:srgbClr val="BF3F3A"/>
+                </a:solidFill>
+                <a:latin typeface="Arial"/>
+              </a:rPr>
+              <a:t>Leave it for now if</a:t>
+            </a:r>
+          </a:p>
+        </p:txBody>
+      </p:sp>
+      <p:sp>
+        <p:nvSpPr>
+          <p:cNvPr id="8" name="Oval 7"/>
+          <p:cNvSpPr/>
+          <p:nvPr/>
+        </p:nvSpPr>
+        <p:spPr>
+          <a:xfrm>
+            <a:off x="822960" y="1874519"/>
+            <a:ext cx="274320" cy="274320"/>
+          </a:xfrm>
+          <a:prstGeom prst="ellipse">
+            <a:avLst/>
+          </a:prstGeom>
+          <a:solidFill>
+            <a:srgbClr val="2C8A5A"/>
+          </a:solidFill>
+          <a:ln>
+            <a:noFill/>
+          </a:ln>
+          <a:effectLst/>
+        </p:spPr>
+        <p:style>
+          <a:lnRef idx="1">
+            <a:schemeClr val="accent1"/>
+          </a:lnRef>
+          <a:fillRef idx="3">
+            <a:schemeClr val="accent1"/>
+          </a:fillRef>
+          <a:effectRef idx="2">
+            <a:schemeClr val="accent1"/>
+          </a:effectRef>
+          <a:fontRef idx="minor">
+            <a:schemeClr val="lt1"/>
+          </a:fontRef>
+        </p:style>
+        <p:txBody>
+          <a:bodyPr rtlCol="0" anchor="ctr"/>
+          <a:lstStyle/>
+          <a:p>
+            <a:pPr algn="ctr"/>
+          </a:p>
+        </p:txBody>
+      </p:sp>
+      <p:sp>
+        <p:nvSpPr>
+          <p:cNvPr id="9" name="TextBox 8"/>
+          <p:cNvSpPr txBox="1"/>
+          <p:nvPr/>
+        </p:nvSpPr>
+        <p:spPr>
+          <a:xfrm>
+            <a:off x="1234440" y="1810512"/>
+            <a:ext cx="4663440" cy="365760"/>
+          </a:xfrm>
+          <a:prstGeom prst="rect">
+            <a:avLst/>
+          </a:prstGeom>
+          <a:noFill/>
+        </p:spPr>
+        <p:txBody>
+          <a:bodyPr wrap="square" anchor="t">
+            <a:spAutoFit/>
+          </a:bodyPr>
+          <a:lstStyle/>
+          <a:p>
+            <a:pPr algn="l">
+              <a:spcAft>
+                <a:spcPts val="400"/>
+              </a:spcAft>
+            </a:pPr>
+            <a:r>
+              <a:rPr sz="1400" b="1" i="0">
+                <a:solidFill>
+                  <a:srgbClr val="000000"/>
+                </a:solidFill>
+                <a:latin typeface="Arial"/>
+              </a:rPr>
+              <a:t>Starts with a request</a:t>
+            </a:r>
+          </a:p>
+        </p:txBody>
+      </p:sp>
+      <p:sp>
+        <p:nvSpPr>
+          <p:cNvPr id="10" name="TextBox 9"/>
+          <p:cNvSpPr txBox="1"/>
+          <p:nvPr/>
+        </p:nvSpPr>
+        <p:spPr>
+          <a:xfrm>
+            <a:off x="1234440" y="2157984"/>
+            <a:ext cx="4663440" cy="640080"/>
+          </a:xfrm>
+          <a:prstGeom prst="rect">
+            <a:avLst/>
+          </a:prstGeom>
+          <a:noFill/>
+        </p:spPr>
+        <p:txBody>
+          <a:bodyPr wrap="square" anchor="t">
+            <a:spAutoFit/>
+          </a:bodyPr>
+          <a:lstStyle/>
+          <a:p>
+            <a:pPr algn="l">
+              <a:spcAft>
+                <a:spcPts val="400"/>
+              </a:spcAft>
+            </a:pPr>
+            <a:r>
+              <a:rPr sz="1200" b="0" i="0">
+                <a:solidFill>
+                  <a:srgbClr val="6B7280"/>
+                </a:solidFill>
+                <a:latin typeface="Arial"/>
+              </a:rPr>
+              <a:t>an email, a form, a ticket, a call: something an intake agent can read</a:t>
+            </a:r>
+          </a:p>
+        </p:txBody>
+      </p:sp>
+      <p:sp>
+        <p:nvSpPr>
+          <p:cNvPr id="11" name="Oval 10"/>
+          <p:cNvSpPr/>
+          <p:nvPr/>
+        </p:nvSpPr>
+        <p:spPr>
+          <a:xfrm>
+            <a:off x="6309360" y="1874519"/>
+            <a:ext cx="274320" cy="274320"/>
+          </a:xfrm>
+          <a:prstGeom prst="ellipse">
+            <a:avLst/>
+          </a:prstGeom>
+          <a:solidFill>
+            <a:srgbClr val="BF3F3A"/>
+          </a:solidFill>
+          <a:ln>
+            <a:noFill/>
+          </a:ln>
+          <a:effectLst/>
+        </p:spPr>
+        <p:style>
+          <a:lnRef idx="1">
+            <a:schemeClr val="accent1"/>
+          </a:lnRef>
+          <a:fillRef idx="3">
+            <a:schemeClr val="accent1"/>
+          </a:fillRef>
+          <a:effectRef idx="2">
+            <a:schemeClr val="accent1"/>
+          </a:effectRef>
+          <a:fontRef idx="minor">
+            <a:schemeClr val="lt1"/>
+          </a:fontRef>
+        </p:style>
+        <p:txBody>
+          <a:bodyPr rtlCol="0" anchor="ctr"/>
+          <a:lstStyle/>
+          <a:p>
+            <a:pPr algn="ctr"/>
+          </a:p>
+        </p:txBody>
+      </p:sp>
+      <p:sp>
+        <p:nvSpPr>
+          <p:cNvPr id="12" name="TextBox 11"/>
+          <p:cNvSpPr txBox="1"/>
+          <p:nvPr/>
+        </p:nvSpPr>
+        <p:spPr>
+          <a:xfrm>
+            <a:off x="6720840" y="1810512"/>
+            <a:ext cx="4663440" cy="365760"/>
+          </a:xfrm>
+          <a:prstGeom prst="rect">
+            <a:avLst/>
+          </a:prstGeom>
+          <a:noFill/>
+        </p:spPr>
+        <p:txBody>
+          <a:bodyPr wrap="square" anchor="t">
+            <a:spAutoFit/>
+          </a:bodyPr>
+          <a:lstStyle/>
+          <a:p>
+            <a:pPr algn="l">
+              <a:spcAft>
+                <a:spcPts val="400"/>
+              </a:spcAft>
+            </a:pPr>
+            <a:r>
+              <a:rPr sz="1400" b="1" i="0">
+                <a:solidFill>
+                  <a:srgbClr val="000000"/>
+                </a:solidFill>
+                <a:latin typeface="Arial"/>
+              </a:rPr>
+              <a:t>Every step needs an expert</a:t>
+            </a:r>
+          </a:p>
+        </p:txBody>
+      </p:sp>
+      <p:sp>
+        <p:nvSpPr>
+          <p:cNvPr id="13" name="TextBox 12"/>
+          <p:cNvSpPr txBox="1"/>
+          <p:nvPr/>
+        </p:nvSpPr>
+        <p:spPr>
+          <a:xfrm>
+            <a:off x="6720840" y="2157984"/>
+            <a:ext cx="4663440" cy="640080"/>
+          </a:xfrm>
+          <a:prstGeom prst="rect">
+            <a:avLst/>
+          </a:prstGeom>
+          <a:noFill/>
+        </p:spPr>
+        <p:txBody>
+          <a:bodyPr wrap="square" anchor="t">
+            <a:spAutoFit/>
+          </a:bodyPr>
+          <a:lstStyle/>
+          <a:p>
+            <a:pPr algn="l">
+              <a:spcAft>
+                <a:spcPts val="400"/>
+              </a:spcAft>
+            </a:pPr>
+            <a:r>
+              <a:rPr sz="1200" b="0" i="0">
+                <a:solidFill>
+                  <a:srgbClr val="6B7280"/>
+                </a:solidFill>
+                <a:latin typeface="Arial"/>
+              </a:rPr>
+              <a:t>if judgement is everywhere, start smaller</a:t>
+            </a:r>
+          </a:p>
+        </p:txBody>
+      </p:sp>
+      <p:sp>
+        <p:nvSpPr>
+          <p:cNvPr id="14" name="Oval 13"/>
+          <p:cNvSpPr/>
+          <p:nvPr/>
+        </p:nvSpPr>
+        <p:spPr>
+          <a:xfrm>
+            <a:off x="822960" y="2971800"/>
+            <a:ext cx="274320" cy="274320"/>
+          </a:xfrm>
+          <a:prstGeom prst="ellipse">
+            <a:avLst/>
+          </a:prstGeom>
+          <a:solidFill>
+            <a:srgbClr val="2C8A5A"/>
+          </a:solidFill>
+          <a:ln>
+            <a:noFill/>
+          </a:ln>
+          <a:effectLst/>
+        </p:spPr>
+        <p:style>
+          <a:lnRef idx="1">
+            <a:schemeClr val="accent1"/>
+          </a:lnRef>
+          <a:fillRef idx="3">
+            <a:schemeClr val="accent1"/>
+          </a:fillRef>
+          <a:effectRef idx="2">
+            <a:schemeClr val="accent1"/>
+          </a:effectRef>
+          <a:fontRef idx="minor">
+            <a:schemeClr val="lt1"/>
+          </a:fontRef>
+        </p:style>
+        <p:txBody>
+          <a:bodyPr rtlCol="0" anchor="ctr"/>
+          <a:lstStyle/>
+          <a:p>
+            <a:pPr algn="ctr"/>
+          </a:p>
+        </p:txBody>
+      </p:sp>
+      <p:sp>
+        <p:nvSpPr>
+          <p:cNvPr id="15" name="TextBox 14"/>
+          <p:cNvSpPr txBox="1"/>
+          <p:nvPr/>
+        </p:nvSpPr>
+        <p:spPr>
+          <a:xfrm>
+            <a:off x="1234440" y="2907792"/>
+            <a:ext cx="4663440" cy="365760"/>
+          </a:xfrm>
+          <a:prstGeom prst="rect">
+            <a:avLst/>
+          </a:prstGeom>
+          <a:noFill/>
+        </p:spPr>
+        <p:txBody>
+          <a:bodyPr wrap="square" anchor="t">
+            <a:spAutoFit/>
+          </a:bodyPr>
+          <a:lstStyle/>
+          <a:p>
+            <a:pPr algn="l">
+              <a:spcAft>
+                <a:spcPts val="400"/>
+              </a:spcAft>
+            </a:pPr>
+            <a:r>
+              <a:rPr sz="1400" b="1" i="0">
+                <a:solidFill>
+                  <a:srgbClr val="000000"/>
+                </a:solidFill>
+                <a:latin typeface="Arial"/>
+              </a:rPr>
+              <a:t>Many hand-offs, little judgement</a:t>
+            </a:r>
+          </a:p>
+        </p:txBody>
+      </p:sp>
+      <p:sp>
+        <p:nvSpPr>
+          <p:cNvPr id="16" name="TextBox 15"/>
+          <p:cNvSpPr txBox="1"/>
+          <p:nvPr/>
+        </p:nvSpPr>
+        <p:spPr>
+          <a:xfrm>
+            <a:off x="1234440" y="3255264"/>
+            <a:ext cx="4663440" cy="640080"/>
+          </a:xfrm>
+          <a:prstGeom prst="rect">
+            <a:avLst/>
+          </a:prstGeom>
+          <a:noFill/>
+        </p:spPr>
+        <p:txBody>
+          <a:bodyPr wrap="square" anchor="t">
+            <a:spAutoFit/>
+          </a:bodyPr>
+          <a:lstStyle/>
+          <a:p>
+            <a:pPr algn="l">
+              <a:spcAft>
+                <a:spcPts val="400"/>
+              </a:spcAft>
+            </a:pPr>
+            <a:r>
+              <a:rPr sz="1200" b="0" i="0">
+                <a:solidFill>
+                  <a:srgbClr val="6B7280"/>
+                </a:solidFill>
+                <a:latin typeface="Arial"/>
+              </a:rPr>
+              <a:t>most steps are checks and rules; one or two need a person</a:t>
+            </a:r>
+          </a:p>
+        </p:txBody>
+      </p:sp>
+      <p:sp>
+        <p:nvSpPr>
+          <p:cNvPr id="17" name="Oval 16"/>
+          <p:cNvSpPr/>
+          <p:nvPr/>
+        </p:nvSpPr>
+        <p:spPr>
+          <a:xfrm>
+            <a:off x="6309360" y="2971800"/>
+            <a:ext cx="274320" cy="274320"/>
+          </a:xfrm>
+          <a:prstGeom prst="ellipse">
+            <a:avLst/>
+          </a:prstGeom>
+          <a:solidFill>
+            <a:srgbClr val="BF3F3A"/>
+          </a:solidFill>
+          <a:ln>
+            <a:noFill/>
+          </a:ln>
+          <a:effectLst/>
+        </p:spPr>
+        <p:style>
+          <a:lnRef idx="1">
+            <a:schemeClr val="accent1"/>
+          </a:lnRef>
+          <a:fillRef idx="3">
+            <a:schemeClr val="accent1"/>
+          </a:fillRef>
+          <a:effectRef idx="2">
+            <a:schemeClr val="accent1"/>
+          </a:effectRef>
+          <a:fontRef idx="minor">
+            <a:schemeClr val="lt1"/>
+          </a:fontRef>
+        </p:style>
+        <p:txBody>
+          <a:bodyPr rtlCol="0" anchor="ctr"/>
+          <a:lstStyle/>
+          <a:p>
+            <a:pPr algn="ctr"/>
+          </a:p>
+        </p:txBody>
+      </p:sp>
+      <p:sp>
+        <p:nvSpPr>
+          <p:cNvPr id="18" name="TextBox 17"/>
+          <p:cNvSpPr txBox="1"/>
+          <p:nvPr/>
+        </p:nvSpPr>
+        <p:spPr>
+          <a:xfrm>
+            <a:off x="6720840" y="2907792"/>
+            <a:ext cx="4663440" cy="365760"/>
+          </a:xfrm>
+          <a:prstGeom prst="rect">
+            <a:avLst/>
+          </a:prstGeom>
+          <a:noFill/>
+        </p:spPr>
+        <p:txBody>
+          <a:bodyPr wrap="square" anchor="t">
+            <a:spAutoFit/>
+          </a:bodyPr>
+          <a:lstStyle/>
+          <a:p>
+            <a:pPr algn="l">
+              <a:spcAft>
+                <a:spcPts val="400"/>
+              </a:spcAft>
+            </a:pPr>
+            <a:r>
+              <a:rPr sz="1400" b="1" i="0">
+                <a:solidFill>
+                  <a:srgbClr val="000000"/>
+                </a:solidFill>
+                <a:latin typeface="Arial"/>
+              </a:rPr>
+              <a:t>No data to check</a:t>
+            </a:r>
+          </a:p>
+        </p:txBody>
+      </p:sp>
+      <p:sp>
+        <p:nvSpPr>
+          <p:cNvPr id="19" name="TextBox 18"/>
+          <p:cNvSpPr txBox="1"/>
+          <p:nvPr/>
+        </p:nvSpPr>
+        <p:spPr>
+          <a:xfrm>
+            <a:off x="6720840" y="3255264"/>
+            <a:ext cx="4663440" cy="640080"/>
+          </a:xfrm>
+          <a:prstGeom prst="rect">
+            <a:avLst/>
+          </a:prstGeom>
+          <a:noFill/>
+        </p:spPr>
+        <p:txBody>
+          <a:bodyPr wrap="square" anchor="t">
+            <a:spAutoFit/>
+          </a:bodyPr>
+          <a:lstStyle/>
+          <a:p>
+            <a:pPr algn="l">
+              <a:spcAft>
+                <a:spcPts val="400"/>
+              </a:spcAft>
+            </a:pPr>
+            <a:r>
+              <a:rPr sz="1200" b="0" i="0">
+                <a:solidFill>
+                  <a:srgbClr val="6B7280"/>
+                </a:solidFill>
+                <a:latin typeface="Arial"/>
+              </a:rPr>
+              <a:t>an agent cannot verify what no system records</a:t>
+            </a:r>
+          </a:p>
+        </p:txBody>
+      </p:sp>
+      <p:sp>
+        <p:nvSpPr>
+          <p:cNvPr id="20" name="Oval 19"/>
+          <p:cNvSpPr/>
+          <p:nvPr/>
+        </p:nvSpPr>
+        <p:spPr>
+          <a:xfrm>
+            <a:off x="822960" y="4069080"/>
+            <a:ext cx="274320" cy="274320"/>
+          </a:xfrm>
+          <a:prstGeom prst="ellipse">
+            <a:avLst/>
+          </a:prstGeom>
+          <a:solidFill>
+            <a:srgbClr val="2C8A5A"/>
+          </a:solidFill>
+          <a:ln>
+            <a:noFill/>
+          </a:ln>
+          <a:effectLst/>
+        </p:spPr>
+        <p:style>
+          <a:lnRef idx="1">
+            <a:schemeClr val="accent1"/>
+          </a:lnRef>
+          <a:fillRef idx="3">
+            <a:schemeClr val="accent1"/>
+          </a:fillRef>
+          <a:effectRef idx="2">
+            <a:schemeClr val="accent1"/>
+          </a:effectRef>
+          <a:fontRef idx="minor">
+            <a:schemeClr val="lt1"/>
+          </a:fontRef>
+        </p:style>
+        <p:txBody>
+          <a:bodyPr rtlCol="0" anchor="ctr"/>
+          <a:lstStyle/>
+          <a:p>
+            <a:pPr algn="ctr"/>
+          </a:p>
+        </p:txBody>
+      </p:sp>
+      <p:sp>
+        <p:nvSpPr>
+          <p:cNvPr id="21" name="TextBox 20"/>
+          <p:cNvSpPr txBox="1"/>
+          <p:nvPr/>
+        </p:nvSpPr>
+        <p:spPr>
+          <a:xfrm>
+            <a:off x="1234440" y="4005072"/>
+            <a:ext cx="4663440" cy="365760"/>
+          </a:xfrm>
+          <a:prstGeom prst="rect">
+            <a:avLst/>
+          </a:prstGeom>
+          <a:noFill/>
+        </p:spPr>
+        <p:txBody>
+          <a:bodyPr wrap="square" anchor="t">
+            <a:spAutoFit/>
+          </a:bodyPr>
+          <a:lstStyle/>
+          <a:p>
+            <a:pPr algn="l">
+              <a:spcAft>
+                <a:spcPts val="400"/>
+              </a:spcAft>
+            </a:pPr>
+            <a:r>
+              <a:rPr sz="1400" b="1" i="0">
+                <a:solidFill>
+                  <a:srgbClr val="000000"/>
+                </a:solidFill>
+                <a:latin typeface="Arial"/>
+              </a:rPr>
+              <a:t>Facts live in systems</a:t>
+            </a:r>
+          </a:p>
+        </p:txBody>
+      </p:sp>
+      <p:sp>
+        <p:nvSpPr>
+          <p:cNvPr id="22" name="TextBox 21"/>
+          <p:cNvSpPr txBox="1"/>
+          <p:nvPr/>
+        </p:nvSpPr>
+        <p:spPr>
+          <a:xfrm>
+            <a:off x="1234440" y="4352544"/>
+            <a:ext cx="4663440" cy="640080"/>
+          </a:xfrm>
+          <a:prstGeom prst="rect">
+            <a:avLst/>
+          </a:prstGeom>
+          <a:noFill/>
+        </p:spPr>
+        <p:txBody>
+          <a:bodyPr wrap="square" anchor="t">
+            <a:spAutoFit/>
+          </a:bodyPr>
+          <a:lstStyle/>
+          <a:p>
+            <a:pPr algn="l">
+              <a:spcAft>
+                <a:spcPts val="400"/>
+              </a:spcAft>
+            </a:pPr>
+            <a:r>
+              <a:rPr sz="1200" b="0" i="0">
+                <a:solidFill>
+                  <a:srgbClr val="6B7280"/>
+                </a:solidFill>
+                <a:latin typeface="Arial"/>
+              </a:rPr>
+              <a:t>the answers are in an ERP, a CRM, a tracker, a calendar, not in someone's head</a:t>
+            </a:r>
+          </a:p>
+        </p:txBody>
+      </p:sp>
+      <p:sp>
+        <p:nvSpPr>
+          <p:cNvPr id="23" name="Oval 22"/>
+          <p:cNvSpPr/>
+          <p:nvPr/>
+        </p:nvSpPr>
+        <p:spPr>
+          <a:xfrm>
+            <a:off x="6309360" y="4069080"/>
+            <a:ext cx="274320" cy="274320"/>
+          </a:xfrm>
+          <a:prstGeom prst="ellipse">
+            <a:avLst/>
+          </a:prstGeom>
+          <a:solidFill>
+            <a:srgbClr val="BF3F3A"/>
+          </a:solidFill>
+          <a:ln>
+            <a:noFill/>
+          </a:ln>
+          <a:effectLst/>
+        </p:spPr>
+        <p:style>
+          <a:lnRef idx="1">
+            <a:schemeClr val="accent1"/>
+          </a:lnRef>
+          <a:fillRef idx="3">
+            <a:schemeClr val="accent1"/>
+          </a:fillRef>
+          <a:effectRef idx="2">
+            <a:schemeClr val="accent1"/>
+          </a:effectRef>
+          <a:fontRef idx="minor">
+            <a:schemeClr val="lt1"/>
+          </a:fontRef>
+        </p:style>
+        <p:txBody>
+          <a:bodyPr rtlCol="0" anchor="ctr"/>
+          <a:lstStyle/>
+          <a:p>
+            <a:pPr algn="ctr"/>
+          </a:p>
+        </p:txBody>
+      </p:sp>
+      <p:sp>
+        <p:nvSpPr>
+          <p:cNvPr id="24" name="TextBox 23"/>
+          <p:cNvSpPr txBox="1"/>
+          <p:nvPr/>
+        </p:nvSpPr>
+        <p:spPr>
+          <a:xfrm>
+            <a:off x="6720840" y="4005072"/>
+            <a:ext cx="4663440" cy="365760"/>
+          </a:xfrm>
+          <a:prstGeom prst="rect">
+            <a:avLst/>
+          </a:prstGeom>
+          <a:noFill/>
+        </p:spPr>
+        <p:txBody>
+          <a:bodyPr wrap="square" anchor="t">
+            <a:spAutoFit/>
+          </a:bodyPr>
+          <a:lstStyle/>
+          <a:p>
+            <a:pPr algn="l">
+              <a:spcAft>
+                <a:spcPts val="400"/>
+              </a:spcAft>
+            </a:pPr>
+            <a:r>
+              <a:rPr sz="1400" b="1" i="0">
+                <a:solidFill>
+                  <a:srgbClr val="000000"/>
+                </a:solidFill>
+                <a:latin typeface="Arial"/>
+              </a:rPr>
+              <a:t>Mostly relationship</a:t>
+            </a:r>
+          </a:p>
+        </p:txBody>
+      </p:sp>
+      <p:sp>
+        <p:nvSpPr>
+          <p:cNvPr id="25" name="TextBox 24"/>
+          <p:cNvSpPr txBox="1"/>
+          <p:nvPr/>
+        </p:nvSpPr>
+        <p:spPr>
+          <a:xfrm>
+            <a:off x="6720840" y="4352544"/>
+            <a:ext cx="4663440" cy="640080"/>
+          </a:xfrm>
+          <a:prstGeom prst="rect">
+            <a:avLst/>
+          </a:prstGeom>
+          <a:noFill/>
+        </p:spPr>
+        <p:txBody>
+          <a:bodyPr wrap="square" anchor="t">
+            <a:spAutoFit/>
+          </a:bodyPr>
+          <a:lstStyle/>
+          <a:p>
+            <a:pPr algn="l">
+              <a:spcAft>
+                <a:spcPts val="400"/>
+              </a:spcAft>
+            </a:pPr>
+            <a:r>
+              <a:rPr sz="1200" b="0" i="0">
+                <a:solidFill>
+                  <a:srgbClr val="6B7280"/>
+                </a:solidFill>
+                <a:latin typeface="Arial"/>
+              </a:rPr>
+              <a:t>a negotiation or a difficult conversation is not a process to automate</a:t>
+            </a:r>
+          </a:p>
+        </p:txBody>
+      </p:sp>
+      <p:sp>
+        <p:nvSpPr>
+          <p:cNvPr id="26" name="Oval 25"/>
+          <p:cNvSpPr/>
+          <p:nvPr/>
+        </p:nvSpPr>
+        <p:spPr>
+          <a:xfrm>
+            <a:off x="822960" y="5166359"/>
+            <a:ext cx="274320" cy="274320"/>
+          </a:xfrm>
+          <a:prstGeom prst="ellipse">
+            <a:avLst/>
+          </a:prstGeom>
+          <a:solidFill>
+            <a:srgbClr val="2C8A5A"/>
+          </a:solidFill>
+          <a:ln>
+            <a:noFill/>
+          </a:ln>
+          <a:effectLst/>
+        </p:spPr>
+        <p:style>
+          <a:lnRef idx="1">
+            <a:schemeClr val="accent1"/>
+          </a:lnRef>
+          <a:fillRef idx="3">
+            <a:schemeClr val="accent1"/>
+          </a:fillRef>
+          <a:effectRef idx="2">
+            <a:schemeClr val="accent1"/>
+          </a:effectRef>
+          <a:fontRef idx="minor">
+            <a:schemeClr val="lt1"/>
+          </a:fontRef>
+        </p:style>
+        <p:txBody>
+          <a:bodyPr rtlCol="0" anchor="ctr"/>
+          <a:lstStyle/>
+          <a:p>
+            <a:pPr algn="ctr"/>
+          </a:p>
+        </p:txBody>
+      </p:sp>
+      <p:sp>
+        <p:nvSpPr>
+          <p:cNvPr id="27" name="TextBox 26"/>
+          <p:cNvSpPr txBox="1"/>
+          <p:nvPr/>
+        </p:nvSpPr>
+        <p:spPr>
+          <a:xfrm>
+            <a:off x="1234440" y="5102352"/>
+            <a:ext cx="4663440" cy="365760"/>
+          </a:xfrm>
+          <a:prstGeom prst="rect">
+            <a:avLst/>
+          </a:prstGeom>
+          <a:noFill/>
+        </p:spPr>
+        <p:txBody>
+          <a:bodyPr wrap="square" anchor="t">
+            <a:spAutoFit/>
+          </a:bodyPr>
+          <a:lstStyle/>
+          <a:p>
+            <a:pPr algn="l">
+              <a:spcAft>
+                <a:spcPts val="400"/>
+              </a:spcAft>
+            </a:pPr>
+            <a:r>
+              <a:rPr sz="1400" b="1" i="0">
+                <a:solidFill>
+                  <a:srgbClr val="000000"/>
+                </a:solidFill>
+                <a:latin typeface="Arial"/>
+              </a:rPr>
+              <a:t>A clear owner and a clear outcome</a:t>
+            </a:r>
+          </a:p>
+        </p:txBody>
+      </p:sp>
+      <p:sp>
+        <p:nvSpPr>
+          <p:cNvPr id="28" name="TextBox 27"/>
+          <p:cNvSpPr txBox="1"/>
+          <p:nvPr/>
+        </p:nvSpPr>
+        <p:spPr>
+          <a:xfrm>
+            <a:off x="1234440" y="5449824"/>
+            <a:ext cx="4663440" cy="640080"/>
+          </a:xfrm>
+          <a:prstGeom prst="rect">
+            <a:avLst/>
+          </a:prstGeom>
+          <a:noFill/>
+        </p:spPr>
+        <p:txBody>
+          <a:bodyPr wrap="square" anchor="t">
+            <a:spAutoFit/>
+          </a:bodyPr>
+          <a:lstStyle/>
+          <a:p>
+            <a:pPr algn="l">
+              <a:spcAft>
+                <a:spcPts val="400"/>
+              </a:spcAft>
+            </a:pPr>
+            <a:r>
+              <a:rPr sz="1200" b="0" i="0">
+                <a:solidFill>
+                  <a:srgbClr val="6B7280"/>
+                </a:solidFill>
+                <a:latin typeface="Arial"/>
+              </a:rPr>
+              <a:t>someone can say what a good result is, and measure it</a:t>
+            </a:r>
+          </a:p>
+        </p:txBody>
+      </p:sp>
+      <p:sp>
+        <p:nvSpPr>
+          <p:cNvPr id="29" name="Oval 28"/>
+          <p:cNvSpPr/>
+          <p:nvPr/>
+        </p:nvSpPr>
+        <p:spPr>
+          <a:xfrm>
+            <a:off x="6309360" y="5166359"/>
+            <a:ext cx="274320" cy="274320"/>
+          </a:xfrm>
+          <a:prstGeom prst="ellipse">
+            <a:avLst/>
+          </a:prstGeom>
+          <a:solidFill>
+            <a:srgbClr val="BF3F3A"/>
+          </a:solidFill>
+          <a:ln>
+            <a:noFill/>
+          </a:ln>
+          <a:effectLst/>
+        </p:spPr>
+        <p:style>
+          <a:lnRef idx="1">
+            <a:schemeClr val="accent1"/>
+          </a:lnRef>
+          <a:fillRef idx="3">
+            <a:schemeClr val="accent1"/>
+          </a:fillRef>
+          <a:effectRef idx="2">
+            <a:schemeClr val="accent1"/>
+          </a:effectRef>
+          <a:fontRef idx="minor">
+            <a:schemeClr val="lt1"/>
+          </a:fontRef>
+        </p:style>
+        <p:txBody>
+          <a:bodyPr rtlCol="0" anchor="ctr"/>
+          <a:lstStyle/>
+          <a:p>
+            <a:pPr algn="ctr"/>
+          </a:p>
+        </p:txBody>
+      </p:sp>
+      <p:sp>
+        <p:nvSpPr>
+          <p:cNvPr id="30" name="TextBox 29"/>
+          <p:cNvSpPr txBox="1"/>
+          <p:nvPr/>
+        </p:nvSpPr>
+        <p:spPr>
+          <a:xfrm>
+            <a:off x="6720840" y="5102352"/>
+            <a:ext cx="4663440" cy="365760"/>
+          </a:xfrm>
+          <a:prstGeom prst="rect">
+            <a:avLst/>
+          </a:prstGeom>
+          <a:noFill/>
+        </p:spPr>
+        <p:txBody>
+          <a:bodyPr wrap="square" anchor="t">
+            <a:spAutoFit/>
+          </a:bodyPr>
+          <a:lstStyle/>
+          <a:p>
+            <a:pPr algn="l">
+              <a:spcAft>
+                <a:spcPts val="400"/>
+              </a:spcAft>
+            </a:pPr>
+            <a:r>
+              <a:rPr sz="1400" b="1" i="0">
+                <a:solidFill>
+                  <a:srgbClr val="000000"/>
+                </a:solidFill>
+                <a:latin typeface="Arial"/>
+              </a:rPr>
+              <a:t>Nobody owns it</a:t>
+            </a:r>
+          </a:p>
+        </p:txBody>
+      </p:sp>
+      <p:sp>
+        <p:nvSpPr>
+          <p:cNvPr id="31" name="TextBox 30"/>
+          <p:cNvSpPr txBox="1"/>
+          <p:nvPr/>
+        </p:nvSpPr>
+        <p:spPr>
+          <a:xfrm>
+            <a:off x="6720840" y="5449824"/>
+            <a:ext cx="4663440" cy="640080"/>
+          </a:xfrm>
+          <a:prstGeom prst="rect">
+            <a:avLst/>
+          </a:prstGeom>
+          <a:noFill/>
+        </p:spPr>
+        <p:txBody>
+          <a:bodyPr wrap="square" anchor="t">
+            <a:spAutoFit/>
+          </a:bodyPr>
+          <a:lstStyle/>
+          <a:p>
+            <a:pPr algn="l">
+              <a:spcAft>
+                <a:spcPts val="400"/>
+              </a:spcAft>
+            </a:pPr>
+            <a:r>
+              <a:rPr sz="1200" b="0" i="0">
+                <a:solidFill>
+                  <a:srgbClr val="6B7280"/>
+                </a:solidFill>
+                <a:latin typeface="Arial"/>
+              </a:rPr>
+              <a:t>if no one can change the process, the design will not survive the room</a:t>
+            </a:r>
+          </a:p>
+        </p:txBody>
+      </p:sp>
+      <p:sp>
+        <p:nvSpPr>
+          <p:cNvPr id="32" name="TextBox 31"/>
+          <p:cNvSpPr txBox="1"/>
+          <p:nvPr/>
+        </p:nvSpPr>
+        <p:spPr>
+          <a:xfrm>
+            <a:off x="822960" y="6172200"/>
+            <a:ext cx="10607040" cy="320040"/>
+          </a:xfrm>
+          <a:prstGeom prst="rect">
+            <a:avLst/>
+          </a:prstGeom>
+          <a:noFill/>
+        </p:spPr>
+        <p:txBody>
+          <a:bodyPr wrap="square" anchor="t">
+            <a:spAutoFit/>
+          </a:bodyPr>
+          <a:lstStyle/>
+          <a:p>
+            <a:pPr algn="l">
+              <a:spcAft>
+                <a:spcPts val="400"/>
+              </a:spcAft>
+            </a:pPr>
+            <a:r>
+              <a:rPr sz="1200" b="0" i="1">
+                <a:solidFill>
+                  <a:srgbClr val="002060"/>
+                </a:solidFill>
+                <a:latin typeface="Arial"/>
+              </a:rPr>
+              <a:t>Tie-breaker: the one whose owner is in the room.</a:t>
+            </a:r>
+          </a:p>
+        </p:txBody>
+      </p:sp>
+    </p:spTree>
+  </p:cSld>
+  <p:clrMapOvr>
+    <a:masterClrMapping/>
+  </p:clrMapOvr>
+</p:sld>
+</file>
+
+<file path=ppt/slides/slide23.xml><?xml version="1.0" encoding="utf-8"?>
+<p:sld xmlns:a="http://schemas.openxmlformats.org/drawingml/2006/main" xmlns:p="http://schemas.openxmlformats.org/presentationml/2006/main" xmlns:r="http://schemas.openxmlformats.org/officeDocument/2006/relationships">
+  <p:cSld>
+    <p:spTree>
+      <p:nvGrpSpPr>
+        <p:cNvPr id="1" name=""/>
+        <p:cNvGrpSpPr/>
+        <p:nvPr/>
+      </p:nvGrpSpPr>
+      <p:grpSpPr/>
+      <p:sp>
+        <p:nvSpPr>
+          <p:cNvPr id="2" name="TextBox 1"/>
+          <p:cNvSpPr txBox="1"/>
+          <p:nvPr/>
+        </p:nvSpPr>
+        <p:spPr>
+          <a:xfrm>
+            <a:off x="9893808" y="6492240"/>
+            <a:ext cx="2084831" cy="274320"/>
+          </a:xfrm>
+          <a:prstGeom prst="rect">
+            <a:avLst/>
+          </a:prstGeom>
+          <a:noFill/>
+        </p:spPr>
+        <p:txBody>
+          <a:bodyPr wrap="square" anchor="t">
+            <a:spAutoFit/>
+          </a:bodyPr>
+          <a:lstStyle/>
+          <a:p>
+            <a:pPr algn="r">
+              <a:spcAft>
+                <a:spcPts val="400"/>
+              </a:spcAft>
+            </a:pPr>
+            <a:r>
+              <a:rPr sz="1000" b="0" i="0">
+                <a:solidFill>
+                  <a:srgbClr val="6B7280"/>
+                </a:solidFill>
+                <a:latin typeface="Arial"/>
+              </a:rPr>
+              <a:t>23</a:t>
+            </a:r>
+          </a:p>
+        </p:txBody>
+      </p:sp>
+      <p:sp>
+        <p:nvSpPr>
+          <p:cNvPr id="3" name="TextBox 2"/>
+          <p:cNvSpPr txBox="1"/>
+          <p:nvPr/>
+        </p:nvSpPr>
+        <p:spPr>
+          <a:xfrm>
+            <a:off x="838047" y="192024"/>
+            <a:ext cx="10515600" cy="813816"/>
+          </a:xfrm>
+          <a:prstGeom prst="rect">
+            <a:avLst/>
+          </a:prstGeom>
+          <a:noFill/>
+        </p:spPr>
+        <p:txBody>
+          <a:bodyPr wrap="square" anchor="ctr">
+            <a:spAutoFit/>
+          </a:bodyPr>
+          <a:lstStyle/>
+          <a:p>
+            <a:pPr algn="ctr">
+              <a:spcAft>
+                <a:spcPts val="400"/>
+              </a:spcAft>
+            </a:pPr>
+            <a:r>
+              <a:rPr sz="2800" b="1" i="0">
+                <a:solidFill>
+                  <a:srgbClr val="002060"/>
+                </a:solidFill>
+                <a:latin typeface="Arial"/>
+              </a:rPr>
+              <a:t>STEP 3 · THE MAPPING CANVAS</a:t>
+            </a:r>
+          </a:p>
+        </p:txBody>
+      </p:sp>
+      <p:cxnSp>
+        <p:nvCxnSpPr>
+          <p:cNvPr id="4" name="Connector 3"/>
+          <p:cNvCxnSpPr/>
+          <p:nvPr/>
+        </p:nvCxnSpPr>
+        <p:spPr>
+          <a:xfrm>
+            <a:off x="0" y="1097280"/>
+            <a:ext cx="12191695" cy="0"/>
+          </a:xfrm>
+          <a:prstGeom prst="line">
+            <a:avLst/>
+          </a:prstGeom>
+          <a:ln w="9525">
+            <a:solidFill>
+              <a:srgbClr val="D5DBE2"/>
+            </a:solidFill>
+          </a:ln>
+        </p:spPr>
+        <p:style>
+          <a:lnRef idx="2">
+            <a:schemeClr val="accent1"/>
+          </a:lnRef>
+          <a:fillRef idx="0">
+            <a:schemeClr val="accent1"/>
+          </a:fillRef>
+          <a:effectRef idx="1">
+            <a:schemeClr val="accent1"/>
+          </a:effectRef>
+          <a:fontRef idx="minor">
+            <a:schemeClr val="tx1"/>
+          </a:fontRef>
+        </p:style>
+      </p:cxnSp>
+      <p:cxnSp>
+        <p:nvCxnSpPr>
+          <p:cNvPr id="5" name="Connector 4"/>
+          <p:cNvCxnSpPr/>
+          <p:nvPr/>
+        </p:nvCxnSpPr>
+        <p:spPr>
+          <a:xfrm>
+            <a:off x="5952744" y="1133856"/>
+            <a:ext cx="292608" cy="0"/>
+          </a:xfrm>
+          <a:prstGeom prst="line">
+            <a:avLst/>
+          </a:prstGeom>
+          <a:ln w="76200">
+            <a:solidFill>
+              <a:srgbClr val="00305C"/>
+            </a:solidFill>
+          </a:ln>
+        </p:spPr>
+        <p:style>
+          <a:lnRef idx="2">
+            <a:schemeClr val="accent1"/>
+          </a:lnRef>
+          <a:fillRef idx="0">
+            <a:schemeClr val="accent1"/>
+          </a:fillRef>
+          <a:effectRef idx="1">
+            <a:schemeClr val="accent1"/>
+          </a:effectRef>
+          <a:fontRef idx="minor">
+            <a:schemeClr val="tx1"/>
+          </a:fontRef>
+        </p:style>
+      </p:cxnSp>
+      <p:sp>
+        <p:nvSpPr>
+          <p:cNvPr id="6" name="TextBox 5"/>
+          <p:cNvSpPr txBox="1"/>
+          <p:nvPr/>
+        </p:nvSpPr>
+        <p:spPr>
+          <a:xfrm>
+            <a:off x="822960" y="1280160"/>
+            <a:ext cx="10607040" cy="320040"/>
+          </a:xfrm>
+          <a:prstGeom prst="rect">
+            <a:avLst/>
+          </a:prstGeom>
+          <a:noFill/>
+        </p:spPr>
+        <p:txBody>
+          <a:bodyPr wrap="square" anchor="t">
+            <a:spAutoFit/>
+          </a:bodyPr>
+          <a:lstStyle/>
+          <a:p>
+            <a:pPr algn="l">
+              <a:spcAft>
+                <a:spcPts val="400"/>
+              </a:spcAft>
+            </a:pPr>
+            <a:r>
+              <a:rPr sz="1250" b="0" i="0">
+                <a:solidFill>
+                  <a:srgbClr val="6B7280"/>
+                </a:solidFill>
+                <a:latin typeface="Arial"/>
+              </a:rPr>
+              <a:t>Draw this on a shared whiteboard or in the chat. Boxes, not prose.</a:t>
+            </a:r>
+          </a:p>
+        </p:txBody>
+      </p:sp>
+      <p:sp>
+        <p:nvSpPr>
+          <p:cNvPr id="7" name="TextBox 6"/>
+          <p:cNvSpPr txBox="1"/>
+          <p:nvPr/>
+        </p:nvSpPr>
+        <p:spPr>
+          <a:xfrm>
+            <a:off x="822960" y="1645920"/>
+            <a:ext cx="5486400" cy="365760"/>
+          </a:xfrm>
+          <a:prstGeom prst="rect">
+            <a:avLst/>
+          </a:prstGeom>
+          <a:noFill/>
+        </p:spPr>
+        <p:txBody>
+          <a:bodyPr wrap="square" anchor="t">
+            <a:spAutoFit/>
+          </a:bodyPr>
+          <a:lstStyle/>
+          <a:p>
+            <a:pPr algn="l">
+              <a:spcAft>
+                <a:spcPts val="400"/>
+              </a:spcAft>
+            </a:pPr>
+            <a:r>
+              <a:rPr sz="1500" b="1" i="0">
+                <a:solidFill>
+                  <a:srgbClr val="6B7280"/>
+                </a:solidFill>
+                <a:latin typeface="Arial"/>
+              </a:rPr>
+              <a:t>As it is today</a:t>
+            </a:r>
+          </a:p>
+        </p:txBody>
+      </p:sp>
+      <p:sp>
+        <p:nvSpPr>
+          <p:cNvPr id="8" name="Rounded Rectangle 7"/>
+          <p:cNvSpPr/>
+          <p:nvPr/>
+        </p:nvSpPr>
+        <p:spPr>
+          <a:xfrm>
+            <a:off x="822960" y="2057400"/>
+            <a:ext cx="1920240" cy="548640"/>
+          </a:xfrm>
+          <a:prstGeom prst="roundRect">
+            <a:avLst>
+              <a:gd name="adj" fmla="val 12000"/>
+            </a:avLst>
+          </a:prstGeom>
+          <a:solidFill>
+            <a:srgbClr val="FBF1E0"/>
+          </a:solidFill>
+          <a:ln w="15875">
+            <a:solidFill>
+              <a:srgbClr val="B4761C"/>
+            </a:solidFill>
+          </a:ln>
+          <a:effectLst/>
+        </p:spPr>
+        <p:style>
+          <a:lnRef idx="1">
+            <a:schemeClr val="accent1"/>
+          </a:lnRef>
+          <a:fillRef idx="3">
+            <a:schemeClr val="accent1"/>
+          </a:fillRef>
+          <a:effectRef idx="2">
+            <a:schemeClr val="accent1"/>
+          </a:effectRef>
+          <a:fontRef idx="minor">
+            <a:schemeClr val="lt1"/>
+          </a:fontRef>
+        </p:style>
+        <p:txBody>
+          <a:bodyPr rtlCol="0" anchor="ctr" wrap="square" lIns="54864" rIns="54864" tIns="27432" bIns="27432"/>
+          <a:lstStyle/>
+          <a:p>
+            <a:pPr algn="ctr"/>
+            <a:r>
+              <a:rPr sz="1100" b="1" i="0">
+                <a:solidFill>
+                  <a:srgbClr val="000000"/>
+                </a:solidFill>
+                <a:latin typeface="Arial"/>
+              </a:rPr>
+              <a:t>Trigger</a:t>
+            </a:r>
+          </a:p>
+          <a:p>
+            <a:pPr algn="ctr"/>
+            <a:r>
+              <a:rPr sz="850" b="0" i="0">
+                <a:solidFill>
+                  <a:srgbClr val="6B7280"/>
+                </a:solidFill>
+                <a:latin typeface="Arial"/>
+              </a:rPr>
+              <a:t>who · how long</a:t>
+            </a:r>
+          </a:p>
+        </p:txBody>
+      </p:sp>
+      <p:cxnSp>
+        <p:nvCxnSpPr>
+          <p:cNvPr id="9" name="Connector 8"/>
+          <p:cNvCxnSpPr/>
+          <p:nvPr/>
+        </p:nvCxnSpPr>
+        <p:spPr>
+          <a:xfrm>
+            <a:off x="2761488" y="2331720"/>
+            <a:ext cx="237744" cy="0"/>
+          </a:xfrm>
+          <a:prstGeom prst="line">
+            <a:avLst/>
+          </a:prstGeom>
+          <a:ln w="15875">
+            <a:solidFill>
+              <a:srgbClr val="B4761C"/>
+            </a:solidFill>
+            <a:tailEnd type="triangle"/>
+          </a:ln>
+        </p:spPr>
+        <p:style>
+          <a:lnRef idx="2">
+            <a:schemeClr val="accent1"/>
+          </a:lnRef>
+          <a:fillRef idx="0">
+            <a:schemeClr val="accent1"/>
+          </a:fillRef>
+          <a:effectRef idx="1">
+            <a:schemeClr val="accent1"/>
+          </a:effectRef>
+          <a:fontRef idx="minor">
+            <a:schemeClr val="tx1"/>
+          </a:fontRef>
+        </p:style>
+      </p:cxnSp>
+      <p:sp>
+        <p:nvSpPr>
+          <p:cNvPr id="10" name="Rounded Rectangle 9"/>
+          <p:cNvSpPr/>
+          <p:nvPr/>
+        </p:nvSpPr>
+        <p:spPr>
+          <a:xfrm>
+            <a:off x="3017520" y="2057400"/>
+            <a:ext cx="1920240" cy="548640"/>
+          </a:xfrm>
+          <a:prstGeom prst="roundRect">
+            <a:avLst>
+              <a:gd name="adj" fmla="val 12000"/>
+            </a:avLst>
+          </a:prstGeom>
+          <a:solidFill>
+            <a:srgbClr val="FBF1E0"/>
+          </a:solidFill>
+          <a:ln w="15875">
+            <a:solidFill>
+              <a:srgbClr val="B4761C"/>
+            </a:solidFill>
+          </a:ln>
+          <a:effectLst/>
+        </p:spPr>
+        <p:style>
+          <a:lnRef idx="1">
+            <a:schemeClr val="accent1"/>
+          </a:lnRef>
+          <a:fillRef idx="3">
+            <a:schemeClr val="accent1"/>
+          </a:fillRef>
+          <a:effectRef idx="2">
+            <a:schemeClr val="accent1"/>
+          </a:effectRef>
+          <a:fontRef idx="minor">
+            <a:schemeClr val="lt1"/>
+          </a:fontRef>
+        </p:style>
+        <p:txBody>
+          <a:bodyPr rtlCol="0" anchor="ctr" wrap="square" lIns="54864" rIns="54864" tIns="27432" bIns="27432"/>
+          <a:lstStyle/>
+          <a:p>
+            <a:pPr algn="ctr"/>
+            <a:r>
+              <a:rPr sz="1100" b="1" i="0">
+                <a:solidFill>
+                  <a:srgbClr val="000000"/>
+                </a:solidFill>
+                <a:latin typeface="Arial"/>
+              </a:rPr>
+              <a:t>Step 2</a:t>
+            </a:r>
+          </a:p>
+          <a:p>
+            <a:pPr algn="ctr"/>
+            <a:r>
+              <a:rPr sz="850" b="0" i="0">
+                <a:solidFill>
+                  <a:srgbClr val="6B7280"/>
+                </a:solidFill>
+                <a:latin typeface="Arial"/>
+              </a:rPr>
+              <a:t>who · how long</a:t>
+            </a:r>
+          </a:p>
+        </p:txBody>
+      </p:sp>
+      <p:cxnSp>
+        <p:nvCxnSpPr>
+          <p:cNvPr id="11" name="Connector 10"/>
+          <p:cNvCxnSpPr/>
+          <p:nvPr/>
+        </p:nvCxnSpPr>
+        <p:spPr>
+          <a:xfrm>
+            <a:off x="4956048" y="2331720"/>
+            <a:ext cx="237744" cy="0"/>
+          </a:xfrm>
+          <a:prstGeom prst="line">
+            <a:avLst/>
+          </a:prstGeom>
+          <a:ln w="15875">
+            <a:solidFill>
+              <a:srgbClr val="B4761C"/>
+            </a:solidFill>
+            <a:tailEnd type="triangle"/>
+          </a:ln>
+        </p:spPr>
+        <p:style>
+          <a:lnRef idx="2">
+            <a:schemeClr val="accent1"/>
+          </a:lnRef>
+          <a:fillRef idx="0">
+            <a:schemeClr val="accent1"/>
+          </a:fillRef>
+          <a:effectRef idx="1">
+            <a:schemeClr val="accent1"/>
+          </a:effectRef>
+          <a:fontRef idx="minor">
+            <a:schemeClr val="tx1"/>
+          </a:fontRef>
+        </p:style>
+      </p:cxnSp>
+      <p:sp>
+        <p:nvSpPr>
+          <p:cNvPr id="12" name="Rounded Rectangle 11"/>
+          <p:cNvSpPr/>
+          <p:nvPr/>
+        </p:nvSpPr>
+        <p:spPr>
+          <a:xfrm>
+            <a:off x="5212080" y="2057400"/>
+            <a:ext cx="1920240" cy="548640"/>
+          </a:xfrm>
+          <a:prstGeom prst="roundRect">
+            <a:avLst>
+              <a:gd name="adj" fmla="val 12000"/>
+            </a:avLst>
+          </a:prstGeom>
+          <a:solidFill>
+            <a:srgbClr val="FBF1E0"/>
+          </a:solidFill>
+          <a:ln w="15875">
+            <a:solidFill>
+              <a:srgbClr val="B4761C"/>
+            </a:solidFill>
+          </a:ln>
+          <a:effectLst/>
+        </p:spPr>
+        <p:style>
+          <a:lnRef idx="1">
+            <a:schemeClr val="accent1"/>
+          </a:lnRef>
+          <a:fillRef idx="3">
+            <a:schemeClr val="accent1"/>
+          </a:fillRef>
+          <a:effectRef idx="2">
+            <a:schemeClr val="accent1"/>
+          </a:effectRef>
+          <a:fontRef idx="minor">
+            <a:schemeClr val="lt1"/>
+          </a:fontRef>
+        </p:style>
+        <p:txBody>
+          <a:bodyPr rtlCol="0" anchor="ctr" wrap="square" lIns="54864" rIns="54864" tIns="27432" bIns="27432"/>
+          <a:lstStyle/>
+          <a:p>
+            <a:pPr algn="ctr"/>
+            <a:r>
+              <a:rPr sz="1100" b="1" i="0">
+                <a:solidFill>
+                  <a:srgbClr val="000000"/>
+                </a:solidFill>
+                <a:latin typeface="Arial"/>
+              </a:rPr>
+              <a:t>Step 3</a:t>
+            </a:r>
+          </a:p>
+          <a:p>
+            <a:pPr algn="ctr"/>
+            <a:r>
+              <a:rPr sz="850" b="0" i="0">
+                <a:solidFill>
+                  <a:srgbClr val="6B7280"/>
+                </a:solidFill>
+                <a:latin typeface="Arial"/>
+              </a:rPr>
+              <a:t>who · how long</a:t>
+            </a:r>
+          </a:p>
+        </p:txBody>
+      </p:sp>
+      <p:cxnSp>
+        <p:nvCxnSpPr>
+          <p:cNvPr id="13" name="Connector 12"/>
+          <p:cNvCxnSpPr/>
+          <p:nvPr/>
+        </p:nvCxnSpPr>
+        <p:spPr>
+          <a:xfrm>
+            <a:off x="7150608" y="2331720"/>
+            <a:ext cx="237744" cy="0"/>
+          </a:xfrm>
+          <a:prstGeom prst="line">
+            <a:avLst/>
+          </a:prstGeom>
+          <a:ln w="15875">
+            <a:solidFill>
+              <a:srgbClr val="B4761C"/>
+            </a:solidFill>
+            <a:tailEnd type="triangle"/>
+          </a:ln>
+        </p:spPr>
+        <p:style>
+          <a:lnRef idx="2">
+            <a:schemeClr val="accent1"/>
+          </a:lnRef>
+          <a:fillRef idx="0">
+            <a:schemeClr val="accent1"/>
+          </a:fillRef>
+          <a:effectRef idx="1">
+            <a:schemeClr val="accent1"/>
+          </a:effectRef>
+          <a:fontRef idx="minor">
+            <a:schemeClr val="tx1"/>
+          </a:fontRef>
+        </p:style>
+      </p:cxnSp>
+      <p:sp>
+        <p:nvSpPr>
+          <p:cNvPr id="14" name="Rounded Rectangle 13"/>
+          <p:cNvSpPr/>
+          <p:nvPr/>
+        </p:nvSpPr>
+        <p:spPr>
+          <a:xfrm>
+            <a:off x="7406640" y="2057400"/>
+            <a:ext cx="1920240" cy="548640"/>
+          </a:xfrm>
+          <a:prstGeom prst="roundRect">
+            <a:avLst>
+              <a:gd name="adj" fmla="val 12000"/>
+            </a:avLst>
+          </a:prstGeom>
+          <a:solidFill>
+            <a:srgbClr val="FBF1E0"/>
+          </a:solidFill>
+          <a:ln w="15875">
+            <a:solidFill>
+              <a:srgbClr val="B4761C"/>
+            </a:solidFill>
+          </a:ln>
+          <a:effectLst/>
+        </p:spPr>
+        <p:style>
+          <a:lnRef idx="1">
+            <a:schemeClr val="accent1"/>
+          </a:lnRef>
+          <a:fillRef idx="3">
+            <a:schemeClr val="accent1"/>
+          </a:fillRef>
+          <a:effectRef idx="2">
+            <a:schemeClr val="accent1"/>
+          </a:effectRef>
+          <a:fontRef idx="minor">
+            <a:schemeClr val="lt1"/>
+          </a:fontRef>
+        </p:style>
+        <p:txBody>
+          <a:bodyPr rtlCol="0" anchor="ctr" wrap="square" lIns="54864" rIns="54864" tIns="27432" bIns="27432"/>
+          <a:lstStyle/>
+          <a:p>
+            <a:pPr algn="ctr"/>
+            <a:r>
+              <a:rPr sz="1100" b="1" i="0">
+                <a:solidFill>
+                  <a:srgbClr val="000000"/>
+                </a:solidFill>
+                <a:latin typeface="Arial"/>
+              </a:rPr>
+              <a:t>Step 4</a:t>
+            </a:r>
+          </a:p>
+          <a:p>
+            <a:pPr algn="ctr"/>
+            <a:r>
+              <a:rPr sz="850" b="0" i="0">
+                <a:solidFill>
+                  <a:srgbClr val="6B7280"/>
+                </a:solidFill>
+                <a:latin typeface="Arial"/>
+              </a:rPr>
+              <a:t>who · how long</a:t>
+            </a:r>
+          </a:p>
+        </p:txBody>
+      </p:sp>
+      <p:cxnSp>
+        <p:nvCxnSpPr>
+          <p:cNvPr id="15" name="Connector 14"/>
+          <p:cNvCxnSpPr/>
+          <p:nvPr/>
+        </p:nvCxnSpPr>
+        <p:spPr>
+          <a:xfrm>
+            <a:off x="9345167" y="2331720"/>
+            <a:ext cx="237745" cy="0"/>
+          </a:xfrm>
+          <a:prstGeom prst="line">
+            <a:avLst/>
+          </a:prstGeom>
+          <a:ln w="15875">
+            <a:solidFill>
+              <a:srgbClr val="B4761C"/>
+            </a:solidFill>
+            <a:tailEnd type="triangle"/>
+          </a:ln>
+        </p:spPr>
+        <p:style>
+          <a:lnRef idx="2">
+            <a:schemeClr val="accent1"/>
+          </a:lnRef>
+          <a:fillRef idx="0">
+            <a:schemeClr val="accent1"/>
+          </a:fillRef>
+          <a:effectRef idx="1">
+            <a:schemeClr val="accent1"/>
+          </a:effectRef>
+          <a:fontRef idx="minor">
+            <a:schemeClr val="tx1"/>
+          </a:fontRef>
+        </p:style>
+      </p:cxnSp>
+      <p:sp>
+        <p:nvSpPr>
+          <p:cNvPr id="16" name="Rounded Rectangle 15"/>
+          <p:cNvSpPr/>
+          <p:nvPr/>
+        </p:nvSpPr>
+        <p:spPr>
+          <a:xfrm>
+            <a:off x="9601200" y="2057400"/>
+            <a:ext cx="1920240" cy="548640"/>
+          </a:xfrm>
+          <a:prstGeom prst="roundRect">
+            <a:avLst>
+              <a:gd name="adj" fmla="val 12000"/>
+            </a:avLst>
+          </a:prstGeom>
+          <a:solidFill>
+            <a:srgbClr val="FBF1E0"/>
+          </a:solidFill>
+          <a:ln w="15875">
+            <a:solidFill>
+              <a:srgbClr val="B4761C"/>
+            </a:solidFill>
+          </a:ln>
+          <a:effectLst/>
+        </p:spPr>
+        <p:style>
+          <a:lnRef idx="1">
+            <a:schemeClr val="accent1"/>
+          </a:lnRef>
+          <a:fillRef idx="3">
+            <a:schemeClr val="accent1"/>
+          </a:fillRef>
+          <a:effectRef idx="2">
+            <a:schemeClr val="accent1"/>
+          </a:effectRef>
+          <a:fontRef idx="minor">
+            <a:schemeClr val="lt1"/>
+          </a:fontRef>
+        </p:style>
+        <p:txBody>
+          <a:bodyPr rtlCol="0" anchor="ctr" wrap="square" lIns="54864" rIns="54864" tIns="27432" bIns="27432"/>
+          <a:lstStyle/>
+          <a:p>
+            <a:pPr algn="ctr"/>
+            <a:r>
+              <a:rPr sz="1100" b="1" i="0">
+                <a:solidFill>
+                  <a:srgbClr val="000000"/>
+                </a:solidFill>
+                <a:latin typeface="Arial"/>
+              </a:rPr>
+              <a:t>Outcome</a:t>
+            </a:r>
+          </a:p>
+          <a:p>
+            <a:pPr algn="ctr"/>
+            <a:r>
+              <a:rPr sz="850" b="0" i="0">
+                <a:solidFill>
+                  <a:srgbClr val="6B7280"/>
+                </a:solidFill>
+                <a:latin typeface="Arial"/>
+              </a:rPr>
+              <a:t>who · how long</a:t>
+            </a:r>
+          </a:p>
+        </p:txBody>
+      </p:sp>
+      <p:sp>
+        <p:nvSpPr>
+          <p:cNvPr id="17" name="TextBox 16"/>
+          <p:cNvSpPr txBox="1"/>
+          <p:nvPr/>
+        </p:nvSpPr>
+        <p:spPr>
+          <a:xfrm>
+            <a:off x="822960" y="2697480"/>
+            <a:ext cx="10607040" cy="320040"/>
+          </a:xfrm>
+          <a:prstGeom prst="rect">
+            <a:avLst/>
+          </a:prstGeom>
+          <a:noFill/>
+        </p:spPr>
+        <p:txBody>
+          <a:bodyPr wrap="square" anchor="t">
+            <a:spAutoFit/>
+          </a:bodyPr>
+          <a:lstStyle/>
+          <a:p>
+            <a:pPr algn="l">
+              <a:spcAft>
+                <a:spcPts val="400"/>
+              </a:spcAft>
+            </a:pPr>
+            <a:r>
+              <a:rPr sz="1100" b="0" i="1">
+                <a:solidFill>
+                  <a:srgbClr val="6B7280"/>
+                </a:solidFill>
+                <a:latin typeface="Arial"/>
+              </a:rPr>
+              <a:t>Under each box: who touches it, and how long the request waits before it.</a:t>
+            </a:r>
+          </a:p>
+        </p:txBody>
+      </p:sp>
+      <p:sp>
+        <p:nvSpPr>
+          <p:cNvPr id="18" name="TextBox 17"/>
+          <p:cNvSpPr txBox="1"/>
+          <p:nvPr/>
+        </p:nvSpPr>
+        <p:spPr>
+          <a:xfrm>
+            <a:off x="822960" y="3200400"/>
+            <a:ext cx="5486400" cy="365760"/>
+          </a:xfrm>
+          <a:prstGeom prst="rect">
+            <a:avLst/>
+          </a:prstGeom>
+          <a:noFill/>
+        </p:spPr>
+        <p:txBody>
+          <a:bodyPr wrap="square" anchor="t">
+            <a:spAutoFit/>
+          </a:bodyPr>
+          <a:lstStyle/>
+          <a:p>
+            <a:pPr algn="l">
+              <a:spcAft>
+                <a:spcPts val="400"/>
+              </a:spcAft>
+            </a:pPr>
+            <a:r>
+              <a:rPr sz="1500" b="1" i="0">
+                <a:solidFill>
+                  <a:srgbClr val="002060"/>
+                </a:solidFill>
+                <a:latin typeface="Arial"/>
+              </a:rPr>
+              <a:t>With agents</a:t>
+            </a:r>
+          </a:p>
+        </p:txBody>
+      </p:sp>
+      <p:sp>
+        <p:nvSpPr>
+          <p:cNvPr id="19" name="Rounded Rectangle 18"/>
+          <p:cNvSpPr/>
+          <p:nvPr/>
+        </p:nvSpPr>
+        <p:spPr>
+          <a:xfrm>
+            <a:off x="822960" y="3611880"/>
+            <a:ext cx="1920240" cy="685800"/>
+          </a:xfrm>
+          <a:prstGeom prst="roundRect">
+            <a:avLst>
+              <a:gd name="adj" fmla="val 12000"/>
+            </a:avLst>
+          </a:prstGeom>
+          <a:solidFill>
+            <a:srgbClr val="EEEAF9"/>
+          </a:solidFill>
+          <a:ln w="15875">
+            <a:solidFill>
+              <a:srgbClr val="5E48B8"/>
+            </a:solidFill>
+          </a:ln>
+          <a:effectLst/>
+        </p:spPr>
+        <p:style>
+          <a:lnRef idx="1">
+            <a:schemeClr val="accent1"/>
+          </a:lnRef>
+          <a:fillRef idx="3">
+            <a:schemeClr val="accent1"/>
+          </a:fillRef>
+          <a:effectRef idx="2">
+            <a:schemeClr val="accent1"/>
+          </a:effectRef>
+          <a:fontRef idx="minor">
+            <a:schemeClr val="lt1"/>
+          </a:fontRef>
+        </p:style>
+        <p:txBody>
+          <a:bodyPr rtlCol="0" anchor="ctr" wrap="square" lIns="54864" rIns="54864" tIns="27432" bIns="27432"/>
+          <a:lstStyle/>
+          <a:p>
+            <a:pPr algn="ctr"/>
+            <a:r>
+              <a:rPr sz="1100" b="1" i="0">
+                <a:solidFill>
+                  <a:srgbClr val="000000"/>
+                </a:solidFill>
+                <a:latin typeface="Arial"/>
+              </a:rPr>
+              <a:t>Intake</a:t>
+            </a:r>
+          </a:p>
+          <a:p>
+            <a:pPr algn="ctr"/>
+            <a:r>
+              <a:rPr sz="850" b="0" i="0">
+                <a:solidFill>
+                  <a:srgbClr val="6B7280"/>
+                </a:solidFill>
+                <a:latin typeface="Arial"/>
+              </a:rPr>
+              <a:t>what the agent reads and extracts</a:t>
+            </a:r>
+          </a:p>
+        </p:txBody>
+      </p:sp>
+      <p:cxnSp>
+        <p:nvCxnSpPr>
+          <p:cNvPr id="20" name="Connector 19"/>
+          <p:cNvCxnSpPr/>
+          <p:nvPr/>
+        </p:nvCxnSpPr>
+        <p:spPr>
+          <a:xfrm>
+            <a:off x="2761488" y="3950208"/>
+            <a:ext cx="237744" cy="0"/>
+          </a:xfrm>
+          <a:prstGeom prst="line">
+            <a:avLst/>
+          </a:prstGeom>
+          <a:ln w="15875">
+            <a:solidFill>
+              <a:srgbClr val="5E48B8"/>
+            </a:solidFill>
+            <a:tailEnd type="triangle"/>
+          </a:ln>
+        </p:spPr>
+        <p:style>
+          <a:lnRef idx="2">
+            <a:schemeClr val="accent1"/>
+          </a:lnRef>
+          <a:fillRef idx="0">
+            <a:schemeClr val="accent1"/>
+          </a:fillRef>
+          <a:effectRef idx="1">
+            <a:schemeClr val="accent1"/>
+          </a:effectRef>
+          <a:fontRef idx="minor">
+            <a:schemeClr val="tx1"/>
+          </a:fontRef>
+        </p:style>
+      </p:cxnSp>
+      <p:sp>
+        <p:nvSpPr>
+          <p:cNvPr id="21" name="Rounded Rectangle 20"/>
+          <p:cNvSpPr/>
+          <p:nvPr/>
+        </p:nvSpPr>
+        <p:spPr>
+          <a:xfrm>
+            <a:off x="3017520" y="3611880"/>
+            <a:ext cx="1920240" cy="685800"/>
+          </a:xfrm>
+          <a:prstGeom prst="roundRect">
+            <a:avLst>
+              <a:gd name="adj" fmla="val 12000"/>
+            </a:avLst>
+          </a:prstGeom>
+          <a:solidFill>
+            <a:srgbClr val="EEEAF9"/>
+          </a:solidFill>
+          <a:ln w="15875">
+            <a:solidFill>
+              <a:srgbClr val="5E48B8"/>
+            </a:solidFill>
+          </a:ln>
+          <a:effectLst/>
+        </p:spPr>
+        <p:style>
+          <a:lnRef idx="1">
+            <a:schemeClr val="accent1"/>
+          </a:lnRef>
+          <a:fillRef idx="3">
+            <a:schemeClr val="accent1"/>
+          </a:fillRef>
+          <a:effectRef idx="2">
+            <a:schemeClr val="accent1"/>
+          </a:effectRef>
+          <a:fontRef idx="minor">
+            <a:schemeClr val="lt1"/>
+          </a:fontRef>
+        </p:style>
+        <p:txBody>
+          <a:bodyPr rtlCol="0" anchor="ctr" wrap="square" lIns="54864" rIns="54864" tIns="27432" bIns="27432"/>
+          <a:lstStyle/>
+          <a:p>
+            <a:pPr algn="ctr"/>
+            <a:r>
+              <a:rPr sz="1100" b="1" i="0">
+                <a:solidFill>
+                  <a:srgbClr val="000000"/>
+                </a:solidFill>
+                <a:latin typeface="Arial"/>
+              </a:rPr>
+              <a:t>Checks</a:t>
+            </a:r>
+          </a:p>
+          <a:p>
+            <a:pPr algn="ctr"/>
+            <a:r>
+              <a:rPr sz="850" b="0" i="0">
+                <a:solidFill>
+                  <a:srgbClr val="6B7280"/>
+                </a:solidFill>
+                <a:latin typeface="Arial"/>
+              </a:rPr>
+              <a:t>which systems, which facts</a:t>
+            </a:r>
+          </a:p>
+        </p:txBody>
+      </p:sp>
+      <p:cxnSp>
+        <p:nvCxnSpPr>
+          <p:cNvPr id="22" name="Connector 21"/>
+          <p:cNvCxnSpPr/>
+          <p:nvPr/>
+        </p:nvCxnSpPr>
+        <p:spPr>
+          <a:xfrm>
+            <a:off x="4956048" y="3950208"/>
+            <a:ext cx="237744" cy="0"/>
+          </a:xfrm>
+          <a:prstGeom prst="line">
+            <a:avLst/>
+          </a:prstGeom>
+          <a:ln w="15875">
+            <a:solidFill>
+              <a:srgbClr val="5E48B8"/>
+            </a:solidFill>
+            <a:tailEnd type="triangle"/>
+          </a:ln>
+        </p:spPr>
+        <p:style>
+          <a:lnRef idx="2">
+            <a:schemeClr val="accent1"/>
+          </a:lnRef>
+          <a:fillRef idx="0">
+            <a:schemeClr val="accent1"/>
+          </a:fillRef>
+          <a:effectRef idx="1">
+            <a:schemeClr val="accent1"/>
+          </a:effectRef>
+          <a:fontRef idx="minor">
+            <a:schemeClr val="tx1"/>
+          </a:fontRef>
+        </p:style>
+      </p:cxnSp>
+      <p:sp>
+        <p:nvSpPr>
+          <p:cNvPr id="23" name="Rounded Rectangle 22"/>
+          <p:cNvSpPr/>
+          <p:nvPr/>
+        </p:nvSpPr>
+        <p:spPr>
+          <a:xfrm>
+            <a:off x="5212080" y="3611880"/>
+            <a:ext cx="1920240" cy="685800"/>
+          </a:xfrm>
+          <a:prstGeom prst="roundRect">
+            <a:avLst>
+              <a:gd name="adj" fmla="val 12000"/>
+            </a:avLst>
+          </a:prstGeom>
+          <a:solidFill>
+            <a:srgbClr val="EEEAF9"/>
+          </a:solidFill>
+          <a:ln w="15875">
+            <a:solidFill>
+              <a:srgbClr val="5E48B8"/>
+            </a:solidFill>
+          </a:ln>
+          <a:effectLst/>
+        </p:spPr>
+        <p:style>
+          <a:lnRef idx="1">
+            <a:schemeClr val="accent1"/>
+          </a:lnRef>
+          <a:fillRef idx="3">
+            <a:schemeClr val="accent1"/>
+          </a:fillRef>
+          <a:effectRef idx="2">
+            <a:schemeClr val="accent1"/>
+          </a:effectRef>
+          <a:fontRef idx="minor">
+            <a:schemeClr val="lt1"/>
+          </a:fontRef>
+        </p:style>
+        <p:txBody>
+          <a:bodyPr rtlCol="0" anchor="ctr" wrap="square" lIns="54864" rIns="54864" tIns="27432" bIns="27432"/>
+          <a:lstStyle/>
+          <a:p>
+            <a:pPr algn="ctr"/>
+            <a:r>
+              <a:rPr sz="1100" b="1" i="0">
+                <a:solidFill>
+                  <a:srgbClr val="000000"/>
+                </a:solidFill>
+                <a:latin typeface="Arial"/>
+              </a:rPr>
+              <a:t>Decision</a:t>
+            </a:r>
+          </a:p>
+          <a:p>
+            <a:pPr algn="ctr"/>
+            <a:r>
+              <a:rPr sz="850" b="0" i="0">
+                <a:solidFill>
+                  <a:srgbClr val="6B7280"/>
+                </a:solidFill>
+                <a:latin typeface="Arial"/>
+              </a:rPr>
+              <a:t>rules first · judgement where?</a:t>
+            </a:r>
+          </a:p>
+        </p:txBody>
+      </p:sp>
+      <p:cxnSp>
+        <p:nvCxnSpPr>
+          <p:cNvPr id="24" name="Connector 23"/>
+          <p:cNvCxnSpPr/>
+          <p:nvPr/>
+        </p:nvCxnSpPr>
+        <p:spPr>
+          <a:xfrm>
+            <a:off x="7150608" y="3950208"/>
+            <a:ext cx="237744" cy="0"/>
+          </a:xfrm>
+          <a:prstGeom prst="line">
+            <a:avLst/>
+          </a:prstGeom>
+          <a:ln w="15875">
+            <a:solidFill>
+              <a:srgbClr val="5E48B8"/>
+            </a:solidFill>
+            <a:tailEnd type="triangle"/>
+          </a:ln>
+        </p:spPr>
+        <p:style>
+          <a:lnRef idx="2">
+            <a:schemeClr val="accent1"/>
+          </a:lnRef>
+          <a:fillRef idx="0">
+            <a:schemeClr val="accent1"/>
+          </a:fillRef>
+          <a:effectRef idx="1">
+            <a:schemeClr val="accent1"/>
+          </a:effectRef>
+          <a:fontRef idx="minor">
+            <a:schemeClr val="tx1"/>
+          </a:fontRef>
+        </p:style>
+      </p:cxnSp>
+      <p:sp>
+        <p:nvSpPr>
+          <p:cNvPr id="25" name="Rounded Rectangle 24"/>
+          <p:cNvSpPr/>
+          <p:nvPr/>
+        </p:nvSpPr>
+        <p:spPr>
+          <a:xfrm>
+            <a:off x="7406640" y="3611880"/>
+            <a:ext cx="1920240" cy="685800"/>
+          </a:xfrm>
+          <a:prstGeom prst="roundRect">
+            <a:avLst>
+              <a:gd name="adj" fmla="val 12000"/>
+            </a:avLst>
+          </a:prstGeom>
+          <a:solidFill>
+            <a:srgbClr val="FBF1E0"/>
+          </a:solidFill>
+          <a:ln w="15875">
+            <a:solidFill>
+              <a:srgbClr val="B4761C"/>
+            </a:solidFill>
+          </a:ln>
+          <a:effectLst/>
+        </p:spPr>
+        <p:style>
+          <a:lnRef idx="1">
+            <a:schemeClr val="accent1"/>
+          </a:lnRef>
+          <a:fillRef idx="3">
+            <a:schemeClr val="accent1"/>
+          </a:fillRef>
+          <a:effectRef idx="2">
+            <a:schemeClr val="accent1"/>
+          </a:effectRef>
+          <a:fontRef idx="minor">
+            <a:schemeClr val="lt1"/>
+          </a:fontRef>
+        </p:style>
+        <p:txBody>
+          <a:bodyPr rtlCol="0" anchor="ctr" wrap="square" lIns="54864" rIns="54864" tIns="27432" bIns="27432"/>
+          <a:lstStyle/>
+          <a:p>
+            <a:pPr algn="ctr"/>
+            <a:r>
+              <a:rPr sz="1100" b="1" i="0">
+                <a:solidFill>
+                  <a:srgbClr val="000000"/>
+                </a:solidFill>
+                <a:latin typeface="Arial"/>
+              </a:rPr>
+              <a:t>Human line</a:t>
+            </a:r>
+          </a:p>
+          <a:p>
+            <a:pPr algn="ctr"/>
+            <a:r>
+              <a:rPr sz="850" b="0" i="0">
+                <a:solidFill>
+                  <a:srgbClr val="6B7280"/>
+                </a:solidFill>
+                <a:latin typeface="Arial"/>
+              </a:rPr>
+              <a:t>which cases, which limit</a:t>
+            </a:r>
+          </a:p>
+        </p:txBody>
+      </p:sp>
+      <p:cxnSp>
+        <p:nvCxnSpPr>
+          <p:cNvPr id="26" name="Connector 25"/>
+          <p:cNvCxnSpPr/>
+          <p:nvPr/>
+        </p:nvCxnSpPr>
+        <p:spPr>
+          <a:xfrm>
+            <a:off x="9345167" y="3950208"/>
+            <a:ext cx="237745" cy="0"/>
+          </a:xfrm>
+          <a:prstGeom prst="line">
+            <a:avLst/>
+          </a:prstGeom>
+          <a:ln w="15875">
+            <a:solidFill>
+              <a:srgbClr val="5E48B8"/>
+            </a:solidFill>
+            <a:tailEnd type="triangle"/>
+          </a:ln>
+        </p:spPr>
+        <p:style>
+          <a:lnRef idx="2">
+            <a:schemeClr val="accent1"/>
+          </a:lnRef>
+          <a:fillRef idx="0">
+            <a:schemeClr val="accent1"/>
+          </a:fillRef>
+          <a:effectRef idx="1">
+            <a:schemeClr val="accent1"/>
+          </a:effectRef>
+          <a:fontRef idx="minor">
+            <a:schemeClr val="tx1"/>
+          </a:fontRef>
+        </p:style>
+      </p:cxnSp>
+      <p:sp>
+        <p:nvSpPr>
+          <p:cNvPr id="27" name="Rounded Rectangle 26"/>
+          <p:cNvSpPr/>
+          <p:nvPr/>
+        </p:nvSpPr>
+        <p:spPr>
+          <a:xfrm>
+            <a:off x="9601200" y="3611880"/>
+            <a:ext cx="1920240" cy="685800"/>
+          </a:xfrm>
+          <a:prstGeom prst="roundRect">
+            <a:avLst>
+              <a:gd name="adj" fmla="val 12000"/>
+            </a:avLst>
+          </a:prstGeom>
+          <a:solidFill>
+            <a:srgbClr val="E4F3EB"/>
+          </a:solidFill>
+          <a:ln w="15875">
+            <a:solidFill>
+              <a:srgbClr val="2C8A5A"/>
+            </a:solidFill>
+          </a:ln>
+          <a:effectLst/>
+        </p:spPr>
+        <p:style>
+          <a:lnRef idx="1">
+            <a:schemeClr val="accent1"/>
+          </a:lnRef>
+          <a:fillRef idx="3">
+            <a:schemeClr val="accent1"/>
+          </a:fillRef>
+          <a:effectRef idx="2">
+            <a:schemeClr val="accent1"/>
+          </a:effectRef>
+          <a:fontRef idx="minor">
+            <a:schemeClr val="lt1"/>
+          </a:fontRef>
+        </p:style>
+        <p:txBody>
+          <a:bodyPr rtlCol="0" anchor="ctr" wrap="square" lIns="54864" rIns="54864" tIns="27432" bIns="27432"/>
+          <a:lstStyle/>
+          <a:p>
+            <a:pPr algn="ctr"/>
+            <a:r>
+              <a:rPr sz="1100" b="1" i="0">
+                <a:solidFill>
+                  <a:srgbClr val="000000"/>
+                </a:solidFill>
+                <a:latin typeface="Arial"/>
+              </a:rPr>
+              <a:t>Response</a:t>
+            </a:r>
+          </a:p>
+          <a:p>
+            <a:pPr algn="ctr"/>
+            <a:r>
+              <a:rPr sz="850" b="0" i="0">
+                <a:solidFill>
+                  <a:srgbClr val="6B7280"/>
+                </a:solidFill>
+                <a:latin typeface="Arial"/>
+              </a:rPr>
+              <a:t>what it does and tells</a:t>
+            </a:r>
+          </a:p>
+        </p:txBody>
+      </p:sp>
+      <p:sp>
+        <p:nvSpPr>
+          <p:cNvPr id="28" name="Rounded Rectangle 27"/>
+          <p:cNvSpPr/>
+          <p:nvPr/>
+        </p:nvSpPr>
+        <p:spPr>
+          <a:xfrm>
+            <a:off x="822960" y="4526280"/>
+            <a:ext cx="5212080" cy="502920"/>
+          </a:xfrm>
+          <a:prstGeom prst="roundRect">
+            <a:avLst>
+              <a:gd name="adj" fmla="val 12000"/>
+            </a:avLst>
+          </a:prstGeom>
+          <a:solidFill>
+            <a:srgbClr val="F3F4F7"/>
+          </a:solidFill>
+          <a:ln w="15875">
+            <a:solidFill>
+              <a:srgbClr val="6B7280"/>
+            </a:solidFill>
+            <a:prstDash val="dash"/>
+          </a:ln>
+          <a:effectLst/>
+        </p:spPr>
+        <p:style>
+          <a:lnRef idx="1">
+            <a:schemeClr val="accent1"/>
+          </a:lnRef>
+          <a:fillRef idx="3">
+            <a:schemeClr val="accent1"/>
+          </a:fillRef>
+          <a:effectRef idx="2">
+            <a:schemeClr val="accent1"/>
+          </a:effectRef>
+          <a:fontRef idx="minor">
+            <a:schemeClr val="lt1"/>
+          </a:fontRef>
+        </p:style>
+        <p:txBody>
+          <a:bodyPr rtlCol="0" anchor="ctr" wrap="square" lIns="54864" rIns="54864" tIns="27432" bIns="27432"/>
+          <a:lstStyle/>
+          <a:p>
+            <a:pPr algn="ctr"/>
+            <a:r>
+              <a:rPr sz="1100" b="1" i="0">
+                <a:solidFill>
+                  <a:srgbClr val="000000"/>
+                </a:solidFill>
+                <a:latin typeface="Arial"/>
+              </a:rPr>
+              <a:t>Record and trace</a:t>
+            </a:r>
+          </a:p>
+          <a:p>
+            <a:pPr algn="ctr"/>
+            <a:r>
+              <a:rPr sz="850" b="0" i="0">
+                <a:solidFill>
+                  <a:srgbClr val="6B7280"/>
+                </a:solidFill>
+                <a:latin typeface="Arial"/>
+              </a:rPr>
+              <a:t>what every agent writes down · what a person can audit</a:t>
+            </a:r>
+          </a:p>
+        </p:txBody>
+      </p:sp>
+      <p:sp>
+        <p:nvSpPr>
+          <p:cNvPr id="29" name="Rounded Rectangle 28"/>
+          <p:cNvSpPr/>
+          <p:nvPr/>
+        </p:nvSpPr>
+        <p:spPr>
+          <a:xfrm>
+            <a:off x="6217920" y="4526280"/>
+            <a:ext cx="5212080" cy="502920"/>
+          </a:xfrm>
+          <a:prstGeom prst="roundRect">
+            <a:avLst>
+              <a:gd name="adj" fmla="val 12000"/>
+            </a:avLst>
+          </a:prstGeom>
+          <a:solidFill>
+            <a:srgbClr val="FBE8E7"/>
+          </a:solidFill>
+          <a:ln w="15875">
+            <a:solidFill>
+              <a:srgbClr val="BF3F3A"/>
+            </a:solidFill>
+            <a:prstDash val="dash"/>
+          </a:ln>
+          <a:effectLst/>
+        </p:spPr>
+        <p:style>
+          <a:lnRef idx="1">
+            <a:schemeClr val="accent1"/>
+          </a:lnRef>
+          <a:fillRef idx="3">
+            <a:schemeClr val="accent1"/>
+          </a:fillRef>
+          <a:effectRef idx="2">
+            <a:schemeClr val="accent1"/>
+          </a:effectRef>
+          <a:fontRef idx="minor">
+            <a:schemeClr val="lt1"/>
+          </a:fontRef>
+        </p:style>
+        <p:txBody>
+          <a:bodyPr rtlCol="0" anchor="ctr" wrap="square" lIns="54864" rIns="54864" tIns="27432" bIns="27432"/>
+          <a:lstStyle/>
+          <a:p>
+            <a:pPr algn="ctr"/>
+            <a:r>
+              <a:rPr sz="1100" b="1" i="0">
+                <a:solidFill>
+                  <a:srgbClr val="000000"/>
+                </a:solidFill>
+                <a:latin typeface="Arial"/>
+              </a:rPr>
+              <a:t>Guardrails</a:t>
+            </a:r>
+          </a:p>
+          <a:p>
+            <a:pPr algn="ctr"/>
+            <a:r>
+              <a:rPr sz="850" b="0" i="0">
+                <a:solidFill>
+                  <a:srgbClr val="6B7280"/>
+                </a:solidFill>
+                <a:latin typeface="Arial"/>
+              </a:rPr>
+              <a:t>the limits written in code, not in the brief</a:t>
+            </a:r>
+          </a:p>
+        </p:txBody>
+      </p:sp>
+      <p:sp>
+        <p:nvSpPr>
+          <p:cNvPr id="30" name="Rectangle 29"/>
+          <p:cNvSpPr/>
+          <p:nvPr/>
+        </p:nvSpPr>
+        <p:spPr>
+          <a:xfrm>
+            <a:off x="822960" y="5257800"/>
+            <a:ext cx="10607040" cy="1143000"/>
+          </a:xfrm>
+          <a:prstGeom prst="rect">
+            <a:avLst/>
+          </a:prstGeom>
+          <a:solidFill>
+            <a:srgbClr val="EEF1F5"/>
+          </a:solidFill>
+          <a:ln>
+            <a:noFill/>
+          </a:ln>
+          <a:effectLst/>
+        </p:spPr>
+        <p:style>
+          <a:lnRef idx="1">
+            <a:schemeClr val="accent1"/>
+          </a:lnRef>
+          <a:fillRef idx="3">
+            <a:schemeClr val="accent1"/>
+          </a:fillRef>
+          <a:effectRef idx="2">
+            <a:schemeClr val="accent1"/>
+          </a:effectRef>
+          <a:fontRef idx="minor">
+            <a:schemeClr val="lt1"/>
+          </a:fontRef>
+        </p:style>
+        <p:txBody>
+          <a:bodyPr rtlCol="0" anchor="ctr"/>
+          <a:lstStyle/>
+          <a:p>
+            <a:pPr algn="ctr"/>
+          </a:p>
+        </p:txBody>
+      </p:sp>
+      <p:sp>
+        <p:nvSpPr>
+          <p:cNvPr id="31" name="TextBox 30"/>
+          <p:cNvSpPr txBox="1"/>
+          <p:nvPr/>
+        </p:nvSpPr>
+        <p:spPr>
+          <a:xfrm>
+            <a:off x="1005840" y="5394960"/>
+            <a:ext cx="10241280" cy="365760"/>
+          </a:xfrm>
+          <a:prstGeom prst="rect">
+            <a:avLst/>
+          </a:prstGeom>
+          <a:noFill/>
+        </p:spPr>
+        <p:txBody>
+          <a:bodyPr wrap="square" anchor="t">
+            <a:spAutoFit/>
+          </a:bodyPr>
+          <a:lstStyle/>
+          <a:p>
+            <a:pPr algn="l">
+              <a:spcAft>
+                <a:spcPts val="400"/>
+              </a:spcAft>
+            </a:pPr>
+            <a:r>
+              <a:rPr sz="1500" b="1" i="0">
+                <a:solidFill>
+                  <a:srgbClr val="002060"/>
+                </a:solidFill>
+                <a:latin typeface="Arial"/>
+              </a:rPr>
+              <a:t>Then answer, in one sentence each</a:t>
+            </a:r>
+          </a:p>
+        </p:txBody>
+      </p:sp>
+      <p:sp>
+        <p:nvSpPr>
+          <p:cNvPr id="32" name="TextBox 31"/>
+          <p:cNvSpPr txBox="1"/>
+          <p:nvPr/>
+        </p:nvSpPr>
+        <p:spPr>
+          <a:xfrm>
+            <a:off x="1005840" y="5806440"/>
+            <a:ext cx="10241280" cy="457200"/>
+          </a:xfrm>
+          <a:prstGeom prst="rect">
+            <a:avLst/>
+          </a:prstGeom>
+          <a:noFill/>
+        </p:spPr>
+        <p:txBody>
+          <a:bodyPr wrap="square" anchor="t">
+            <a:spAutoFit/>
+          </a:bodyPr>
+          <a:lstStyle/>
+          <a:p>
+            <a:pPr algn="l">
+              <a:spcAft>
+                <a:spcPts val="500"/>
+              </a:spcAft>
+            </a:pPr>
+            <a:r>
+              <a:rPr sz="1250" b="0" i="0">
+                <a:solidFill>
+                  <a:srgbClr val="000000"/>
+                </a:solidFill>
+                <a:latin typeface="Arial"/>
+              </a:rPr>
+              <a:t>Where was the waiting, and which hand-off did the design remove?  ·  Which step is a rule and which needs judgement?  ·  Where does the person sit, and why there?</a:t>
+            </a:r>
+          </a:p>
+        </p:txBody>
+      </p:sp>
+    </p:spTree>
+  </p:cSld>
+  <p:clrMapOvr>
+    <a:masterClrMapping/>
+  </p:clrMapOvr>
+</p:sld>
+</file>
+
+<file path=ppt/slides/slide24.xml><?xml version="1.0" encoding="utf-8"?>
+<p:sld xmlns:a="http://schemas.openxmlformats.org/drawingml/2006/main" xmlns:p="http://schemas.openxmlformats.org/presentationml/2006/main" xmlns:r="http://schemas.openxmlformats.org/officeDocument/2006/relationships">
+  <p:cSld>
+    <p:spTree>
+      <p:nvGrpSpPr>
+        <p:cNvPr id="1" name=""/>
+        <p:cNvGrpSpPr/>
+        <p:nvPr/>
+      </p:nvGrpSpPr>
+      <p:grpSpPr/>
+      <p:sp>
+        <p:nvSpPr>
+          <p:cNvPr id="2" name="TextBox 1"/>
+          <p:cNvSpPr txBox="1"/>
+          <p:nvPr/>
+        </p:nvSpPr>
+        <p:spPr>
+          <a:xfrm>
+            <a:off x="9893808" y="6492240"/>
+            <a:ext cx="2084831" cy="274320"/>
+          </a:xfrm>
+          <a:prstGeom prst="rect">
+            <a:avLst/>
+          </a:prstGeom>
+          <a:noFill/>
+        </p:spPr>
+        <p:txBody>
+          <a:bodyPr wrap="square" anchor="t">
+            <a:spAutoFit/>
+          </a:bodyPr>
+          <a:lstStyle/>
+          <a:p>
+            <a:pPr algn="r">
+              <a:spcAft>
+                <a:spcPts val="400"/>
+              </a:spcAft>
+            </a:pPr>
+            <a:r>
+              <a:rPr sz="1000" b="0" i="0">
+                <a:solidFill>
+                  <a:srgbClr val="6B7280"/>
+                </a:solidFill>
+                <a:latin typeface="Arial"/>
+              </a:rPr>
+              <a:t>24</a:t>
+            </a:r>
+          </a:p>
+        </p:txBody>
+      </p:sp>
+      <p:sp>
+        <p:nvSpPr>
+          <p:cNvPr id="3" name="TextBox 2"/>
+          <p:cNvSpPr txBox="1"/>
+          <p:nvPr/>
+        </p:nvSpPr>
+        <p:spPr>
+          <a:xfrm>
+            <a:off x="838047" y="192024"/>
+            <a:ext cx="10515600" cy="813816"/>
+          </a:xfrm>
+          <a:prstGeom prst="rect">
+            <a:avLst/>
+          </a:prstGeom>
+          <a:noFill/>
+        </p:spPr>
+        <p:txBody>
+          <a:bodyPr wrap="square" anchor="ctr">
+            <a:spAutoFit/>
+          </a:bodyPr>
+          <a:lstStyle/>
+          <a:p>
+            <a:pPr algn="ctr">
+              <a:spcAft>
+                <a:spcPts val="400"/>
+              </a:spcAft>
+            </a:pPr>
+            <a:r>
+              <a:rPr sz="2800" b="1" i="0">
+                <a:solidFill>
+                  <a:srgbClr val="002060"/>
+                </a:solidFill>
+                <a:latin typeface="Arial"/>
+              </a:rPr>
+              <a:t>STEP 4 · ONE MINUTE IN PLENARY</a:t>
+            </a:r>
+          </a:p>
+        </p:txBody>
+      </p:sp>
+      <p:cxnSp>
+        <p:nvCxnSpPr>
+          <p:cNvPr id="4" name="Connector 3"/>
+          <p:cNvCxnSpPr/>
+          <p:nvPr/>
+        </p:nvCxnSpPr>
+        <p:spPr>
+          <a:xfrm>
+            <a:off x="0" y="1097280"/>
+            <a:ext cx="12191695" cy="0"/>
+          </a:xfrm>
+          <a:prstGeom prst="line">
+            <a:avLst/>
+          </a:prstGeom>
+          <a:ln w="9525">
+            <a:solidFill>
+              <a:srgbClr val="D5DBE2"/>
+            </a:solidFill>
+          </a:ln>
+        </p:spPr>
+        <p:style>
+          <a:lnRef idx="2">
+            <a:schemeClr val="accent1"/>
+          </a:lnRef>
+          <a:fillRef idx="0">
+            <a:schemeClr val="accent1"/>
+          </a:fillRef>
+          <a:effectRef idx="1">
+            <a:schemeClr val="accent1"/>
+          </a:effectRef>
+          <a:fontRef idx="minor">
+            <a:schemeClr val="tx1"/>
+          </a:fontRef>
+        </p:style>
+      </p:cxnSp>
+      <p:cxnSp>
+        <p:nvCxnSpPr>
+          <p:cNvPr id="5" name="Connector 4"/>
+          <p:cNvCxnSpPr/>
+          <p:nvPr/>
+        </p:nvCxnSpPr>
+        <p:spPr>
+          <a:xfrm>
+            <a:off x="5952744" y="1133856"/>
+            <a:ext cx="292608" cy="0"/>
+          </a:xfrm>
+          <a:prstGeom prst="line">
+            <a:avLst/>
+          </a:prstGeom>
+          <a:ln w="76200">
+            <a:solidFill>
+              <a:srgbClr val="00305C"/>
+            </a:solidFill>
+          </a:ln>
+        </p:spPr>
+        <p:style>
+          <a:lnRef idx="2">
+            <a:schemeClr val="accent1"/>
+          </a:lnRef>
+          <a:fillRef idx="0">
+            <a:schemeClr val="accent1"/>
+          </a:fillRef>
+          <a:effectRef idx="1">
+            <a:schemeClr val="accent1"/>
+          </a:effectRef>
+          <a:fontRef idx="minor">
+            <a:schemeClr val="tx1"/>
+          </a:fontRef>
+        </p:style>
+      </p:cxnSp>
+      <p:sp>
+        <p:nvSpPr>
+          <p:cNvPr id="6" name="TextBox 5"/>
+          <p:cNvSpPr txBox="1"/>
+          <p:nvPr/>
+        </p:nvSpPr>
+        <p:spPr>
+          <a:xfrm>
+            <a:off x="822960" y="1417320"/>
+            <a:ext cx="10515600" cy="457200"/>
+          </a:xfrm>
+          <a:prstGeom prst="rect">
+            <a:avLst/>
+          </a:prstGeom>
+          <a:noFill/>
+        </p:spPr>
+        <p:txBody>
+          <a:bodyPr wrap="square" anchor="t">
+            <a:spAutoFit/>
+          </a:bodyPr>
+          <a:lstStyle/>
+          <a:p>
+            <a:pPr algn="l">
+              <a:spcAft>
+                <a:spcPts val="400"/>
+              </a:spcAft>
+            </a:pPr>
+            <a:r>
+              <a:rPr sz="1600" b="1" i="0">
+                <a:solidFill>
+                  <a:srgbClr val="002060"/>
+                </a:solidFill>
+                <a:latin typeface="Arial"/>
+              </a:rPr>
+              <a:t>Three questions, one sentence each. The reporter speaks, nobody else.</a:t>
+            </a:r>
+          </a:p>
+        </p:txBody>
+      </p:sp>
+      <p:sp>
+        <p:nvSpPr>
+          <p:cNvPr id="7" name="Oval 6"/>
+          <p:cNvSpPr/>
+          <p:nvPr/>
+        </p:nvSpPr>
+        <p:spPr>
+          <a:xfrm>
+            <a:off x="822960" y="2103120"/>
+            <a:ext cx="548640" cy="548640"/>
+          </a:xfrm>
+          <a:prstGeom prst="ellipse">
+            <a:avLst/>
+          </a:prstGeom>
+          <a:solidFill>
+            <a:srgbClr val="00305C"/>
+          </a:solidFill>
+          <a:ln>
+            <a:noFill/>
+          </a:ln>
+          <a:effectLst/>
+        </p:spPr>
+        <p:style>
+          <a:lnRef idx="1">
+            <a:schemeClr val="accent1"/>
+          </a:lnRef>
+          <a:fillRef idx="3">
+            <a:schemeClr val="accent1"/>
+          </a:fillRef>
+          <a:effectRef idx="2">
+            <a:schemeClr val="accent1"/>
+          </a:effectRef>
+          <a:fontRef idx="minor">
+            <a:schemeClr val="lt1"/>
+          </a:fontRef>
+        </p:style>
+        <p:txBody>
+          <a:bodyPr rtlCol="0" anchor="ctr" lIns="0" rIns="0"/>
+          <a:lstStyle/>
+          <a:p>
+            <a:pPr algn="ctr"/>
+            <a:r>
+              <a:rPr sz="1600" b="1" i="0">
+                <a:solidFill>
+                  <a:srgbClr val="FFFFFF"/>
+                </a:solidFill>
+                <a:latin typeface="Arial"/>
+              </a:rPr>
+              <a:t>1</a:t>
+            </a:r>
+          </a:p>
+        </p:txBody>
+      </p:sp>
+      <p:sp>
+        <p:nvSpPr>
+          <p:cNvPr id="8" name="TextBox 7"/>
+          <p:cNvSpPr txBox="1"/>
+          <p:nvPr/>
+        </p:nvSpPr>
+        <p:spPr>
+          <a:xfrm>
+            <a:off x="1600200" y="2057400"/>
+            <a:ext cx="9784080" cy="548640"/>
+          </a:xfrm>
+          <a:prstGeom prst="rect">
+            <a:avLst/>
+          </a:prstGeom>
+          <a:noFill/>
+        </p:spPr>
+        <p:txBody>
+          <a:bodyPr wrap="square" anchor="t">
+            <a:spAutoFit/>
+          </a:bodyPr>
+          <a:lstStyle/>
+          <a:p>
+            <a:pPr algn="l">
+              <a:spcAft>
+                <a:spcPts val="400"/>
+              </a:spcAft>
+            </a:pPr>
+            <a:r>
+              <a:rPr sz="1600" b="1" i="0">
+                <a:solidFill>
+                  <a:srgbClr val="000000"/>
+                </a:solidFill>
+                <a:latin typeface="Arial"/>
+              </a:rPr>
+              <a:t>Which process did you pick?</a:t>
+            </a:r>
+          </a:p>
+        </p:txBody>
+      </p:sp>
+      <p:sp>
+        <p:nvSpPr>
+          <p:cNvPr id="9" name="TextBox 8"/>
+          <p:cNvSpPr txBox="1"/>
+          <p:nvPr/>
+        </p:nvSpPr>
+        <p:spPr>
+          <a:xfrm>
+            <a:off x="1600200" y="2560320"/>
+            <a:ext cx="9784080" cy="548640"/>
+          </a:xfrm>
+          <a:prstGeom prst="rect">
+            <a:avLst/>
+          </a:prstGeom>
+          <a:noFill/>
+        </p:spPr>
+        <p:txBody>
+          <a:bodyPr wrap="square" anchor="t">
+            <a:spAutoFit/>
+          </a:bodyPr>
+          <a:lstStyle/>
+          <a:p>
+            <a:pPr algn="l">
+              <a:spcAft>
+                <a:spcPts val="400"/>
+              </a:spcAft>
+            </a:pPr>
+            <a:r>
+              <a:rPr sz="1250" b="0" i="1">
+                <a:solidFill>
+                  <a:srgbClr val="6B7280"/>
+                </a:solidFill>
+                <a:latin typeface="Arial"/>
+              </a:rPr>
+              <a:t>Name it, who sends the request, what the outcome is.</a:t>
+            </a:r>
+          </a:p>
+        </p:txBody>
+      </p:sp>
+      <p:sp>
+        <p:nvSpPr>
+          <p:cNvPr id="10" name="Oval 9"/>
+          <p:cNvSpPr/>
+          <p:nvPr/>
+        </p:nvSpPr>
+        <p:spPr>
+          <a:xfrm>
+            <a:off x="822960" y="3429000"/>
+            <a:ext cx="548640" cy="548640"/>
+          </a:xfrm>
+          <a:prstGeom prst="ellipse">
+            <a:avLst/>
+          </a:prstGeom>
+          <a:solidFill>
+            <a:srgbClr val="00305C"/>
+          </a:solidFill>
+          <a:ln>
+            <a:noFill/>
+          </a:ln>
+          <a:effectLst/>
+        </p:spPr>
+        <p:style>
+          <a:lnRef idx="1">
+            <a:schemeClr val="accent1"/>
+          </a:lnRef>
+          <a:fillRef idx="3">
+            <a:schemeClr val="accent1"/>
+          </a:fillRef>
+          <a:effectRef idx="2">
+            <a:schemeClr val="accent1"/>
+          </a:effectRef>
+          <a:fontRef idx="minor">
+            <a:schemeClr val="lt1"/>
+          </a:fontRef>
+        </p:style>
+        <p:txBody>
+          <a:bodyPr rtlCol="0" anchor="ctr" lIns="0" rIns="0"/>
+          <a:lstStyle/>
+          <a:p>
+            <a:pPr algn="ctr"/>
+            <a:r>
+              <a:rPr sz="1600" b="1" i="0">
+                <a:solidFill>
+                  <a:srgbClr val="FFFFFF"/>
+                </a:solidFill>
+                <a:latin typeface="Arial"/>
+              </a:rPr>
+              <a:t>2</a:t>
+            </a:r>
+          </a:p>
+        </p:txBody>
+      </p:sp>
+      <p:sp>
+        <p:nvSpPr>
+          <p:cNvPr id="11" name="TextBox 10"/>
+          <p:cNvSpPr txBox="1"/>
+          <p:nvPr/>
+        </p:nvSpPr>
+        <p:spPr>
+          <a:xfrm>
+            <a:off x="1600200" y="3383280"/>
+            <a:ext cx="9784080" cy="548640"/>
+          </a:xfrm>
+          <a:prstGeom prst="rect">
+            <a:avLst/>
+          </a:prstGeom>
+          <a:noFill/>
+        </p:spPr>
+        <p:txBody>
+          <a:bodyPr wrap="square" anchor="t">
+            <a:spAutoFit/>
+          </a:bodyPr>
+          <a:lstStyle/>
+          <a:p>
+            <a:pPr algn="l">
+              <a:spcAft>
+                <a:spcPts val="400"/>
+              </a:spcAft>
+            </a:pPr>
+            <a:r>
+              <a:rPr sz="1600" b="1" i="0">
+                <a:solidFill>
+                  <a:srgbClr val="000000"/>
+                </a:solidFill>
+                <a:latin typeface="Arial"/>
+              </a:rPr>
+              <a:t>Why and how can agents help?</a:t>
+            </a:r>
+          </a:p>
+        </p:txBody>
+      </p:sp>
+      <p:sp>
+        <p:nvSpPr>
+          <p:cNvPr id="12" name="TextBox 11"/>
+          <p:cNvSpPr txBox="1"/>
+          <p:nvPr/>
+        </p:nvSpPr>
+        <p:spPr>
+          <a:xfrm>
+            <a:off x="1600200" y="3886200"/>
+            <a:ext cx="9784080" cy="548640"/>
+          </a:xfrm>
+          <a:prstGeom prst="rect">
+            <a:avLst/>
+          </a:prstGeom>
+          <a:noFill/>
+        </p:spPr>
+        <p:txBody>
+          <a:bodyPr wrap="square" anchor="t">
+            <a:spAutoFit/>
+          </a:bodyPr>
+          <a:lstStyle/>
+          <a:p>
+            <a:pPr algn="l">
+              <a:spcAft>
+                <a:spcPts val="400"/>
+              </a:spcAft>
+            </a:pPr>
+            <a:r>
+              <a:rPr sz="1250" b="0" i="1">
+                <a:solidFill>
+                  <a:srgbClr val="6B7280"/>
+                </a:solidFill>
+                <a:latin typeface="Arial"/>
+              </a:rPr>
+              <a:t>Where the waiting is today; what is rule and what is judgement; what an agent reads, checks and does.</a:t>
+            </a:r>
+          </a:p>
+        </p:txBody>
+      </p:sp>
+      <p:sp>
+        <p:nvSpPr>
+          <p:cNvPr id="13" name="Oval 12"/>
+          <p:cNvSpPr/>
+          <p:nvPr/>
+        </p:nvSpPr>
+        <p:spPr>
+          <a:xfrm>
+            <a:off x="822960" y="4754879"/>
+            <a:ext cx="548640" cy="548640"/>
+          </a:xfrm>
+          <a:prstGeom prst="ellipse">
+            <a:avLst/>
+          </a:prstGeom>
+          <a:solidFill>
+            <a:srgbClr val="00305C"/>
+          </a:solidFill>
+          <a:ln>
+            <a:noFill/>
+          </a:ln>
+          <a:effectLst/>
+        </p:spPr>
+        <p:style>
+          <a:lnRef idx="1">
+            <a:schemeClr val="accent1"/>
+          </a:lnRef>
+          <a:fillRef idx="3">
+            <a:schemeClr val="accent1"/>
+          </a:fillRef>
+          <a:effectRef idx="2">
+            <a:schemeClr val="accent1"/>
+          </a:effectRef>
+          <a:fontRef idx="minor">
+            <a:schemeClr val="lt1"/>
+          </a:fontRef>
+        </p:style>
+        <p:txBody>
+          <a:bodyPr rtlCol="0" anchor="ctr" lIns="0" rIns="0"/>
+          <a:lstStyle/>
+          <a:p>
+            <a:pPr algn="ctr"/>
+            <a:r>
+              <a:rPr sz="1600" b="1" i="0">
+                <a:solidFill>
+                  <a:srgbClr val="FFFFFF"/>
+                </a:solidFill>
+                <a:latin typeface="Arial"/>
+              </a:rPr>
+              <a:t>3</a:t>
+            </a:r>
+          </a:p>
+        </p:txBody>
+      </p:sp>
+      <p:sp>
+        <p:nvSpPr>
+          <p:cNvPr id="14" name="TextBox 13"/>
+          <p:cNvSpPr txBox="1"/>
+          <p:nvPr/>
+        </p:nvSpPr>
+        <p:spPr>
+          <a:xfrm>
+            <a:off x="1600200" y="4709159"/>
+            <a:ext cx="9784080" cy="548640"/>
+          </a:xfrm>
+          <a:prstGeom prst="rect">
+            <a:avLst/>
+          </a:prstGeom>
+          <a:noFill/>
+        </p:spPr>
+        <p:txBody>
+          <a:bodyPr wrap="square" anchor="t">
+            <a:spAutoFit/>
+          </a:bodyPr>
+          <a:lstStyle/>
+          <a:p>
+            <a:pPr algn="l">
+              <a:spcAft>
+                <a:spcPts val="400"/>
+              </a:spcAft>
+            </a:pPr>
+            <a:r>
+              <a:rPr sz="1600" b="1" i="0">
+                <a:solidFill>
+                  <a:srgbClr val="000000"/>
+                </a:solidFill>
+                <a:latin typeface="Arial"/>
+              </a:rPr>
+              <a:t>What does the high-level design look like?</a:t>
+            </a:r>
+          </a:p>
+        </p:txBody>
+      </p:sp>
+      <p:sp>
+        <p:nvSpPr>
+          <p:cNvPr id="15" name="TextBox 14"/>
+          <p:cNvSpPr txBox="1"/>
+          <p:nvPr/>
+        </p:nvSpPr>
+        <p:spPr>
+          <a:xfrm>
+            <a:off x="1600200" y="5212079"/>
+            <a:ext cx="9784080" cy="548640"/>
+          </a:xfrm>
+          <a:prstGeom prst="rect">
+            <a:avLst/>
+          </a:prstGeom>
+          <a:noFill/>
+        </p:spPr>
+        <p:txBody>
+          <a:bodyPr wrap="square" anchor="t">
+            <a:spAutoFit/>
+          </a:bodyPr>
+          <a:lstStyle/>
+          <a:p>
+            <a:pPr algn="l">
+              <a:spcAft>
+                <a:spcPts val="400"/>
+              </a:spcAft>
+            </a:pPr>
+            <a:r>
+              <a:rPr sz="1250" b="0" i="1">
+                <a:solidFill>
+                  <a:srgbClr val="6B7280"/>
+                </a:solidFill>
+                <a:latin typeface="Arial"/>
+              </a:rPr>
+              <a:t>Intake, checks, decision, human line, response. Say where the person sits and which limit is in code.</a:t>
+            </a:r>
+          </a:p>
+        </p:txBody>
+      </p:sp>
+      <p:sp>
+        <p:nvSpPr>
+          <p:cNvPr id="16" name="TextBox 15"/>
+          <p:cNvSpPr txBox="1"/>
+          <p:nvPr/>
+        </p:nvSpPr>
+        <p:spPr>
+          <a:xfrm>
+            <a:off x="822960" y="6126480"/>
+            <a:ext cx="10515600" cy="365760"/>
+          </a:xfrm>
+          <a:prstGeom prst="rect">
+            <a:avLst/>
+          </a:prstGeom>
+          <a:noFill/>
+        </p:spPr>
+        <p:txBody>
+          <a:bodyPr wrap="square" anchor="t">
+            <a:spAutoFit/>
+          </a:bodyPr>
+          <a:lstStyle/>
+          <a:p>
+            <a:pPr algn="l">
+              <a:spcAft>
+                <a:spcPts val="400"/>
+              </a:spcAft>
+            </a:pPr>
+            <a:r>
+              <a:rPr sz="1200" b="0" i="1">
+                <a:solidFill>
+                  <a:srgbClr val="002060"/>
+                </a:solidFill>
+                <a:latin typeface="Arial"/>
+              </a:rPr>
+              <a:t>The plenary listens for one thing: did the design keep a person where a person is needed, and nowhere else?</a:t>
+            </a:r>
+          </a:p>
+        </p:txBody>
+      </p:sp>
+    </p:spTree>
+  </p:cSld>
+  <p:clrMapOvr>
+    <a:masterClrMapping/>
+  </p:clrMapOvr>
+</p:sld>
+</file>
+
+<file path=ppt/slides/slide25.xml><?xml version="1.0" encoding="utf-8"?>
+<p:sld xmlns:a="http://schemas.openxmlformats.org/drawingml/2006/main" xmlns:p="http://schemas.openxmlformats.org/presentationml/2006/main" xmlns:r="http://schemas.openxmlformats.org/officeDocument/2006/relationships">
+  <p:cSld>
+    <p:spTree>
+      <p:nvGrpSpPr>
+        <p:cNvPr id="1" name=""/>
+        <p:cNvGrpSpPr/>
+        <p:nvPr/>
+      </p:nvGrpSpPr>
+      <p:grpSpPr/>
+      <p:sp>
+        <p:nvSpPr>
+          <p:cNvPr id="2" name="TextBox 1"/>
+          <p:cNvSpPr txBox="1"/>
+          <p:nvPr/>
+        </p:nvSpPr>
+        <p:spPr>
+          <a:xfrm>
+            <a:off x="9893808" y="6492240"/>
+            <a:ext cx="2084831" cy="274320"/>
+          </a:xfrm>
+          <a:prstGeom prst="rect">
+            <a:avLst/>
+          </a:prstGeom>
+          <a:noFill/>
+        </p:spPr>
+        <p:txBody>
+          <a:bodyPr wrap="square" anchor="t">
+            <a:spAutoFit/>
+          </a:bodyPr>
+          <a:lstStyle/>
+          <a:p>
+            <a:pPr algn="r">
+              <a:spcAft>
+                <a:spcPts val="400"/>
+              </a:spcAft>
+            </a:pPr>
+            <a:r>
+              <a:rPr sz="1000" b="0" i="0">
+                <a:solidFill>
+                  <a:srgbClr val="6B7280"/>
+                </a:solidFill>
+                <a:latin typeface="Arial"/>
+              </a:rPr>
+              <a:t>25</a:t>
+            </a:r>
+          </a:p>
+        </p:txBody>
+      </p:sp>
+      <p:sp>
+        <p:nvSpPr>
+          <p:cNvPr id="3" name="TextBox 2"/>
+          <p:cNvSpPr txBox="1"/>
+          <p:nvPr/>
+        </p:nvSpPr>
+        <p:spPr>
+          <a:xfrm>
+            <a:off x="838047" y="192024"/>
+            <a:ext cx="10515600" cy="813816"/>
+          </a:xfrm>
+          <a:prstGeom prst="rect">
+            <a:avLst/>
+          </a:prstGeom>
+          <a:noFill/>
+        </p:spPr>
+        <p:txBody>
+          <a:bodyPr wrap="square" anchor="ctr">
+            <a:spAutoFit/>
+          </a:bodyPr>
+          <a:lstStyle/>
+          <a:p>
+            <a:pPr algn="ctr">
+              <a:spcAft>
+                <a:spcPts val="400"/>
+              </a:spcAft>
+            </a:pPr>
+            <a:r>
+              <a:rPr sz="2800" b="1" i="0">
+                <a:solidFill>
+                  <a:srgbClr val="002060"/>
+                </a:solidFill>
+                <a:latin typeface="Arial"/>
+              </a:rPr>
+              <a:t>DEBRIEF: WHAT THE ROOM WILL HAVE FOUND</a:t>
+            </a:r>
+          </a:p>
+        </p:txBody>
+      </p:sp>
+      <p:cxnSp>
+        <p:nvCxnSpPr>
+          <p:cNvPr id="4" name="Connector 3"/>
+          <p:cNvCxnSpPr/>
+          <p:nvPr/>
+        </p:nvCxnSpPr>
+        <p:spPr>
+          <a:xfrm>
+            <a:off x="0" y="1097280"/>
+            <a:ext cx="12191695" cy="0"/>
+          </a:xfrm>
+          <a:prstGeom prst="line">
+            <a:avLst/>
+          </a:prstGeom>
+          <a:ln w="9525">
+            <a:solidFill>
+              <a:srgbClr val="D5DBE2"/>
+            </a:solidFill>
+          </a:ln>
+        </p:spPr>
+        <p:style>
+          <a:lnRef idx="2">
+            <a:schemeClr val="accent1"/>
+          </a:lnRef>
+          <a:fillRef idx="0">
+            <a:schemeClr val="accent1"/>
+          </a:fillRef>
+          <a:effectRef idx="1">
+            <a:schemeClr val="accent1"/>
+          </a:effectRef>
+          <a:fontRef idx="minor">
+            <a:schemeClr val="tx1"/>
+          </a:fontRef>
+        </p:style>
+      </p:cxnSp>
+      <p:cxnSp>
+        <p:nvCxnSpPr>
+          <p:cNvPr id="5" name="Connector 4"/>
+          <p:cNvCxnSpPr/>
+          <p:nvPr/>
+        </p:nvCxnSpPr>
+        <p:spPr>
+          <a:xfrm>
+            <a:off x="5952744" y="1133856"/>
+            <a:ext cx="292608" cy="0"/>
+          </a:xfrm>
+          <a:prstGeom prst="line">
+            <a:avLst/>
+          </a:prstGeom>
+          <a:ln w="76200">
+            <a:solidFill>
+              <a:srgbClr val="00305C"/>
+            </a:solidFill>
+          </a:ln>
+        </p:spPr>
+        <p:style>
+          <a:lnRef idx="2">
+            <a:schemeClr val="accent1"/>
+          </a:lnRef>
+          <a:fillRef idx="0">
+            <a:schemeClr val="accent1"/>
+          </a:fillRef>
+          <a:effectRef idx="1">
+            <a:schemeClr val="accent1"/>
+          </a:effectRef>
+          <a:fontRef idx="minor">
+            <a:schemeClr val="tx1"/>
+          </a:fontRef>
+        </p:style>
+      </p:cxnSp>
+      <p:sp>
+        <p:nvSpPr>
+          <p:cNvPr id="6" name="Rectangle 5"/>
+          <p:cNvSpPr/>
+          <p:nvPr/>
+        </p:nvSpPr>
+        <p:spPr>
+          <a:xfrm>
+            <a:off x="822960" y="1463040"/>
+            <a:ext cx="5166360" cy="2103120"/>
+          </a:xfrm>
+          <a:prstGeom prst="rect">
+            <a:avLst/>
+          </a:prstGeom>
+          <a:solidFill>
+            <a:srgbClr val="EEF1F5"/>
+          </a:solidFill>
+          <a:ln>
+            <a:noFill/>
+          </a:ln>
+          <a:effectLst/>
+        </p:spPr>
+        <p:style>
+          <a:lnRef idx="1">
+            <a:schemeClr val="accent1"/>
+          </a:lnRef>
+          <a:fillRef idx="3">
+            <a:schemeClr val="accent1"/>
+          </a:fillRef>
+          <a:effectRef idx="2">
+            <a:schemeClr val="accent1"/>
+          </a:effectRef>
+          <a:fontRef idx="minor">
+            <a:schemeClr val="lt1"/>
+          </a:fontRef>
+        </p:style>
+        <p:txBody>
+          <a:bodyPr rtlCol="0" anchor="ctr"/>
+          <a:lstStyle/>
+          <a:p>
+            <a:pPr algn="ctr"/>
+          </a:p>
+        </p:txBody>
+      </p:sp>
+      <p:sp>
+        <p:nvSpPr>
+          <p:cNvPr id="7" name="TextBox 6"/>
+          <p:cNvSpPr txBox="1"/>
+          <p:nvPr/>
+        </p:nvSpPr>
+        <p:spPr>
+          <a:xfrm>
+            <a:off x="1005840" y="1600200"/>
+            <a:ext cx="4800600" cy="365760"/>
+          </a:xfrm>
+          <a:prstGeom prst="rect">
+            <a:avLst/>
+          </a:prstGeom>
+          <a:noFill/>
+        </p:spPr>
+        <p:txBody>
+          <a:bodyPr wrap="square" anchor="t">
+            <a:spAutoFit/>
+          </a:bodyPr>
+          <a:lstStyle/>
+          <a:p>
+            <a:pPr algn="l">
+              <a:spcAft>
+                <a:spcPts val="400"/>
+              </a:spcAft>
+            </a:pPr>
+            <a:r>
+              <a:rPr sz="1500" b="1" i="0">
+                <a:solidFill>
+                  <a:srgbClr val="002060"/>
+                </a:solidFill>
+                <a:latin typeface="Arial"/>
+              </a:rPr>
+              <a:t>The same shape every time</a:t>
+            </a:r>
+          </a:p>
+        </p:txBody>
+      </p:sp>
+      <p:sp>
+        <p:nvSpPr>
+          <p:cNvPr id="8" name="TextBox 7"/>
+          <p:cNvSpPr txBox="1"/>
+          <p:nvPr/>
+        </p:nvSpPr>
+        <p:spPr>
+          <a:xfrm>
+            <a:off x="1005840" y="2011680"/>
+            <a:ext cx="4800600" cy="1417319"/>
+          </a:xfrm>
+          <a:prstGeom prst="rect">
+            <a:avLst/>
+          </a:prstGeom>
+          <a:noFill/>
+        </p:spPr>
+        <p:txBody>
+          <a:bodyPr wrap="square" anchor="t">
+            <a:spAutoFit/>
+          </a:bodyPr>
+          <a:lstStyle/>
+          <a:p>
+            <a:pPr algn="l">
+              <a:spcAft>
+                <a:spcPts val="500"/>
+              </a:spcAft>
+            </a:pPr>
+            <a:r>
+              <a:rPr sz="1300" b="0" i="0">
+                <a:solidFill>
+                  <a:srgbClr val="000000"/>
+                </a:solidFill>
+                <a:latin typeface="Arial"/>
+              </a:rPr>
+              <a:t>Intake, checks, decision, human line, response. Different functions, one pattern. That is why the building blocks transfer.</a:t>
+            </a:r>
+          </a:p>
+        </p:txBody>
+      </p:sp>
+      <p:sp>
+        <p:nvSpPr>
+          <p:cNvPr id="9" name="Rounded Rectangle 8"/>
+          <p:cNvSpPr/>
+          <p:nvPr/>
+        </p:nvSpPr>
+        <p:spPr>
+          <a:xfrm>
+            <a:off x="5303520" y="1600200"/>
+            <a:ext cx="457200" cy="320040"/>
+          </a:xfrm>
+          <a:prstGeom prst="roundRect">
+            <a:avLst/>
+          </a:prstGeom>
+          <a:solidFill>
+            <a:srgbClr val="00305C"/>
+          </a:solidFill>
+          <a:ln>
+            <a:noFill/>
+          </a:ln>
+          <a:effectLst/>
+        </p:spPr>
+        <p:style>
+          <a:lnRef idx="1">
+            <a:schemeClr val="accent1"/>
+          </a:lnRef>
+          <a:fillRef idx="3">
+            <a:schemeClr val="accent1"/>
+          </a:fillRef>
+          <a:effectRef idx="2">
+            <a:schemeClr val="accent1"/>
+          </a:effectRef>
+          <a:fontRef idx="minor">
+            <a:schemeClr val="lt1"/>
+          </a:fontRef>
+        </p:style>
+        <p:txBody>
+          <a:bodyPr rtlCol="0" anchor="ctr" tIns="0" bIns="0"/>
+          <a:lstStyle/>
+          <a:p>
+            <a:pPr algn="ctr"/>
+            <a:r>
+              <a:rPr sz="1300" b="1" i="0">
+                <a:solidFill>
+                  <a:srgbClr val="FFFFFF"/>
+                </a:solidFill>
+                <a:latin typeface="Arial"/>
+              </a:rPr>
+              <a:t>1</a:t>
+            </a:r>
+          </a:p>
+        </p:txBody>
+      </p:sp>
+      <p:sp>
+        <p:nvSpPr>
+          <p:cNvPr id="10" name="Rectangle 9"/>
+          <p:cNvSpPr/>
+          <p:nvPr/>
+        </p:nvSpPr>
+        <p:spPr>
+          <a:xfrm>
+            <a:off x="6263640" y="1463040"/>
+            <a:ext cx="5166360" cy="2103120"/>
+          </a:xfrm>
+          <a:prstGeom prst="rect">
+            <a:avLst/>
+          </a:prstGeom>
+          <a:solidFill>
+            <a:srgbClr val="EEF1F5"/>
+          </a:solidFill>
+          <a:ln>
+            <a:noFill/>
+          </a:ln>
+          <a:effectLst/>
+        </p:spPr>
+        <p:style>
+          <a:lnRef idx="1">
+            <a:schemeClr val="accent1"/>
+          </a:lnRef>
+          <a:fillRef idx="3">
+            <a:schemeClr val="accent1"/>
+          </a:fillRef>
+          <a:effectRef idx="2">
+            <a:schemeClr val="accent1"/>
+          </a:effectRef>
+          <a:fontRef idx="minor">
+            <a:schemeClr val="lt1"/>
+          </a:fontRef>
+        </p:style>
+        <p:txBody>
+          <a:bodyPr rtlCol="0" anchor="ctr"/>
+          <a:lstStyle/>
+          <a:p>
+            <a:pPr algn="ctr"/>
+          </a:p>
+        </p:txBody>
+      </p:sp>
+      <p:sp>
+        <p:nvSpPr>
+          <p:cNvPr id="11" name="TextBox 10"/>
+          <p:cNvSpPr txBox="1"/>
+          <p:nvPr/>
+        </p:nvSpPr>
+        <p:spPr>
+          <a:xfrm>
+            <a:off x="6446520" y="1600200"/>
+            <a:ext cx="4800600" cy="365760"/>
+          </a:xfrm>
+          <a:prstGeom prst="rect">
+            <a:avLst/>
+          </a:prstGeom>
+          <a:noFill/>
+        </p:spPr>
+        <p:txBody>
+          <a:bodyPr wrap="square" anchor="t">
+            <a:spAutoFit/>
+          </a:bodyPr>
+          <a:lstStyle/>
+          <a:p>
+            <a:pPr algn="l">
+              <a:spcAft>
+                <a:spcPts val="400"/>
+              </a:spcAft>
+            </a:pPr>
+            <a:r>
+              <a:rPr sz="1500" b="1" i="0">
+                <a:solidFill>
+                  <a:srgbClr val="002060"/>
+                </a:solidFill>
+                <a:latin typeface="Arial"/>
+              </a:rPr>
+              <a:t>Waiting, not working</a:t>
+            </a:r>
+          </a:p>
+        </p:txBody>
+      </p:sp>
+      <p:sp>
+        <p:nvSpPr>
+          <p:cNvPr id="12" name="TextBox 11"/>
+          <p:cNvSpPr txBox="1"/>
+          <p:nvPr/>
+        </p:nvSpPr>
+        <p:spPr>
+          <a:xfrm>
+            <a:off x="6446520" y="2011680"/>
+            <a:ext cx="4800600" cy="1417319"/>
+          </a:xfrm>
+          <a:prstGeom prst="rect">
+            <a:avLst/>
+          </a:prstGeom>
+          <a:noFill/>
+        </p:spPr>
+        <p:txBody>
+          <a:bodyPr wrap="square" anchor="t">
+            <a:spAutoFit/>
+          </a:bodyPr>
+          <a:lstStyle/>
+          <a:p>
+            <a:pPr algn="l">
+              <a:spcAft>
+                <a:spcPts val="500"/>
+              </a:spcAft>
+            </a:pPr>
+            <a:r>
+              <a:rPr sz="1300" b="0" i="0">
+                <a:solidFill>
+                  <a:srgbClr val="000000"/>
+                </a:solidFill>
+                <a:latin typeface="Arial"/>
+              </a:rPr>
+              <a:t>Every group will describe hand-offs and inboxes. The redesign removes waiting; the working time barely changes.</a:t>
+            </a:r>
+          </a:p>
+        </p:txBody>
+      </p:sp>
+      <p:sp>
+        <p:nvSpPr>
+          <p:cNvPr id="13" name="Rounded Rectangle 12"/>
+          <p:cNvSpPr/>
+          <p:nvPr/>
+        </p:nvSpPr>
+        <p:spPr>
+          <a:xfrm>
+            <a:off x="10744200" y="1600200"/>
+            <a:ext cx="457200" cy="320040"/>
+          </a:xfrm>
+          <a:prstGeom prst="roundRect">
+            <a:avLst/>
+          </a:prstGeom>
+          <a:solidFill>
+            <a:srgbClr val="00305C"/>
+          </a:solidFill>
+          <a:ln>
+            <a:noFill/>
+          </a:ln>
+          <a:effectLst/>
+        </p:spPr>
+        <p:style>
+          <a:lnRef idx="1">
+            <a:schemeClr val="accent1"/>
+          </a:lnRef>
+          <a:fillRef idx="3">
+            <a:schemeClr val="accent1"/>
+          </a:fillRef>
+          <a:effectRef idx="2">
+            <a:schemeClr val="accent1"/>
+          </a:effectRef>
+          <a:fontRef idx="minor">
+            <a:schemeClr val="lt1"/>
+          </a:fontRef>
+        </p:style>
+        <p:txBody>
+          <a:bodyPr rtlCol="0" anchor="ctr" tIns="0" bIns="0"/>
+          <a:lstStyle/>
+          <a:p>
+            <a:pPr algn="ctr"/>
+            <a:r>
+              <a:rPr sz="1300" b="1" i="0">
+                <a:solidFill>
+                  <a:srgbClr val="FFFFFF"/>
+                </a:solidFill>
+                <a:latin typeface="Arial"/>
+              </a:rPr>
+              <a:t>2</a:t>
+            </a:r>
+          </a:p>
+        </p:txBody>
+      </p:sp>
+      <p:sp>
+        <p:nvSpPr>
+          <p:cNvPr id="14" name="Rectangle 13"/>
+          <p:cNvSpPr/>
+          <p:nvPr/>
+        </p:nvSpPr>
+        <p:spPr>
+          <a:xfrm>
+            <a:off x="822960" y="3794760"/>
+            <a:ext cx="5166360" cy="2103120"/>
+          </a:xfrm>
+          <a:prstGeom prst="rect">
+            <a:avLst/>
+          </a:prstGeom>
+          <a:solidFill>
+            <a:srgbClr val="EEF1F5"/>
+          </a:solidFill>
+          <a:ln>
+            <a:noFill/>
+          </a:ln>
+          <a:effectLst/>
+        </p:spPr>
+        <p:style>
+          <a:lnRef idx="1">
+            <a:schemeClr val="accent1"/>
+          </a:lnRef>
+          <a:fillRef idx="3">
+            <a:schemeClr val="accent1"/>
+          </a:fillRef>
+          <a:effectRef idx="2">
+            <a:schemeClr val="accent1"/>
+          </a:effectRef>
+          <a:fontRef idx="minor">
+            <a:schemeClr val="lt1"/>
+          </a:fontRef>
+        </p:style>
+        <p:txBody>
+          <a:bodyPr rtlCol="0" anchor="ctr"/>
+          <a:lstStyle/>
+          <a:p>
+            <a:pPr algn="ctr"/>
+          </a:p>
+        </p:txBody>
+      </p:sp>
+      <p:sp>
+        <p:nvSpPr>
+          <p:cNvPr id="15" name="TextBox 14"/>
+          <p:cNvSpPr txBox="1"/>
+          <p:nvPr/>
+        </p:nvSpPr>
+        <p:spPr>
+          <a:xfrm>
+            <a:off x="1005840" y="3931920"/>
+            <a:ext cx="4800600" cy="365760"/>
+          </a:xfrm>
+          <a:prstGeom prst="rect">
+            <a:avLst/>
+          </a:prstGeom>
+          <a:noFill/>
+        </p:spPr>
+        <p:txBody>
+          <a:bodyPr wrap="square" anchor="t">
+            <a:spAutoFit/>
+          </a:bodyPr>
+          <a:lstStyle/>
+          <a:p>
+            <a:pPr algn="l">
+              <a:spcAft>
+                <a:spcPts val="400"/>
+              </a:spcAft>
+            </a:pPr>
+            <a:r>
+              <a:rPr sz="1500" b="1" i="0">
+                <a:solidFill>
+                  <a:srgbClr val="002060"/>
+                </a:solidFill>
+                <a:latin typeface="Arial"/>
+              </a:rPr>
+              <a:t>Systems are the constraint</a:t>
+            </a:r>
+          </a:p>
+        </p:txBody>
+      </p:sp>
+      <p:sp>
+        <p:nvSpPr>
+          <p:cNvPr id="16" name="TextBox 15"/>
+          <p:cNvSpPr txBox="1"/>
+          <p:nvPr/>
+        </p:nvSpPr>
+        <p:spPr>
+          <a:xfrm>
+            <a:off x="1005840" y="4343400"/>
+            <a:ext cx="4800600" cy="1417319"/>
+          </a:xfrm>
+          <a:prstGeom prst="rect">
+            <a:avLst/>
+          </a:prstGeom>
+          <a:noFill/>
+        </p:spPr>
+        <p:txBody>
+          <a:bodyPr wrap="square" anchor="t">
+            <a:spAutoFit/>
+          </a:bodyPr>
+          <a:lstStyle/>
+          <a:p>
+            <a:pPr algn="l">
+              <a:spcAft>
+                <a:spcPts val="500"/>
+              </a:spcAft>
+            </a:pPr>
+            <a:r>
+              <a:rPr sz="1300" b="0" i="0">
+                <a:solidFill>
+                  <a:srgbClr val="000000"/>
+                </a:solidFill>
+                <a:latin typeface="Arial"/>
+              </a:rPr>
+              <a:t>Where the facts are not in a system, the agent cannot check them. The real project is often data access, not AI.</a:t>
+            </a:r>
+          </a:p>
+        </p:txBody>
+      </p:sp>
+      <p:sp>
+        <p:nvSpPr>
+          <p:cNvPr id="17" name="Rounded Rectangle 16"/>
+          <p:cNvSpPr/>
+          <p:nvPr/>
+        </p:nvSpPr>
+        <p:spPr>
+          <a:xfrm>
+            <a:off x="5303520" y="3931920"/>
+            <a:ext cx="457200" cy="320040"/>
+          </a:xfrm>
+          <a:prstGeom prst="roundRect">
+            <a:avLst/>
+          </a:prstGeom>
+          <a:solidFill>
+            <a:srgbClr val="00305C"/>
+          </a:solidFill>
+          <a:ln>
+            <a:noFill/>
+          </a:ln>
+          <a:effectLst/>
+        </p:spPr>
+        <p:style>
+          <a:lnRef idx="1">
+            <a:schemeClr val="accent1"/>
+          </a:lnRef>
+          <a:fillRef idx="3">
+            <a:schemeClr val="accent1"/>
+          </a:fillRef>
+          <a:effectRef idx="2">
+            <a:schemeClr val="accent1"/>
+          </a:effectRef>
+          <a:fontRef idx="minor">
+            <a:schemeClr val="lt1"/>
+          </a:fontRef>
+        </p:style>
+        <p:txBody>
+          <a:bodyPr rtlCol="0" anchor="ctr" tIns="0" bIns="0"/>
+          <a:lstStyle/>
+          <a:p>
+            <a:pPr algn="ctr"/>
+            <a:r>
+              <a:rPr sz="1300" b="1" i="0">
+                <a:solidFill>
+                  <a:srgbClr val="FFFFFF"/>
+                </a:solidFill>
+                <a:latin typeface="Arial"/>
+              </a:rPr>
+              <a:t>3</a:t>
+            </a:r>
+          </a:p>
+        </p:txBody>
+      </p:sp>
+      <p:sp>
+        <p:nvSpPr>
+          <p:cNvPr id="18" name="Rectangle 17"/>
+          <p:cNvSpPr/>
+          <p:nvPr/>
+        </p:nvSpPr>
+        <p:spPr>
+          <a:xfrm>
+            <a:off x="6263640" y="3794760"/>
+            <a:ext cx="5166360" cy="2103120"/>
+          </a:xfrm>
+          <a:prstGeom prst="rect">
+            <a:avLst/>
+          </a:prstGeom>
+          <a:solidFill>
+            <a:srgbClr val="EEF1F5"/>
+          </a:solidFill>
+          <a:ln>
+            <a:noFill/>
+          </a:ln>
+          <a:effectLst/>
+        </p:spPr>
+        <p:style>
+          <a:lnRef idx="1">
+            <a:schemeClr val="accent1"/>
+          </a:lnRef>
+          <a:fillRef idx="3">
+            <a:schemeClr val="accent1"/>
+          </a:fillRef>
+          <a:effectRef idx="2">
+            <a:schemeClr val="accent1"/>
+          </a:effectRef>
+          <a:fontRef idx="minor">
+            <a:schemeClr val="lt1"/>
+          </a:fontRef>
+        </p:style>
+        <p:txBody>
+          <a:bodyPr rtlCol="0" anchor="ctr"/>
+          <a:lstStyle/>
+          <a:p>
+            <a:pPr algn="ctr"/>
+          </a:p>
+        </p:txBody>
+      </p:sp>
+      <p:sp>
+        <p:nvSpPr>
+          <p:cNvPr id="19" name="TextBox 18"/>
+          <p:cNvSpPr txBox="1"/>
+          <p:nvPr/>
+        </p:nvSpPr>
+        <p:spPr>
+          <a:xfrm>
+            <a:off x="6446520" y="3931920"/>
+            <a:ext cx="4800600" cy="365760"/>
+          </a:xfrm>
+          <a:prstGeom prst="rect">
+            <a:avLst/>
+          </a:prstGeom>
+          <a:noFill/>
+        </p:spPr>
+        <p:txBody>
+          <a:bodyPr wrap="square" anchor="t">
+            <a:spAutoFit/>
+          </a:bodyPr>
+          <a:lstStyle/>
+          <a:p>
+            <a:pPr algn="l">
+              <a:spcAft>
+                <a:spcPts val="400"/>
+              </a:spcAft>
+            </a:pPr>
+            <a:r>
+              <a:rPr sz="1500" b="1" i="0">
+                <a:solidFill>
+                  <a:srgbClr val="002060"/>
+                </a:solidFill>
+                <a:latin typeface="Arial"/>
+              </a:rPr>
+              <a:t>The human line moves, it does not vanish</a:t>
+            </a:r>
+          </a:p>
+        </p:txBody>
+      </p:sp>
+      <p:sp>
+        <p:nvSpPr>
+          <p:cNvPr id="20" name="TextBox 19"/>
+          <p:cNvSpPr txBox="1"/>
+          <p:nvPr/>
+        </p:nvSpPr>
+        <p:spPr>
+          <a:xfrm>
+            <a:off x="6446520" y="4343400"/>
+            <a:ext cx="4800600" cy="1417319"/>
+          </a:xfrm>
+          <a:prstGeom prst="rect">
+            <a:avLst/>
+          </a:prstGeom>
+          <a:noFill/>
+        </p:spPr>
+        <p:txBody>
+          <a:bodyPr wrap="square" anchor="t">
+            <a:spAutoFit/>
+          </a:bodyPr>
+          <a:lstStyle/>
+          <a:p>
+            <a:pPr algn="l">
+              <a:spcAft>
+                <a:spcPts val="500"/>
+              </a:spcAft>
+            </a:pPr>
+            <a:r>
+              <a:rPr sz="1300" b="0" i="0">
+                <a:solidFill>
+                  <a:srgbClr val="000000"/>
+                </a:solidFill>
+                <a:latin typeface="Arial"/>
+              </a:rPr>
+              <a:t>Approvals above a limit, exceptions, the difficult conversation. Deciding that line is the leadership decision.</a:t>
+            </a:r>
+          </a:p>
+        </p:txBody>
+      </p:sp>
+      <p:sp>
+        <p:nvSpPr>
+          <p:cNvPr id="21" name="Rounded Rectangle 20"/>
+          <p:cNvSpPr/>
+          <p:nvPr/>
+        </p:nvSpPr>
+        <p:spPr>
+          <a:xfrm>
+            <a:off x="10744200" y="3931920"/>
+            <a:ext cx="457200" cy="320040"/>
+          </a:xfrm>
+          <a:prstGeom prst="roundRect">
+            <a:avLst/>
+          </a:prstGeom>
+          <a:solidFill>
+            <a:srgbClr val="00305C"/>
+          </a:solidFill>
+          <a:ln>
+            <a:noFill/>
+          </a:ln>
+          <a:effectLst/>
+        </p:spPr>
+        <p:style>
+          <a:lnRef idx="1">
+            <a:schemeClr val="accent1"/>
+          </a:lnRef>
+          <a:fillRef idx="3">
+            <a:schemeClr val="accent1"/>
+          </a:fillRef>
+          <a:effectRef idx="2">
+            <a:schemeClr val="accent1"/>
+          </a:effectRef>
+          <a:fontRef idx="minor">
+            <a:schemeClr val="lt1"/>
+          </a:fontRef>
+        </p:style>
+        <p:txBody>
+          <a:bodyPr rtlCol="0" anchor="ctr" tIns="0" bIns="0"/>
+          <a:lstStyle/>
+          <a:p>
+            <a:pPr algn="ctr"/>
+            <a:r>
+              <a:rPr sz="1300" b="1" i="0">
+                <a:solidFill>
+                  <a:srgbClr val="FFFFFF"/>
+                </a:solidFill>
+                <a:latin typeface="Arial"/>
+              </a:rPr>
+              <a:t>4</a:t>
+            </a:r>
+          </a:p>
+        </p:txBody>
+      </p:sp>
+      <p:sp>
+        <p:nvSpPr>
+          <p:cNvPr id="22" name="TextBox 21"/>
+          <p:cNvSpPr txBox="1"/>
+          <p:nvPr/>
+        </p:nvSpPr>
+        <p:spPr>
+          <a:xfrm>
+            <a:off x="822960" y="6172200"/>
+            <a:ext cx="10607040" cy="320040"/>
+          </a:xfrm>
+          <a:prstGeom prst="rect">
+            <a:avLst/>
+          </a:prstGeom>
+          <a:noFill/>
+        </p:spPr>
+        <p:txBody>
+          <a:bodyPr wrap="square" anchor="t">
+            <a:spAutoFit/>
+          </a:bodyPr>
+          <a:lstStyle/>
+          <a:p>
+            <a:pPr algn="l">
+              <a:spcAft>
+                <a:spcPts val="400"/>
+              </a:spcAft>
+            </a:pPr>
+            <a:r>
+              <a:rPr sz="1200" b="0" i="1">
+                <a:solidFill>
+                  <a:srgbClr val="002060"/>
+                </a:solidFill>
+                <a:latin typeface="Arial"/>
+              </a:rPr>
+              <a:t>Close by asking each group for the one thing they would need from the organisation to build what they mapped.</a:t>
             </a:r>
           </a:p>
         </p:txBody>

--- a/slides/agent-challenge-hr.pptx
+++ b/slides/agent-challenge-hr.pptx
@@ -33,6 +33,7 @@
     <p:sldId id="278" r:id="rId29"/>
     <p:sldId id="279" r:id="rId30"/>
     <p:sldId id="280" r:id="rId31"/>
+    <p:sldId id="281" r:id="rId32"/>
   </p:sldIdLst>
   <p:sldSz cx="12192000" cy="6858000"/>
   <p:notesSz cx="6858000" cy="9144000"/>
@@ -2151,6 +2152,76 @@
 </p:notes>
 </file>
 
+<file path=ppt/notesSlides/notesSlide26.xml><?xml version="1.0" encoding="utf-8"?>
+<p:notes xmlns:a="http://schemas.openxmlformats.org/drawingml/2006/main" xmlns:p="http://schemas.openxmlformats.org/presentationml/2006/main" xmlns:r="http://schemas.openxmlformats.org/officeDocument/2006/relationships">
+  <p:cSld>
+    <p:spTree>
+      <p:nvGrpSpPr>
+        <p:cNvPr id="1" name=""/>
+        <p:cNvGrpSpPr/>
+        <p:nvPr/>
+      </p:nvGrpSpPr>
+      <p:grpSpPr>
+        <a:xfrm>
+          <a:off x="0" y="0"/>
+          <a:ext cx="0" cy="0"/>
+          <a:chOff x="0" y="0"/>
+          <a:chExt cx="0" cy="0"/>
+        </a:xfrm>
+      </p:grpSpPr>
+      <p:sp>
+        <p:nvSpPr>
+          <p:cNvPr id="2" name="Slide Image Placeholder 1"/>
+          <p:cNvSpPr>
+            <a:spLocks noGrp="1"/>
+          </p:cNvSpPr>
+          <p:nvPr>
+            <p:ph type="sldImg" idx="2"/>
+          </p:nvPr>
+        </p:nvSpPr>
+        <p:spPr/>
+      </p:sp>
+      <p:sp>
+        <p:nvSpPr>
+          <p:cNvPr id="3" name="Notes Placeholder 2"/>
+          <p:cNvSpPr>
+            <a:spLocks noGrp="1"/>
+          </p:cNvSpPr>
+          <p:nvPr>
+            <p:ph type="body" idx="3" sz="quarter"/>
+          </p:nvPr>
+        </p:nvSpPr>
+        <p:spPr/>
+        <p:txBody>
+          <a:bodyPr/>
+          <a:lstStyle/>
+          <a:p>
+            <a:r>
+              <a:t>Close on the operating model. Everything in the session came back to ownership, governance and behaviour: who writes the brief, who owns the rules, who signs above the limit, what is measured. The tools were the least of it.</a:t>
+            </a:r>
+          </a:p>
+        </p:txBody>
+      </p:sp>
+      <p:sp>
+        <p:nvSpPr>
+          <p:cNvPr id="4" name="Slide Number Placeholder 3"/>
+          <p:cNvSpPr>
+            <a:spLocks noGrp="1"/>
+          </p:cNvSpPr>
+          <p:nvPr>
+            <p:ph type="sldNum" idx="5" sz="quarter"/>
+          </p:nvPr>
+        </p:nvSpPr>
+        <p:spPr/>
+      </p:sp>
+    </p:spTree>
+  </p:cSld>
+  <p:clrMapOvr>
+    <a:masterClrMapping/>
+  </p:clrMapOvr>
+</p:notes>
+</file>
+
 <file path=ppt/notesSlides/notesSlide3.xml><?xml version="1.0" encoding="utf-8"?>
 <p:notes xmlns:a="http://schemas.openxmlformats.org/drawingml/2006/main" xmlns:p="http://schemas.openxmlformats.org/presentationml/2006/main" xmlns:r="http://schemas.openxmlformats.org/officeDocument/2006/relationships">
   <p:cSld>
@@ -28628,6 +28699,624 @@
                 <a:latin typeface="Arial"/>
               </a:rPr>
               <a:t>Close by asking each group for the one thing they would need from the organisation to build what they mapped.</a:t>
+            </a:r>
+          </a:p>
+        </p:txBody>
+      </p:sp>
+    </p:spTree>
+  </p:cSld>
+  <p:clrMapOvr>
+    <a:masterClrMapping/>
+  </p:clrMapOvr>
+</p:sld>
+</file>
+
+<file path=ppt/slides/slide26.xml><?xml version="1.0" encoding="utf-8"?>
+<p:sld xmlns:a="http://schemas.openxmlformats.org/drawingml/2006/main" xmlns:p="http://schemas.openxmlformats.org/presentationml/2006/main" xmlns:r="http://schemas.openxmlformats.org/officeDocument/2006/relationships">
+  <p:cSld>
+    <p:spTree>
+      <p:nvGrpSpPr>
+        <p:cNvPr id="1" name=""/>
+        <p:cNvGrpSpPr/>
+        <p:nvPr/>
+      </p:nvGrpSpPr>
+      <p:grpSpPr/>
+      <p:sp>
+        <p:nvSpPr>
+          <p:cNvPr id="2" name="TextBox 1"/>
+          <p:cNvSpPr txBox="1"/>
+          <p:nvPr/>
+        </p:nvSpPr>
+        <p:spPr>
+          <a:xfrm>
+            <a:off x="9893808" y="6492240"/>
+            <a:ext cx="2084831" cy="274320"/>
+          </a:xfrm>
+          <a:prstGeom prst="rect">
+            <a:avLst/>
+          </a:prstGeom>
+          <a:noFill/>
+        </p:spPr>
+        <p:txBody>
+          <a:bodyPr wrap="square" anchor="t">
+            <a:spAutoFit/>
+          </a:bodyPr>
+          <a:lstStyle/>
+          <a:p>
+            <a:pPr algn="r">
+              <a:spcAft>
+                <a:spcPts val="400"/>
+              </a:spcAft>
+            </a:pPr>
+            <a:r>
+              <a:rPr sz="1000" b="0" i="0">
+                <a:solidFill>
+                  <a:srgbClr val="6B7280"/>
+                </a:solidFill>
+                <a:latin typeface="Arial"/>
+              </a:rPr>
+              <a:t>26</a:t>
+            </a:r>
+          </a:p>
+        </p:txBody>
+      </p:sp>
+      <p:sp>
+        <p:nvSpPr>
+          <p:cNvPr id="3" name="TextBox 2"/>
+          <p:cNvSpPr txBox="1"/>
+          <p:nvPr/>
+        </p:nvSpPr>
+        <p:spPr>
+          <a:xfrm>
+            <a:off x="731520" y="502920"/>
+            <a:ext cx="10789920" cy="1097280"/>
+          </a:xfrm>
+          <a:prstGeom prst="rect">
+            <a:avLst/>
+          </a:prstGeom>
+          <a:noFill/>
+        </p:spPr>
+        <p:txBody>
+          <a:bodyPr wrap="square" anchor="ctr">
+            <a:spAutoFit/>
+          </a:bodyPr>
+          <a:lstStyle/>
+          <a:p>
+            <a:r>
+              <a:rPr sz="4400" b="1" i="0">
+                <a:solidFill>
+                  <a:srgbClr val="1F2A5C"/>
+                </a:solidFill>
+                <a:latin typeface="Arial"/>
+              </a:rPr>
+              <a:t>AI IS NOT A </a:t>
+            </a:r>
+            <a:r>
+              <a:rPr sz="4400" b="1" i="0">
+                <a:solidFill>
+                  <a:srgbClr val="CE9A2B"/>
+                </a:solidFill>
+                <a:latin typeface="Arial"/>
+              </a:rPr>
+              <a:t>TECHNOLOGY PROJECT</a:t>
+            </a:r>
+          </a:p>
+        </p:txBody>
+      </p:sp>
+      <p:sp>
+        <p:nvSpPr>
+          <p:cNvPr id="4" name="TextBox 3"/>
+          <p:cNvSpPr txBox="1"/>
+          <p:nvPr/>
+        </p:nvSpPr>
+        <p:spPr>
+          <a:xfrm>
+            <a:off x="731520" y="1783080"/>
+            <a:ext cx="10607040" cy="914400"/>
+          </a:xfrm>
+          <a:prstGeom prst="rect">
+            <a:avLst/>
+          </a:prstGeom>
+          <a:noFill/>
+        </p:spPr>
+        <p:txBody>
+          <a:bodyPr wrap="square" anchor="t">
+            <a:spAutoFit/>
+          </a:bodyPr>
+          <a:lstStyle/>
+          <a:p>
+            <a:pPr algn="l">
+              <a:spcAft>
+                <a:spcPts val="400"/>
+              </a:spcAft>
+            </a:pPr>
+            <a:r>
+              <a:rPr sz="1700" b="0" i="0">
+                <a:solidFill>
+                  <a:srgbClr val="1F2A5C"/>
+                </a:solidFill>
+                <a:latin typeface="Arial"/>
+              </a:rPr>
+              <a:t>The real question isn't which tool to buy, but who owns it, how to govern it, and how to change the way thousands of people work. Adoption at scale is an operating-model problem, not a technology one.</a:t>
+            </a:r>
+          </a:p>
+        </p:txBody>
+      </p:sp>
+      <p:sp>
+        <p:nvSpPr>
+          <p:cNvPr id="5" name="Rounded Rectangle 4"/>
+          <p:cNvSpPr/>
+          <p:nvPr/>
+        </p:nvSpPr>
+        <p:spPr>
+          <a:xfrm>
+            <a:off x="731520" y="2971800"/>
+            <a:ext cx="4892040" cy="2377440"/>
+          </a:xfrm>
+          <a:prstGeom prst="roundRect">
+            <a:avLst>
+              <a:gd name="adj" fmla="val 4000"/>
+            </a:avLst>
+          </a:prstGeom>
+          <a:solidFill>
+            <a:srgbClr val="F2F2F2"/>
+          </a:solidFill>
+          <a:ln>
+            <a:noFill/>
+          </a:ln>
+          <a:effectLst/>
+        </p:spPr>
+        <p:style>
+          <a:lnRef idx="1">
+            <a:schemeClr val="accent1"/>
+          </a:lnRef>
+          <a:fillRef idx="3">
+            <a:schemeClr val="accent1"/>
+          </a:fillRef>
+          <a:effectRef idx="2">
+            <a:schemeClr val="accent1"/>
+          </a:effectRef>
+          <a:fontRef idx="minor">
+            <a:schemeClr val="lt1"/>
+          </a:fontRef>
+        </p:style>
+        <p:txBody>
+          <a:bodyPr rtlCol="0" anchor="ctr"/>
+          <a:lstStyle/>
+          <a:p>
+            <a:pPr algn="ctr"/>
+          </a:p>
+        </p:txBody>
+      </p:sp>
+      <p:sp>
+        <p:nvSpPr>
+          <p:cNvPr id="6" name="TextBox 5"/>
+          <p:cNvSpPr txBox="1"/>
+          <p:nvPr/>
+        </p:nvSpPr>
+        <p:spPr>
+          <a:xfrm>
+            <a:off x="1051560" y="3200400"/>
+            <a:ext cx="4389120" cy="411480"/>
+          </a:xfrm>
+          <a:prstGeom prst="rect">
+            <a:avLst/>
+          </a:prstGeom>
+          <a:noFill/>
+        </p:spPr>
+        <p:txBody>
+          <a:bodyPr wrap="square" anchor="t">
+            <a:spAutoFit/>
+          </a:bodyPr>
+          <a:lstStyle/>
+          <a:p>
+            <a:pPr algn="l">
+              <a:spcAft>
+                <a:spcPts val="400"/>
+              </a:spcAft>
+            </a:pPr>
+            <a:r>
+              <a:rPr sz="1700" b="1" i="0">
+                <a:solidFill>
+                  <a:srgbClr val="3A3F47"/>
+                </a:solidFill>
+                <a:latin typeface="Arial"/>
+              </a:rPr>
+              <a:t>TREATING AI AS A TOOL</a:t>
+            </a:r>
+          </a:p>
+        </p:txBody>
+      </p:sp>
+      <p:sp>
+        <p:nvSpPr>
+          <p:cNvPr id="7" name="TextBox 6"/>
+          <p:cNvSpPr txBox="1"/>
+          <p:nvPr/>
+        </p:nvSpPr>
+        <p:spPr>
+          <a:xfrm>
+            <a:off x="1051560" y="3703320"/>
+            <a:ext cx="4389120" cy="1554480"/>
+          </a:xfrm>
+          <a:prstGeom prst="rect">
+            <a:avLst/>
+          </a:prstGeom>
+          <a:noFill/>
+        </p:spPr>
+        <p:txBody>
+          <a:bodyPr wrap="square" anchor="t">
+            <a:spAutoFit/>
+          </a:bodyPr>
+          <a:lstStyle/>
+          <a:p>
+            <a:pPr algn="l" marL="201168" indent="-182880">
+              <a:spcAft>
+                <a:spcPts val="500"/>
+              </a:spcAft>
+              <a:buChar char="•"/>
+            </a:pPr>
+            <a:r>
+              <a:rPr sz="1400" b="0" i="0">
+                <a:solidFill>
+                  <a:srgbClr val="3A3F47"/>
+                </a:solidFill>
+                <a:latin typeface="Arial"/>
+              </a:rPr>
+              <a:t>Buy tools, multiply licences</a:t>
+            </a:r>
+          </a:p>
+          <a:p>
+            <a:pPr algn="l" marL="201168" indent="-182880">
+              <a:spcAft>
+                <a:spcPts val="500"/>
+              </a:spcAft>
+              <a:buChar char="•"/>
+            </a:pPr>
+            <a:r>
+              <a:rPr sz="1400" b="0" i="0">
+                <a:solidFill>
+                  <a:srgbClr val="3A3F47"/>
+                </a:solidFill>
+                <a:latin typeface="Arial"/>
+              </a:rPr>
+              <a:t>Train en masse, tick the box</a:t>
+            </a:r>
+          </a:p>
+          <a:p>
+            <a:pPr algn="l" marL="201168" indent="-182880">
+              <a:spcAft>
+                <a:spcPts val="500"/>
+              </a:spcAft>
+              <a:buChar char="•"/>
+            </a:pPr>
+            <a:r>
+              <a:rPr sz="1400" b="0" i="0">
+                <a:solidFill>
+                  <a:srgbClr val="3A3F47"/>
+                </a:solidFill>
+                <a:latin typeface="Arial"/>
+              </a:rPr>
+              <a:t>Count prompts and logins</a:t>
+            </a:r>
+          </a:p>
+          <a:p>
+            <a:pPr algn="l" marL="201168" indent="-182880">
+              <a:spcAft>
+                <a:spcPts val="500"/>
+              </a:spcAft>
+              <a:buChar char="•"/>
+            </a:pPr>
+            <a:r>
+              <a:rPr sz="1400" b="0" i="0">
+                <a:solidFill>
+                  <a:srgbClr val="3A3F47"/>
+                </a:solidFill>
+                <a:latin typeface="Arial"/>
+              </a:rPr>
+              <a:t>Assume adoption follows</a:t>
+            </a:r>
+          </a:p>
+        </p:txBody>
+      </p:sp>
+      <p:sp>
+        <p:nvSpPr>
+          <p:cNvPr id="8" name="Oval 7"/>
+          <p:cNvSpPr/>
+          <p:nvPr/>
+        </p:nvSpPr>
+        <p:spPr>
+          <a:xfrm>
+            <a:off x="5742432" y="3776472"/>
+            <a:ext cx="777240" cy="777240"/>
+          </a:xfrm>
+          <a:prstGeom prst="ellipse">
+            <a:avLst/>
+          </a:prstGeom>
+          <a:solidFill>
+            <a:srgbClr val="CE9A2B"/>
+          </a:solidFill>
+          <a:ln>
+            <a:noFill/>
+          </a:ln>
+          <a:effectLst/>
+        </p:spPr>
+        <p:style>
+          <a:lnRef idx="1">
+            <a:schemeClr val="accent1"/>
+          </a:lnRef>
+          <a:fillRef idx="3">
+            <a:schemeClr val="accent1"/>
+          </a:fillRef>
+          <a:effectRef idx="2">
+            <a:schemeClr val="accent1"/>
+          </a:effectRef>
+          <a:fontRef idx="minor">
+            <a:schemeClr val="lt1"/>
+          </a:fontRef>
+        </p:style>
+        <p:txBody>
+          <a:bodyPr rtlCol="0" anchor="ctr"/>
+          <a:lstStyle/>
+          <a:p>
+            <a:pPr algn="ctr"/>
+          </a:p>
+        </p:txBody>
+      </p:sp>
+      <p:sp>
+        <p:nvSpPr>
+          <p:cNvPr id="9" name="Right Arrow 8"/>
+          <p:cNvSpPr/>
+          <p:nvPr/>
+        </p:nvSpPr>
+        <p:spPr>
+          <a:xfrm>
+            <a:off x="5943600" y="4005072"/>
+            <a:ext cx="384048" cy="329184"/>
+          </a:xfrm>
+          <a:prstGeom prst="rightArrow">
+            <a:avLst/>
+          </a:prstGeom>
+          <a:solidFill>
+            <a:srgbClr val="FFFFFF"/>
+          </a:solidFill>
+          <a:ln>
+            <a:noFill/>
+          </a:ln>
+          <a:effectLst/>
+        </p:spPr>
+        <p:style>
+          <a:lnRef idx="1">
+            <a:schemeClr val="accent1"/>
+          </a:lnRef>
+          <a:fillRef idx="3">
+            <a:schemeClr val="accent1"/>
+          </a:fillRef>
+          <a:effectRef idx="2">
+            <a:schemeClr val="accent1"/>
+          </a:effectRef>
+          <a:fontRef idx="minor">
+            <a:schemeClr val="lt1"/>
+          </a:fontRef>
+        </p:style>
+        <p:txBody>
+          <a:bodyPr rtlCol="0" anchor="ctr"/>
+          <a:lstStyle/>
+          <a:p>
+            <a:pPr algn="ctr"/>
+          </a:p>
+        </p:txBody>
+      </p:sp>
+      <p:sp>
+        <p:nvSpPr>
+          <p:cNvPr id="10" name="Rounded Rectangle 9"/>
+          <p:cNvSpPr/>
+          <p:nvPr/>
+        </p:nvSpPr>
+        <p:spPr>
+          <a:xfrm>
+            <a:off x="6629400" y="2971800"/>
+            <a:ext cx="4892040" cy="2377440"/>
+          </a:xfrm>
+          <a:prstGeom prst="roundRect">
+            <a:avLst>
+              <a:gd name="adj" fmla="val 4000"/>
+            </a:avLst>
+          </a:prstGeom>
+          <a:solidFill>
+            <a:srgbClr val="1F2A5C"/>
+          </a:solidFill>
+          <a:ln>
+            <a:noFill/>
+          </a:ln>
+          <a:effectLst/>
+        </p:spPr>
+        <p:style>
+          <a:lnRef idx="1">
+            <a:schemeClr val="accent1"/>
+          </a:lnRef>
+          <a:fillRef idx="3">
+            <a:schemeClr val="accent1"/>
+          </a:fillRef>
+          <a:effectRef idx="2">
+            <a:schemeClr val="accent1"/>
+          </a:effectRef>
+          <a:fontRef idx="minor">
+            <a:schemeClr val="lt1"/>
+          </a:fontRef>
+        </p:style>
+        <p:txBody>
+          <a:bodyPr rtlCol="0" anchor="ctr"/>
+          <a:lstStyle/>
+          <a:p>
+            <a:pPr algn="ctr"/>
+          </a:p>
+        </p:txBody>
+      </p:sp>
+      <p:sp>
+        <p:nvSpPr>
+          <p:cNvPr id="11" name="TextBox 10"/>
+          <p:cNvSpPr txBox="1"/>
+          <p:nvPr/>
+        </p:nvSpPr>
+        <p:spPr>
+          <a:xfrm>
+            <a:off x="6949440" y="3154680"/>
+            <a:ext cx="4389120" cy="640080"/>
+          </a:xfrm>
+          <a:prstGeom prst="rect">
+            <a:avLst/>
+          </a:prstGeom>
+          <a:noFill/>
+        </p:spPr>
+        <p:txBody>
+          <a:bodyPr wrap="square" anchor="t">
+            <a:spAutoFit/>
+          </a:bodyPr>
+          <a:lstStyle/>
+          <a:p>
+            <a:pPr algn="l">
+              <a:spcAft>
+                <a:spcPts val="400"/>
+              </a:spcAft>
+            </a:pPr>
+            <a:r>
+              <a:rPr sz="1700" b="1" i="0">
+                <a:solidFill>
+                  <a:srgbClr val="CE9A2B"/>
+                </a:solidFill>
+                <a:latin typeface="Arial"/>
+              </a:rPr>
+              <a:t>MAKING IT AN OPERATING-MODEL QUESTION</a:t>
+            </a:r>
+          </a:p>
+        </p:txBody>
+      </p:sp>
+      <p:sp>
+        <p:nvSpPr>
+          <p:cNvPr id="12" name="TextBox 11"/>
+          <p:cNvSpPr txBox="1"/>
+          <p:nvPr/>
+        </p:nvSpPr>
+        <p:spPr>
+          <a:xfrm>
+            <a:off x="6949440" y="3794760"/>
+            <a:ext cx="4389120" cy="1463040"/>
+          </a:xfrm>
+          <a:prstGeom prst="rect">
+            <a:avLst/>
+          </a:prstGeom>
+          <a:noFill/>
+        </p:spPr>
+        <p:txBody>
+          <a:bodyPr wrap="square" anchor="t">
+            <a:spAutoFit/>
+          </a:bodyPr>
+          <a:lstStyle/>
+          <a:p>
+            <a:pPr algn="l" marL="201168" indent="-182880">
+              <a:spcAft>
+                <a:spcPts val="500"/>
+              </a:spcAft>
+              <a:buChar char="•"/>
+            </a:pPr>
+            <a:r>
+              <a:rPr sz="1400" b="0" i="0">
+                <a:solidFill>
+                  <a:srgbClr val="FFFFFF"/>
+                </a:solidFill>
+                <a:latin typeface="Arial"/>
+              </a:rPr>
+              <a:t>Define who owns it and how to govern it</a:t>
+            </a:r>
+          </a:p>
+          <a:p>
+            <a:pPr algn="l" marL="201168" indent="-182880">
+              <a:spcAft>
+                <a:spcPts val="500"/>
+              </a:spcAft>
+              <a:buChar char="•"/>
+            </a:pPr>
+            <a:r>
+              <a:rPr sz="1400" b="0" i="0">
+                <a:solidFill>
+                  <a:srgbClr val="FFFFFF"/>
+                </a:solidFill>
+                <a:latin typeface="Arial"/>
+              </a:rPr>
+              <a:t>Evolve working behaviours</a:t>
+            </a:r>
+          </a:p>
+          <a:p>
+            <a:pPr algn="l" marL="201168" indent="-182880">
+              <a:spcAft>
+                <a:spcPts val="500"/>
+              </a:spcAft>
+              <a:buChar char="•"/>
+            </a:pPr>
+            <a:r>
+              <a:rPr sz="1400" b="0" i="0">
+                <a:solidFill>
+                  <a:srgbClr val="FFFFFF"/>
+                </a:solidFill>
+                <a:latin typeface="Arial"/>
+              </a:rPr>
+              <a:t>Keep humans in the loop</a:t>
+            </a:r>
+          </a:p>
+          <a:p>
+            <a:pPr algn="l" marL="201168" indent="-182880">
+              <a:spcAft>
+                <a:spcPts val="500"/>
+              </a:spcAft>
+              <a:buChar char="•"/>
+            </a:pPr>
+            <a:r>
+              <a:rPr sz="1400" b="0" i="0">
+                <a:solidFill>
+                  <a:srgbClr val="FFFFFF"/>
+                </a:solidFill>
+                <a:latin typeface="Arial"/>
+              </a:rPr>
+              <a:t>Measure impact, not usage</a:t>
+            </a:r>
+          </a:p>
+        </p:txBody>
+      </p:sp>
+      <p:sp>
+        <p:nvSpPr>
+          <p:cNvPr id="13" name="TextBox 12"/>
+          <p:cNvSpPr txBox="1"/>
+          <p:nvPr/>
+        </p:nvSpPr>
+        <p:spPr>
+          <a:xfrm>
+            <a:off x="731520" y="5669280"/>
+            <a:ext cx="10607040" cy="640080"/>
+          </a:xfrm>
+          <a:prstGeom prst="rect">
+            <a:avLst/>
+          </a:prstGeom>
+          <a:noFill/>
+        </p:spPr>
+        <p:txBody>
+          <a:bodyPr wrap="square" anchor="t">
+            <a:spAutoFit/>
+          </a:bodyPr>
+          <a:lstStyle/>
+          <a:p>
+            <a:pPr algn="l">
+              <a:spcAft>
+                <a:spcPts val="400"/>
+              </a:spcAft>
+            </a:pPr>
+            <a:r>
+              <a:rPr sz="1300" b="0" i="1">
+                <a:solidFill>
+                  <a:srgbClr val="1F2A5C"/>
+                </a:solidFill>
+                <a:latin typeface="Arial"/>
+              </a:rPr>
+              <a:t>Today you built one agent and redesigned one process. Neither needed a purchase. Both needed an owner, a limit in code, and a decision about where the person sits.</a:t>
             </a:r>
           </a:p>
         </p:txBody>

--- a/slides/agent-challenge-hr.pptx
+++ b/slides/agent-challenge-hr.pptx
@@ -14120,6 +14120,91 @@
             <a:avLst/>
           </a:prstGeom>
           <a:solidFill>
+            <a:srgbClr val="E6F0F7"/>
+          </a:solidFill>
+          <a:ln w="12700">
+            <a:solidFill>
+              <a:srgbClr val="2C6C9C"/>
+            </a:solidFill>
+          </a:ln>
+          <a:effectLst/>
+        </p:spPr>
+        <p:style>
+          <a:lnRef idx="1">
+            <a:schemeClr val="accent1"/>
+          </a:lnRef>
+          <a:fillRef idx="3">
+            <a:schemeClr val="accent1"/>
+          </a:fillRef>
+          <a:effectRef idx="2">
+            <a:schemeClr val="accent1"/>
+          </a:effectRef>
+          <a:fontRef idx="minor">
+            <a:schemeClr val="lt1"/>
+          </a:fontRef>
+        </p:style>
+        <p:txBody>
+          <a:bodyPr rtlCol="0" anchor="ctr"/>
+          <a:lstStyle/>
+          <a:p>
+            <a:pPr algn="ctr"/>
+          </a:p>
+        </p:txBody>
+      </p:sp>
+      <p:sp>
+        <p:nvSpPr>
+          <p:cNvPr id="41" name="TextBox 40"/>
+          <p:cNvSpPr txBox="1"/>
+          <p:nvPr/>
+        </p:nvSpPr>
+        <p:spPr>
+          <a:xfrm>
+            <a:off x="859536" y="6035040"/>
+            <a:ext cx="1097280" cy="274320"/>
+          </a:xfrm>
+          <a:prstGeom prst="rect">
+            <a:avLst/>
+          </a:prstGeom>
+          <a:noFill/>
+        </p:spPr>
+        <p:txBody>
+          <a:bodyPr wrap="square" anchor="t">
+            <a:spAutoFit/>
+          </a:bodyPr>
+          <a:lstStyle/>
+          <a:p>
+            <a:pPr algn="l">
+              <a:spcAft>
+                <a:spcPts val="400"/>
+              </a:spcAft>
+            </a:pPr>
+            <a:r>
+              <a:rPr sz="1050" b="0" i="0">
+                <a:solidFill>
+                  <a:srgbClr val="6B7280"/>
+                </a:solidFill>
+                <a:latin typeface="Arial"/>
+              </a:rPr>
+              <a:t>deterministic</a:t>
+            </a:r>
+          </a:p>
+        </p:txBody>
+      </p:sp>
+      <p:sp>
+        <p:nvSpPr>
+          <p:cNvPr id="42" name="Rounded Rectangle 41"/>
+          <p:cNvSpPr/>
+          <p:nvPr/>
+        </p:nvSpPr>
+        <p:spPr>
+          <a:xfrm>
+            <a:off x="1965960" y="6089903"/>
+            <a:ext cx="256032" cy="164592"/>
+          </a:xfrm>
+          <a:prstGeom prst="roundRect">
+            <a:avLst/>
+          </a:prstGeom>
+          <a:solidFill>
             <a:srgbClr val="EEEAF9"/>
           </a:solidFill>
           <a:ln w="12700">
@@ -14153,13 +14238,13 @@
       </p:sp>
       <p:sp>
         <p:nvSpPr>
-          <p:cNvPr id="41" name="TextBox 40"/>
+          <p:cNvPr id="43" name="TextBox 42"/>
           <p:cNvSpPr txBox="1"/>
           <p:nvPr/>
         </p:nvSpPr>
         <p:spPr>
           <a:xfrm>
-            <a:off x="859536" y="6035040"/>
+            <a:off x="2276856" y="6035040"/>
             <a:ext cx="1097280" cy="274320"/>
           </a:xfrm>
           <a:prstGeom prst="rect">
@@ -14186,91 +14271,6 @@
                 <a:latin typeface="Arial"/>
               </a:rPr>
               <a:t>agent</a:t>
-            </a:r>
-          </a:p>
-        </p:txBody>
-      </p:sp>
-      <p:sp>
-        <p:nvSpPr>
-          <p:cNvPr id="42" name="Rounded Rectangle 41"/>
-          <p:cNvSpPr/>
-          <p:nvPr/>
-        </p:nvSpPr>
-        <p:spPr>
-          <a:xfrm>
-            <a:off x="1965960" y="6089903"/>
-            <a:ext cx="256032" cy="164592"/>
-          </a:xfrm>
-          <a:prstGeom prst="roundRect">
-            <a:avLst/>
-          </a:prstGeom>
-          <a:solidFill>
-            <a:srgbClr val="E6F0F7"/>
-          </a:solidFill>
-          <a:ln w="12700">
-            <a:solidFill>
-              <a:srgbClr val="2C6C9C"/>
-            </a:solidFill>
-          </a:ln>
-          <a:effectLst/>
-        </p:spPr>
-        <p:style>
-          <a:lnRef idx="1">
-            <a:schemeClr val="accent1"/>
-          </a:lnRef>
-          <a:fillRef idx="3">
-            <a:schemeClr val="accent1"/>
-          </a:fillRef>
-          <a:effectRef idx="2">
-            <a:schemeClr val="accent1"/>
-          </a:effectRef>
-          <a:fontRef idx="minor">
-            <a:schemeClr val="lt1"/>
-          </a:fontRef>
-        </p:style>
-        <p:txBody>
-          <a:bodyPr rtlCol="0" anchor="ctr"/>
-          <a:lstStyle/>
-          <a:p>
-            <a:pPr algn="ctr"/>
-          </a:p>
-        </p:txBody>
-      </p:sp>
-      <p:sp>
-        <p:nvSpPr>
-          <p:cNvPr id="43" name="TextBox 42"/>
-          <p:cNvSpPr txBox="1"/>
-          <p:nvPr/>
-        </p:nvSpPr>
-        <p:spPr>
-          <a:xfrm>
-            <a:off x="2276856" y="6035040"/>
-            <a:ext cx="1097280" cy="274320"/>
-          </a:xfrm>
-          <a:prstGeom prst="rect">
-            <a:avLst/>
-          </a:prstGeom>
-          <a:noFill/>
-        </p:spPr>
-        <p:txBody>
-          <a:bodyPr wrap="square" anchor="t">
-            <a:spAutoFit/>
-          </a:bodyPr>
-          <a:lstStyle/>
-          <a:p>
-            <a:pPr algn="l">
-              <a:spcAft>
-                <a:spcPts val="400"/>
-              </a:spcAft>
-            </a:pPr>
-            <a:r>
-              <a:rPr sz="1050" b="0" i="0">
-                <a:solidFill>
-                  <a:srgbClr val="6B7280"/>
-                </a:solidFill>
-                <a:latin typeface="Arial"/>
-              </a:rPr>
-              <a:t>system</a:t>
             </a:r>
           </a:p>
         </p:txBody>
@@ -14355,7 +14355,7 @@
                 </a:solidFill>
                 <a:latin typeface="Arial"/>
               </a:rPr>
-              <a:t>person</a:t>
+              <a:t>human</a:t>
             </a:r>
           </a:p>
         </p:txBody>
